--- a/docs/lab-01/Презентация_GoCue_КТ1.pptx
+++ b/docs/lab-01/Презентация_GoCue_КТ1.pptx
@@ -6849,6 +6849,119 @@
                 <a:latin typeface="Arial"/>
               </a:rPr>
               <a:t>Завершить дело или отложить до следующего визита.</a:t>
+            </a:r>
+          </a:p>
+        </p:txBody>
+      </p:sp>
+      <p:sp>
+        <p:nvSpPr>
+          <p:cNvPr id="27" name="Rounded Rectangle 26"/>
+          <p:cNvSpPr/>
+          <p:nvPr/>
+        </p:nvSpPr>
+        <p:spPr>
+          <a:xfrm>
+            <a:off x="5715000" y="5596128"/>
+            <a:ext cx="5650992" cy="530352"/>
+          </a:xfrm>
+          <a:prstGeom prst="roundRect">
+            <a:avLst>
+              <a:gd name="adj" fmla="val 12000"/>
+            </a:avLst>
+          </a:prstGeom>
+          <a:solidFill>
+            <a:srgbClr val="E2EEF8"/>
+          </a:solidFill>
+          <a:ln>
+            <a:noFill/>
+          </a:ln>
+        </p:spPr>
+        <p:style>
+          <a:lnRef idx="1">
+            <a:schemeClr val="accent1"/>
+          </a:lnRef>
+          <a:fillRef idx="3">
+            <a:schemeClr val="accent1"/>
+          </a:fillRef>
+          <a:effectRef idx="2">
+            <a:schemeClr val="accent1"/>
+          </a:effectRef>
+          <a:fontRef idx="minor">
+            <a:schemeClr val="lt1"/>
+          </a:fontRef>
+        </p:style>
+        <p:txBody>
+          <a:bodyPr rtlCol="0" anchor="ctr"/>
+          <a:lstStyle/>
+          <a:p>
+            <a:pPr algn="ctr"/>
+          </a:p>
+        </p:txBody>
+      </p:sp>
+      <p:sp>
+        <p:nvSpPr>
+          <p:cNvPr id="28" name="TextBox 27"/>
+          <p:cNvSpPr txBox="1"/>
+          <p:nvPr/>
+        </p:nvSpPr>
+        <p:spPr>
+          <a:xfrm>
+            <a:off x="5916168" y="5696712"/>
+            <a:ext cx="841248" cy="274320"/>
+          </a:xfrm>
+          <a:prstGeom prst="rect">
+            <a:avLst/>
+          </a:prstGeom>
+          <a:noFill/>
+        </p:spPr>
+        <p:txBody>
+          <a:bodyPr wrap="square" lIns="0" rIns="0" tIns="0" bIns="0" anchor="ctr">
+            <a:spAutoFit/>
+          </a:bodyPr>
+          <a:lstStyle/>
+          <a:p>
+            <a:r>
+              <a:rPr sz="1100" b="1">
+                <a:solidFill>
+                  <a:srgbClr val="2B71B2"/>
+                </a:solidFill>
+                <a:latin typeface="Arial"/>
+              </a:rPr>
+              <a:t>Виджет</a:t>
+            </a:r>
+          </a:p>
+        </p:txBody>
+      </p:sp>
+      <p:sp>
+        <p:nvSpPr>
+          <p:cNvPr id="29" name="TextBox 28"/>
+          <p:cNvSpPr txBox="1"/>
+          <p:nvPr/>
+        </p:nvSpPr>
+        <p:spPr>
+          <a:xfrm>
+            <a:off x="6821424" y="5641848"/>
+            <a:ext cx="4233672" cy="429768"/>
+          </a:xfrm>
+          <a:prstGeom prst="rect">
+            <a:avLst/>
+          </a:prstGeom>
+          <a:noFill/>
+        </p:spPr>
+        <p:txBody>
+          <a:bodyPr wrap="square" lIns="0" rIns="0" tIns="0" bIns="0" anchor="ctr">
+            <a:spAutoFit/>
+          </a:bodyPr>
+          <a:lstStyle/>
+          <a:p>
+            <a:r>
+              <a:rPr sz="1050" b="0">
+                <a:solidFill>
+                  <a:srgbClr val="203041"/>
+                </a:solidFill>
+                <a:latin typeface="Arial"/>
+              </a:rPr>
+              <a:t>Список на главном экране; сам не всплывает — при визите нужно уведомление.</a:t>
             </a:r>
           </a:p>
         </p:txBody>

--- a/docs/lab-01/Презентация_GoCue_КТ1.pptx
+++ b/docs/lab-01/Презентация_GoCue_КТ1.pptx
@@ -3427,35 +3427,13 @@
               </a:spcAft>
             </a:pPr>
             <a:r>
-              <a:rPr sz="2500" b="1">
+              <a:rPr sz="2300" b="1">
                 <a:solidFill>
                   <a:srgbClr val="1C364E"/>
                 </a:solidFill>
                 <a:latin typeface="Arial"/>
               </a:rPr>
-              <a:t>Дела вспоминаются там,</a:t>
-            </a:r>
-          </a:p>
-          <a:p>
-            <a:pPr algn="l">
-              <a:lnSpc>
-                <a:spcPct val="110000"/>
-              </a:lnSpc>
-              <a:spcBef>
-                <a:spcPts val="0"/>
-              </a:spcBef>
-              <a:spcAft>
-                <a:spcPts val="0"/>
-              </a:spcAft>
-            </a:pPr>
-            <a:r>
-              <a:rPr sz="2500" b="1">
-                <a:solidFill>
-                  <a:srgbClr val="1C364E"/>
-                </a:solidFill>
-                <a:latin typeface="Arial"/>
-              </a:rPr>
-              <a:t>где их можно сделать</a:t>
+              <a:t>Мобильное приложение для напоминаний о делах в подходящем месте</a:t>
             </a:r>
           </a:p>
         </p:txBody>
@@ -6920,6 +6898,17 @@
           </a:bodyPr>
           <a:lstStyle/>
           <a:p>
+            <a:pPr algn="l">
+              <a:lnSpc>
+                <a:spcPct val="110000"/>
+              </a:lnSpc>
+              <a:spcBef>
+                <a:spcPts val="0"/>
+              </a:spcBef>
+              <a:spcAft>
+                <a:spcPts val="0"/>
+              </a:spcAft>
+            </a:pPr>
             <a:r>
               <a:rPr sz="1100" b="1">
                 <a:solidFill>
@@ -6954,6 +6943,17 @@
           </a:bodyPr>
           <a:lstStyle/>
           <a:p>
+            <a:pPr algn="l">
+              <a:lnSpc>
+                <a:spcPct val="110000"/>
+              </a:lnSpc>
+              <a:spcBef>
+                <a:spcPts val="0"/>
+              </a:spcBef>
+              <a:spcAft>
+                <a:spcPts val="0"/>
+              </a:spcAft>
+            </a:pPr>
             <a:r>
               <a:rPr sz="1050" b="0">
                 <a:solidFill>
@@ -7112,14 +7112,59 @@
                 </a:solidFill>
                 <a:latin typeface="Arial"/>
               </a:rPr>
-              <a:t>Контекст отделён от GPS</a:t>
+              <a:t>Принятые решения и открытые вопросы</a:t>
+            </a:r>
+          </a:p>
+        </p:txBody>
+      </p:sp>
+      <p:sp>
+        <p:nvSpPr>
+          <p:cNvPr id="5" name="TextBox 4"/>
+          <p:cNvSpPr txBox="1"/>
+          <p:nvPr/>
+        </p:nvSpPr>
+        <p:spPr>
+          <a:xfrm>
+            <a:off x="822960" y="1271016"/>
+            <a:ext cx="10698480" cy="365760"/>
+          </a:xfrm>
+          <a:prstGeom prst="rect">
+            <a:avLst/>
+          </a:prstGeom>
+          <a:noFill/>
+        </p:spPr>
+        <p:txBody>
+          <a:bodyPr wrap="square" lIns="0" rIns="0" tIns="0" bIns="0" anchor="t">
+            <a:spAutoFit/>
+          </a:bodyPr>
+          <a:lstStyle/>
+          <a:p>
+            <a:pPr algn="l">
+              <a:lnSpc>
+                <a:spcPct val="110000"/>
+              </a:lnSpc>
+              <a:spcBef>
+                <a:spcPts val="0"/>
+              </a:spcBef>
+              <a:spcAft>
+                <a:spcPts val="0"/>
+              </a:spcAft>
+            </a:pPr>
+            <a:r>
+              <a:rPr sz="1200" b="0">
+                <a:solidFill>
+                  <a:srgbClr val="647384"/>
+                </a:solidFill>
+                <a:latin typeface="Arial"/>
+              </a:rPr>
+              <a:t>Категории из исходной таблицы сохранены; незавершённые решения названы прямо.</a:t>
             </a:r>
           </a:p>
         </p:txBody>
       </p:sp>
       <p:pic>
         <p:nvPicPr>
-          <p:cNvPr id="5" name="Picture 4" descr="image.png"/>
+          <p:cNvPr id="6" name="Picture 5" descr="image.png"/>
           <p:cNvPicPr>
             <a:picLocks noChangeAspect="1"/>
           </p:cNvPicPr>
@@ -7143,7 +7188,7 @@
       </p:pic>
       <p:sp>
         <p:nvSpPr>
-          <p:cNvPr id="6" name="TextBox 5"/>
+          <p:cNvPr id="7" name="TextBox 6"/>
           <p:cNvSpPr txBox="1"/>
           <p:nvPr/>
         </p:nvSpPr>
@@ -7188,19 +7233,195 @@
       </p:sp>
       <p:sp>
         <p:nvSpPr>
-          <p:cNvPr id="7" name="Rounded Rectangle 6"/>
+          <p:cNvPr id="8" name="Rectangle 7"/>
           <p:cNvSpPr/>
           <p:nvPr/>
         </p:nvSpPr>
         <p:spPr>
           <a:xfrm>
-            <a:off x="822960" y="1901952"/>
-            <a:ext cx="1929384" cy="1490472"/>
-          </a:xfrm>
-          <a:prstGeom prst="roundRect">
-            <a:avLst>
-              <a:gd name="adj" fmla="val 12000"/>
-            </a:avLst>
+            <a:off x="822960" y="1627632"/>
+            <a:ext cx="10552176" cy="438912"/>
+          </a:xfrm>
+          <a:prstGeom prst="rect">
+            <a:avLst/>
+          </a:prstGeom>
+          <a:solidFill>
+            <a:srgbClr val="E2EEF8"/>
+          </a:solidFill>
+          <a:ln>
+            <a:noFill/>
+          </a:ln>
+        </p:spPr>
+        <p:style>
+          <a:lnRef idx="1">
+            <a:schemeClr val="accent1"/>
+          </a:lnRef>
+          <a:fillRef idx="3">
+            <a:schemeClr val="accent1"/>
+          </a:fillRef>
+          <a:effectRef idx="2">
+            <a:schemeClr val="accent1"/>
+          </a:effectRef>
+          <a:fontRef idx="minor">
+            <a:schemeClr val="lt1"/>
+          </a:fontRef>
+        </p:style>
+        <p:txBody>
+          <a:bodyPr rtlCol="0" anchor="ctr"/>
+          <a:lstStyle/>
+          <a:p>
+            <a:pPr algn="ctr"/>
+          </a:p>
+        </p:txBody>
+      </p:sp>
+      <p:sp>
+        <p:nvSpPr>
+          <p:cNvPr id="9" name="TextBox 8"/>
+          <p:cNvSpPr txBox="1"/>
+          <p:nvPr/>
+        </p:nvSpPr>
+        <p:spPr>
+          <a:xfrm>
+            <a:off x="1005840" y="1737360"/>
+            <a:ext cx="1965960" cy="228600"/>
+          </a:xfrm>
+          <a:prstGeom prst="rect">
+            <a:avLst/>
+          </a:prstGeom>
+          <a:noFill/>
+        </p:spPr>
+        <p:txBody>
+          <a:bodyPr wrap="square" lIns="0" rIns="0" tIns="0" bIns="0" anchor="t">
+            <a:spAutoFit/>
+          </a:bodyPr>
+          <a:lstStyle/>
+          <a:p>
+            <a:pPr algn="l">
+              <a:lnSpc>
+                <a:spcPct val="110000"/>
+              </a:lnSpc>
+              <a:spcBef>
+                <a:spcPts val="0"/>
+              </a:spcBef>
+              <a:spcAft>
+                <a:spcPts val="0"/>
+              </a:spcAft>
+            </a:pPr>
+            <a:r>
+              <a:rPr sz="1100" b="1">
+                <a:solidFill>
+                  <a:srgbClr val="2B71B2"/>
+                </a:solidFill>
+                <a:latin typeface="Arial"/>
+              </a:rPr>
+              <a:t>Решение</a:t>
+            </a:r>
+          </a:p>
+        </p:txBody>
+      </p:sp>
+      <p:sp>
+        <p:nvSpPr>
+          <p:cNvPr id="10" name="TextBox 9"/>
+          <p:cNvSpPr txBox="1"/>
+          <p:nvPr/>
+        </p:nvSpPr>
+        <p:spPr>
+          <a:xfrm>
+            <a:off x="3044952" y="1737360"/>
+            <a:ext cx="3438144" cy="228600"/>
+          </a:xfrm>
+          <a:prstGeom prst="rect">
+            <a:avLst/>
+          </a:prstGeom>
+          <a:noFill/>
+        </p:spPr>
+        <p:txBody>
+          <a:bodyPr wrap="square" lIns="0" rIns="0" tIns="0" bIns="0" anchor="t">
+            <a:spAutoFit/>
+          </a:bodyPr>
+          <a:lstStyle/>
+          <a:p>
+            <a:pPr algn="l">
+              <a:lnSpc>
+                <a:spcPct val="110000"/>
+              </a:lnSpc>
+              <a:spcBef>
+                <a:spcPts val="0"/>
+              </a:spcBef>
+              <a:spcAft>
+                <a:spcPts val="0"/>
+              </a:spcAft>
+            </a:pPr>
+            <a:r>
+              <a:rPr sz="1100" b="1">
+                <a:solidFill>
+                  <a:srgbClr val="2B71B2"/>
+                </a:solidFill>
+                <a:latin typeface="Arial"/>
+              </a:rPr>
+              <a:t>Выбор</a:t>
+            </a:r>
+          </a:p>
+        </p:txBody>
+      </p:sp>
+      <p:sp>
+        <p:nvSpPr>
+          <p:cNvPr id="11" name="TextBox 10"/>
+          <p:cNvSpPr txBox="1"/>
+          <p:nvPr/>
+        </p:nvSpPr>
+        <p:spPr>
+          <a:xfrm>
+            <a:off x="6556248" y="1737360"/>
+            <a:ext cx="4498848" cy="228600"/>
+          </a:xfrm>
+          <a:prstGeom prst="rect">
+            <a:avLst/>
+          </a:prstGeom>
+          <a:noFill/>
+        </p:spPr>
+        <p:txBody>
+          <a:bodyPr wrap="square" lIns="0" rIns="0" tIns="0" bIns="0" anchor="t">
+            <a:spAutoFit/>
+          </a:bodyPr>
+          <a:lstStyle/>
+          <a:p>
+            <a:pPr algn="l">
+              <a:lnSpc>
+                <a:spcPct val="110000"/>
+              </a:lnSpc>
+              <a:spcBef>
+                <a:spcPts val="0"/>
+              </a:spcBef>
+              <a:spcAft>
+                <a:spcPts val="0"/>
+              </a:spcAft>
+            </a:pPr>
+            <a:r>
+              <a:rPr sz="1100" b="1">
+                <a:solidFill>
+                  <a:srgbClr val="2B71B2"/>
+                </a:solidFill>
+                <a:latin typeface="Arial"/>
+              </a:rPr>
+              <a:t>Обоснование / статус</a:t>
+            </a:r>
+          </a:p>
+        </p:txBody>
+      </p:sp>
+      <p:sp>
+        <p:nvSpPr>
+          <p:cNvPr id="12" name="Rectangle 11"/>
+          <p:cNvSpPr/>
+          <p:nvPr/>
+        </p:nvSpPr>
+        <p:spPr>
+          <a:xfrm>
+            <a:off x="822960" y="2139696"/>
+            <a:ext cx="10552176" cy="539496"/>
+          </a:xfrm>
+          <a:prstGeom prst="rect">
+            <a:avLst/>
           </a:prstGeom>
           <a:solidFill>
             <a:srgbClr val="EFF4F9"/>
@@ -7233,154 +7454,330 @@
       </p:sp>
       <p:sp>
         <p:nvSpPr>
-          <p:cNvPr id="8" name="TextBox 7"/>
-          <p:cNvSpPr txBox="1"/>
-          <p:nvPr/>
-        </p:nvSpPr>
-        <p:spPr>
-          <a:xfrm>
-            <a:off x="969264" y="2148840"/>
-            <a:ext cx="1645920" cy="466344"/>
-          </a:xfrm>
-          <a:prstGeom prst="rect">
-            <a:avLst/>
-          </a:prstGeom>
-          <a:noFill/>
-        </p:spPr>
-        <p:txBody>
-          <a:bodyPr wrap="square" lIns="0" rIns="0" tIns="0" bIns="0" anchor="t">
-            <a:spAutoFit/>
-          </a:bodyPr>
-          <a:lstStyle/>
-          <a:p>
-            <a:pPr algn="ctr">
-              <a:lnSpc>
-                <a:spcPct val="110000"/>
-              </a:lnSpc>
-              <a:spcBef>
-                <a:spcPts val="0"/>
-              </a:spcBef>
-              <a:spcAft>
-                <a:spcPts val="0"/>
-              </a:spcAft>
-            </a:pPr>
-            <a:r>
-              <a:rPr sz="1400" b="1">
+          <p:cNvPr id="13" name="TextBox 12"/>
+          <p:cNvSpPr txBox="1"/>
+          <p:nvPr/>
+        </p:nvSpPr>
+        <p:spPr>
+          <a:xfrm>
+            <a:off x="1005840" y="2276856"/>
+            <a:ext cx="1956816" cy="320040"/>
+          </a:xfrm>
+          <a:prstGeom prst="rect">
+            <a:avLst/>
+          </a:prstGeom>
+          <a:noFill/>
+        </p:spPr>
+        <p:txBody>
+          <a:bodyPr wrap="square" lIns="0" rIns="0" tIns="0" bIns="0" anchor="t">
+            <a:spAutoFit/>
+          </a:bodyPr>
+          <a:lstStyle/>
+          <a:p>
+            <a:pPr algn="l">
+              <a:lnSpc>
+                <a:spcPct val="110000"/>
+              </a:lnSpc>
+              <a:spcBef>
+                <a:spcPts val="0"/>
+              </a:spcBef>
+              <a:spcAft>
+                <a:spcPts val="0"/>
+              </a:spcAft>
+            </a:pPr>
+            <a:r>
+              <a:rPr sz="1110" b="1">
                 <a:solidFill>
                   <a:srgbClr val="1C364E"/>
                 </a:solidFill>
                 <a:latin typeface="Arial"/>
               </a:rPr>
-              <a:t>ОС / геозона</a:t>
-            </a:r>
-          </a:p>
-        </p:txBody>
-      </p:sp>
-      <p:sp>
-        <p:nvSpPr>
-          <p:cNvPr id="9" name="TextBox 8"/>
-          <p:cNvSpPr txBox="1"/>
-          <p:nvPr/>
-        </p:nvSpPr>
-        <p:spPr>
-          <a:xfrm>
-            <a:off x="969264" y="2743200"/>
-            <a:ext cx="1645920" cy="438912"/>
-          </a:xfrm>
-          <a:prstGeom prst="rect">
-            <a:avLst/>
-          </a:prstGeom>
-          <a:noFill/>
-        </p:spPr>
-        <p:txBody>
-          <a:bodyPr wrap="square" lIns="0" rIns="0" tIns="0" bIns="0" anchor="t">
-            <a:spAutoFit/>
-          </a:bodyPr>
-          <a:lstStyle/>
-          <a:p>
-            <a:pPr algn="ctr">
-              <a:lnSpc>
-                <a:spcPct val="110000"/>
-              </a:lnSpc>
-              <a:spcBef>
-                <a:spcPts val="0"/>
-              </a:spcBef>
-              <a:spcAft>
-                <a:spcPts val="0"/>
-              </a:spcAft>
-            </a:pPr>
-            <a:r>
-              <a:rPr sz="1100" b="0">
-                <a:solidFill>
-                  <a:srgbClr val="647384"/>
-                </a:solidFill>
-                <a:latin typeface="Arial"/>
-              </a:rPr>
-              <a:t>сырой вход и выход</a:t>
-            </a:r>
-          </a:p>
-        </p:txBody>
-      </p:sp>
-      <p:sp>
-        <p:nvSpPr>
-          <p:cNvPr id="10" name="TextBox 9"/>
-          <p:cNvSpPr txBox="1"/>
-          <p:nvPr/>
-        </p:nvSpPr>
-        <p:spPr>
-          <a:xfrm>
-            <a:off x="2788920" y="2459736"/>
-            <a:ext cx="192024" cy="274320"/>
-          </a:xfrm>
-          <a:prstGeom prst="rect">
-            <a:avLst/>
-          </a:prstGeom>
-          <a:noFill/>
-        </p:spPr>
-        <p:txBody>
-          <a:bodyPr wrap="square" lIns="0" rIns="0" tIns="0" bIns="0" anchor="t">
-            <a:spAutoFit/>
-          </a:bodyPr>
-          <a:lstStyle/>
-          <a:p>
-            <a:pPr algn="l">
-              <a:lnSpc>
-                <a:spcPct val="110000"/>
-              </a:lnSpc>
-              <a:spcBef>
-                <a:spcPts val="0"/>
-              </a:spcBef>
-              <a:spcAft>
-                <a:spcPts val="0"/>
-              </a:spcAft>
-            </a:pPr>
-            <a:r>
-              <a:rPr sz="1800" b="1">
-                <a:solidFill>
-                  <a:srgbClr val="2B71B2"/>
-                </a:solidFill>
-                <a:latin typeface="Arial"/>
-              </a:rPr>
-              <a:t>→</a:t>
-            </a:r>
-          </a:p>
-        </p:txBody>
-      </p:sp>
-      <p:sp>
-        <p:nvSpPr>
-          <p:cNvPr id="11" name="Rounded Rectangle 10"/>
+              <a:t>Тип приложения</a:t>
+            </a:r>
+          </a:p>
+        </p:txBody>
+      </p:sp>
+      <p:sp>
+        <p:nvSpPr>
+          <p:cNvPr id="14" name="TextBox 13"/>
+          <p:cNvSpPr txBox="1"/>
+          <p:nvPr/>
+        </p:nvSpPr>
+        <p:spPr>
+          <a:xfrm>
+            <a:off x="3044952" y="2276856"/>
+            <a:ext cx="3429000" cy="320040"/>
+          </a:xfrm>
+          <a:prstGeom prst="rect">
+            <a:avLst/>
+          </a:prstGeom>
+          <a:noFill/>
+        </p:spPr>
+        <p:txBody>
+          <a:bodyPr wrap="square" lIns="0" rIns="0" tIns="0" bIns="0" anchor="t">
+            <a:spAutoFit/>
+          </a:bodyPr>
+          <a:lstStyle/>
+          <a:p>
+            <a:pPr algn="l">
+              <a:lnSpc>
+                <a:spcPct val="110000"/>
+              </a:lnSpc>
+              <a:spcBef>
+                <a:spcPts val="0"/>
+              </a:spcBef>
+              <a:spcAft>
+                <a:spcPts val="0"/>
+              </a:spcAft>
+            </a:pPr>
+            <a:r>
+              <a:rPr sz="1090" b="0">
+                <a:solidFill>
+                  <a:srgbClr val="203041"/>
+                </a:solidFill>
+                <a:latin typeface="Arial"/>
+              </a:rPr>
+              <a:t>Нативный Android</a:t>
+            </a:r>
+          </a:p>
+        </p:txBody>
+      </p:sp>
+      <p:sp>
+        <p:nvSpPr>
+          <p:cNvPr id="15" name="TextBox 14"/>
+          <p:cNvSpPr txBox="1"/>
+          <p:nvPr/>
+        </p:nvSpPr>
+        <p:spPr>
+          <a:xfrm>
+            <a:off x="6556248" y="2276856"/>
+            <a:ext cx="4498848" cy="320040"/>
+          </a:xfrm>
+          <a:prstGeom prst="rect">
+            <a:avLst/>
+          </a:prstGeom>
+          <a:noFill/>
+        </p:spPr>
+        <p:txBody>
+          <a:bodyPr wrap="square" lIns="0" rIns="0" tIns="0" bIns="0" anchor="t">
+            <a:spAutoFit/>
+          </a:bodyPr>
+          <a:lstStyle/>
+          <a:p>
+            <a:pPr algn="l">
+              <a:lnSpc>
+                <a:spcPct val="110000"/>
+              </a:lnSpc>
+              <a:spcBef>
+                <a:spcPts val="0"/>
+              </a:spcBef>
+              <a:spcAft>
+                <a:spcPts val="0"/>
+              </a:spcAft>
+            </a:pPr>
+            <a:r>
+              <a:rPr sz="1080" b="0">
+                <a:solidFill>
+                  <a:srgbClr val="203041"/>
+                </a:solidFill>
+                <a:latin typeface="Arial"/>
+              </a:rPr>
+              <a:t>Мобильность, геозоны, уведомления.</a:t>
+            </a:r>
+          </a:p>
+        </p:txBody>
+      </p:sp>
+      <p:sp>
+        <p:nvSpPr>
+          <p:cNvPr id="16" name="Rectangle 15"/>
           <p:cNvSpPr/>
           <p:nvPr/>
         </p:nvSpPr>
         <p:spPr>
           <a:xfrm>
-            <a:off x="2990088" y="1901952"/>
-            <a:ext cx="1929384" cy="1490472"/>
-          </a:xfrm>
-          <a:prstGeom prst="roundRect">
-            <a:avLst>
-              <a:gd name="adj" fmla="val 12000"/>
-            </a:avLst>
+            <a:off x="822960" y="2770632"/>
+            <a:ext cx="10552176" cy="539496"/>
+          </a:xfrm>
+          <a:prstGeom prst="rect">
+            <a:avLst/>
+          </a:prstGeom>
+          <a:solidFill>
+            <a:srgbClr val="FFFFFF"/>
+          </a:solidFill>
+          <a:ln>
+            <a:noFill/>
+          </a:ln>
+        </p:spPr>
+        <p:style>
+          <a:lnRef idx="1">
+            <a:schemeClr val="accent1"/>
+          </a:lnRef>
+          <a:fillRef idx="3">
+            <a:schemeClr val="accent1"/>
+          </a:fillRef>
+          <a:effectRef idx="2">
+            <a:schemeClr val="accent1"/>
+          </a:effectRef>
+          <a:fontRef idx="minor">
+            <a:schemeClr val="lt1"/>
+          </a:fontRef>
+        </p:style>
+        <p:txBody>
+          <a:bodyPr rtlCol="0" anchor="ctr"/>
+          <a:lstStyle/>
+          <a:p>
+            <a:pPr algn="ctr"/>
+          </a:p>
+        </p:txBody>
+      </p:sp>
+      <p:sp>
+        <p:nvSpPr>
+          <p:cNvPr id="17" name="TextBox 16"/>
+          <p:cNvSpPr txBox="1"/>
+          <p:nvPr/>
+        </p:nvSpPr>
+        <p:spPr>
+          <a:xfrm>
+            <a:off x="1005840" y="2907791"/>
+            <a:ext cx="1956816" cy="320040"/>
+          </a:xfrm>
+          <a:prstGeom prst="rect">
+            <a:avLst/>
+          </a:prstGeom>
+          <a:noFill/>
+        </p:spPr>
+        <p:txBody>
+          <a:bodyPr wrap="square" lIns="0" rIns="0" tIns="0" bIns="0" anchor="t">
+            <a:spAutoFit/>
+          </a:bodyPr>
+          <a:lstStyle/>
+          <a:p>
+            <a:pPr algn="l">
+              <a:lnSpc>
+                <a:spcPct val="110000"/>
+              </a:lnSpc>
+              <a:spcBef>
+                <a:spcPts val="0"/>
+              </a:spcBef>
+              <a:spcAft>
+                <a:spcPts val="0"/>
+              </a:spcAft>
+            </a:pPr>
+            <a:r>
+              <a:rPr sz="1110" b="1">
+                <a:solidFill>
+                  <a:srgbClr val="1C364E"/>
+                </a:solidFill>
+                <a:latin typeface="Arial"/>
+              </a:rPr>
+              <a:t>Архитектура</a:t>
+            </a:r>
+          </a:p>
+        </p:txBody>
+      </p:sp>
+      <p:sp>
+        <p:nvSpPr>
+          <p:cNvPr id="18" name="TextBox 17"/>
+          <p:cNvSpPr txBox="1"/>
+          <p:nvPr/>
+        </p:nvSpPr>
+        <p:spPr>
+          <a:xfrm>
+            <a:off x="3044952" y="2907791"/>
+            <a:ext cx="3429000" cy="320040"/>
+          </a:xfrm>
+          <a:prstGeom prst="rect">
+            <a:avLst/>
+          </a:prstGeom>
+          <a:noFill/>
+        </p:spPr>
+        <p:txBody>
+          <a:bodyPr wrap="square" lIns="0" rIns="0" tIns="0" bIns="0" anchor="t">
+            <a:spAutoFit/>
+          </a:bodyPr>
+          <a:lstStyle/>
+          <a:p>
+            <a:pPr algn="l">
+              <a:lnSpc>
+                <a:spcPct val="110000"/>
+              </a:lnSpc>
+              <a:spcBef>
+                <a:spcPts val="0"/>
+              </a:spcBef>
+              <a:spcAft>
+                <a:spcPts val="0"/>
+              </a:spcAft>
+            </a:pPr>
+            <a:r>
+              <a:rPr sz="1090" b="0">
+                <a:solidFill>
+                  <a:srgbClr val="203041"/>
+                </a:solidFill>
+                <a:latin typeface="Arial"/>
+              </a:rPr>
+              <a:t>Presence → Context → Intent</a:t>
+            </a:r>
+          </a:p>
+        </p:txBody>
+      </p:sp>
+      <p:sp>
+        <p:nvSpPr>
+          <p:cNvPr id="19" name="TextBox 18"/>
+          <p:cNvSpPr txBox="1"/>
+          <p:nvPr/>
+        </p:nvSpPr>
+        <p:spPr>
+          <a:xfrm>
+            <a:off x="6556248" y="2907791"/>
+            <a:ext cx="4498848" cy="320040"/>
+          </a:xfrm>
+          <a:prstGeom prst="rect">
+            <a:avLst/>
+          </a:prstGeom>
+          <a:noFill/>
+        </p:spPr>
+        <p:txBody>
+          <a:bodyPr wrap="square" lIns="0" rIns="0" tIns="0" bIns="0" anchor="t">
+            <a:spAutoFit/>
+          </a:bodyPr>
+          <a:lstStyle/>
+          <a:p>
+            <a:pPr algn="l">
+              <a:lnSpc>
+                <a:spcPct val="110000"/>
+              </a:lnSpc>
+              <a:spcBef>
+                <a:spcPts val="0"/>
+              </a:spcBef>
+              <a:spcAft>
+                <a:spcPts val="0"/>
+              </a:spcAft>
+            </a:pPr>
+            <a:r>
+              <a:rPr sz="1080" b="0">
+                <a:solidFill>
+                  <a:srgbClr val="203041"/>
+                </a:solidFill>
+                <a:latin typeface="Arial"/>
+              </a:rPr>
+              <a:t>Логика намерений не получает GPS напрямую.</a:t>
+            </a:r>
+          </a:p>
+        </p:txBody>
+      </p:sp>
+      <p:sp>
+        <p:nvSpPr>
+          <p:cNvPr id="20" name="Rectangle 19"/>
+          <p:cNvSpPr/>
+          <p:nvPr/>
+        </p:nvSpPr>
+        <p:spPr>
+          <a:xfrm>
+            <a:off x="822960" y="3401568"/>
+            <a:ext cx="10552176" cy="539496"/>
+          </a:xfrm>
+          <a:prstGeom prst="rect">
+            <a:avLst/>
           </a:prstGeom>
           <a:solidFill>
             <a:srgbClr val="EFF4F9"/>
@@ -7413,154 +7810,330 @@
       </p:sp>
       <p:sp>
         <p:nvSpPr>
-          <p:cNvPr id="12" name="TextBox 11"/>
-          <p:cNvSpPr txBox="1"/>
-          <p:nvPr/>
-        </p:nvSpPr>
-        <p:spPr>
-          <a:xfrm>
-            <a:off x="3136392" y="2148840"/>
-            <a:ext cx="1645920" cy="466344"/>
-          </a:xfrm>
-          <a:prstGeom prst="rect">
-            <a:avLst/>
-          </a:prstGeom>
-          <a:noFill/>
-        </p:spPr>
-        <p:txBody>
-          <a:bodyPr wrap="square" lIns="0" rIns="0" tIns="0" bIns="0" anchor="t">
-            <a:spAutoFit/>
-          </a:bodyPr>
-          <a:lstStyle/>
-          <a:p>
-            <a:pPr algn="ctr">
-              <a:lnSpc>
-                <a:spcPct val="110000"/>
-              </a:lnSpc>
-              <a:spcBef>
-                <a:spcPts val="0"/>
-              </a:spcBef>
-              <a:spcAft>
-                <a:spcPts val="0"/>
-              </a:spcAft>
-            </a:pPr>
-            <a:r>
-              <a:rPr sz="1400" b="1">
+          <p:cNvPr id="21" name="TextBox 20"/>
+          <p:cNvSpPr txBox="1"/>
+          <p:nvPr/>
+        </p:nvSpPr>
+        <p:spPr>
+          <a:xfrm>
+            <a:off x="1005840" y="3538727"/>
+            <a:ext cx="1956816" cy="320040"/>
+          </a:xfrm>
+          <a:prstGeom prst="rect">
+            <a:avLst/>
+          </a:prstGeom>
+          <a:noFill/>
+        </p:spPr>
+        <p:txBody>
+          <a:bodyPr wrap="square" lIns="0" rIns="0" tIns="0" bIns="0" anchor="t">
+            <a:spAutoFit/>
+          </a:bodyPr>
+          <a:lstStyle/>
+          <a:p>
+            <a:pPr algn="l">
+              <a:lnSpc>
+                <a:spcPct val="110000"/>
+              </a:lnSpc>
+              <a:spcBef>
+                <a:spcPts val="0"/>
+              </a:spcBef>
+              <a:spcAft>
+                <a:spcPts val="0"/>
+              </a:spcAft>
+            </a:pPr>
+            <a:r>
+              <a:rPr sz="1110" b="1">
                 <a:solidFill>
                   <a:srgbClr val="1C364E"/>
                 </a:solidFill>
                 <a:latin typeface="Arial"/>
               </a:rPr>
-              <a:t>Presence Engine</a:t>
-            </a:r>
-          </a:p>
-        </p:txBody>
-      </p:sp>
-      <p:sp>
-        <p:nvSpPr>
-          <p:cNvPr id="13" name="TextBox 12"/>
-          <p:cNvSpPr txBox="1"/>
-          <p:nvPr/>
-        </p:nvSpPr>
-        <p:spPr>
-          <a:xfrm>
-            <a:off x="3136392" y="2743200"/>
-            <a:ext cx="1645920" cy="438912"/>
-          </a:xfrm>
-          <a:prstGeom prst="rect">
-            <a:avLst/>
-          </a:prstGeom>
-          <a:noFill/>
-        </p:spPr>
-        <p:txBody>
-          <a:bodyPr wrap="square" lIns="0" rIns="0" tIns="0" bIns="0" anchor="t">
-            <a:spAutoFit/>
-          </a:bodyPr>
-          <a:lstStyle/>
-          <a:p>
-            <a:pPr algn="ctr">
-              <a:lnSpc>
-                <a:spcPct val="110000"/>
-              </a:lnSpc>
-              <a:spcBef>
-                <a:spcPts val="0"/>
-              </a:spcBef>
-              <a:spcAft>
-                <a:spcPts val="0"/>
-              </a:spcAft>
-            </a:pPr>
-            <a:r>
-              <a:rPr sz="1100" b="0">
-                <a:solidFill>
-                  <a:srgbClr val="647384"/>
-                </a:solidFill>
-                <a:latin typeface="Arial"/>
-              </a:rPr>
-              <a:t>кандидат → визит</a:t>
-            </a:r>
-          </a:p>
-        </p:txBody>
-      </p:sp>
-      <p:sp>
-        <p:nvSpPr>
-          <p:cNvPr id="14" name="TextBox 13"/>
-          <p:cNvSpPr txBox="1"/>
-          <p:nvPr/>
-        </p:nvSpPr>
-        <p:spPr>
-          <a:xfrm>
-            <a:off x="4956048" y="2459736"/>
-            <a:ext cx="192024" cy="274320"/>
-          </a:xfrm>
-          <a:prstGeom prst="rect">
-            <a:avLst/>
-          </a:prstGeom>
-          <a:noFill/>
-        </p:spPr>
-        <p:txBody>
-          <a:bodyPr wrap="square" lIns="0" rIns="0" tIns="0" bIns="0" anchor="t">
-            <a:spAutoFit/>
-          </a:bodyPr>
-          <a:lstStyle/>
-          <a:p>
-            <a:pPr algn="l">
-              <a:lnSpc>
-                <a:spcPct val="110000"/>
-              </a:lnSpc>
-              <a:spcBef>
-                <a:spcPts val="0"/>
-              </a:spcBef>
-              <a:spcAft>
-                <a:spcPts val="0"/>
-              </a:spcAft>
-            </a:pPr>
-            <a:r>
-              <a:rPr sz="1800" b="1">
-                <a:solidFill>
-                  <a:srgbClr val="2B71B2"/>
-                </a:solidFill>
-                <a:latin typeface="Arial"/>
-              </a:rPr>
-              <a:t>→</a:t>
-            </a:r>
-          </a:p>
-        </p:txBody>
-      </p:sp>
-      <p:sp>
-        <p:nvSpPr>
-          <p:cNvPr id="15" name="Rounded Rectangle 14"/>
+              <a:t>Backend и БД</a:t>
+            </a:r>
+          </a:p>
+        </p:txBody>
+      </p:sp>
+      <p:sp>
+        <p:nvSpPr>
+          <p:cNvPr id="22" name="TextBox 21"/>
+          <p:cNvSpPr txBox="1"/>
+          <p:nvPr/>
+        </p:nvSpPr>
+        <p:spPr>
+          <a:xfrm>
+            <a:off x="3044952" y="3538727"/>
+            <a:ext cx="3429000" cy="320040"/>
+          </a:xfrm>
+          <a:prstGeom prst="rect">
+            <a:avLst/>
+          </a:prstGeom>
+          <a:noFill/>
+        </p:spPr>
+        <p:txBody>
+          <a:bodyPr wrap="square" lIns="0" rIns="0" tIns="0" bIns="0" anchor="t">
+            <a:spAutoFit/>
+          </a:bodyPr>
+          <a:lstStyle/>
+          <a:p>
+            <a:pPr algn="l">
+              <a:lnSpc>
+                <a:spcPct val="110000"/>
+              </a:lnSpc>
+              <a:spcBef>
+                <a:spcPts val="0"/>
+              </a:spcBef>
+              <a:spcAft>
+                <a:spcPts val="0"/>
+              </a:spcAft>
+            </a:pPr>
+            <a:r>
+              <a:rPr sz="1090" b="0">
+                <a:solidFill>
+                  <a:srgbClr val="203041"/>
+                </a:solidFill>
+                <a:latin typeface="Arial"/>
+              </a:rPr>
+              <a:t>Сервера нет; хранение локально</a:t>
+            </a:r>
+          </a:p>
+        </p:txBody>
+      </p:sp>
+      <p:sp>
+        <p:nvSpPr>
+          <p:cNvPr id="23" name="TextBox 22"/>
+          <p:cNvSpPr txBox="1"/>
+          <p:nvPr/>
+        </p:nvSpPr>
+        <p:spPr>
+          <a:xfrm>
+            <a:off x="6556248" y="3538727"/>
+            <a:ext cx="4498848" cy="320040"/>
+          </a:xfrm>
+          <a:prstGeom prst="rect">
+            <a:avLst/>
+          </a:prstGeom>
+          <a:noFill/>
+        </p:spPr>
+        <p:txBody>
+          <a:bodyPr wrap="square" lIns="0" rIns="0" tIns="0" bIns="0" anchor="t">
+            <a:spAutoFit/>
+          </a:bodyPr>
+          <a:lstStyle/>
+          <a:p>
+            <a:pPr algn="l">
+              <a:lnSpc>
+                <a:spcPct val="110000"/>
+              </a:lnSpc>
+              <a:spcBef>
+                <a:spcPts val="0"/>
+              </a:spcBef>
+              <a:spcAft>
+                <a:spcPts val="0"/>
+              </a:spcAft>
+            </a:pPr>
+            <a:r>
+              <a:rPr sz="1080" b="0">
+                <a:solidFill>
+                  <a:srgbClr val="203041"/>
+                </a:solidFill>
+                <a:latin typeface="Arial"/>
+              </a:rPr>
+              <a:t>Конкретная библиотека БД — при прототипе.</a:t>
+            </a:r>
+          </a:p>
+        </p:txBody>
+      </p:sp>
+      <p:sp>
+        <p:nvSpPr>
+          <p:cNvPr id="24" name="Rectangle 23"/>
           <p:cNvSpPr/>
           <p:nvPr/>
         </p:nvSpPr>
         <p:spPr>
           <a:xfrm>
-            <a:off x="5157216" y="1901952"/>
-            <a:ext cx="1929384" cy="1490472"/>
-          </a:xfrm>
-          <a:prstGeom prst="roundRect">
-            <a:avLst>
-              <a:gd name="adj" fmla="val 12000"/>
-            </a:avLst>
+            <a:off x="822960" y="4032504"/>
+            <a:ext cx="10552176" cy="539496"/>
+          </a:xfrm>
+          <a:prstGeom prst="rect">
+            <a:avLst/>
+          </a:prstGeom>
+          <a:solidFill>
+            <a:srgbClr val="FFFFFF"/>
+          </a:solidFill>
+          <a:ln>
+            <a:noFill/>
+          </a:ln>
+        </p:spPr>
+        <p:style>
+          <a:lnRef idx="1">
+            <a:schemeClr val="accent1"/>
+          </a:lnRef>
+          <a:fillRef idx="3">
+            <a:schemeClr val="accent1"/>
+          </a:fillRef>
+          <a:effectRef idx="2">
+            <a:schemeClr val="accent1"/>
+          </a:effectRef>
+          <a:fontRef idx="minor">
+            <a:schemeClr val="lt1"/>
+          </a:fontRef>
+        </p:style>
+        <p:txBody>
+          <a:bodyPr rtlCol="0" anchor="ctr"/>
+          <a:lstStyle/>
+          <a:p>
+            <a:pPr algn="ctr"/>
+          </a:p>
+        </p:txBody>
+      </p:sp>
+      <p:sp>
+        <p:nvSpPr>
+          <p:cNvPr id="25" name="TextBox 24"/>
+          <p:cNvSpPr txBox="1"/>
+          <p:nvPr/>
+        </p:nvSpPr>
+        <p:spPr>
+          <a:xfrm>
+            <a:off x="1005840" y="4169664"/>
+            <a:ext cx="1956816" cy="320040"/>
+          </a:xfrm>
+          <a:prstGeom prst="rect">
+            <a:avLst/>
+          </a:prstGeom>
+          <a:noFill/>
+        </p:spPr>
+        <p:txBody>
+          <a:bodyPr wrap="square" lIns="0" rIns="0" tIns="0" bIns="0" anchor="t">
+            <a:spAutoFit/>
+          </a:bodyPr>
+          <a:lstStyle/>
+          <a:p>
+            <a:pPr algn="l">
+              <a:lnSpc>
+                <a:spcPct val="110000"/>
+              </a:lnSpc>
+              <a:spcBef>
+                <a:spcPts val="0"/>
+              </a:spcBef>
+              <a:spcAft>
+                <a:spcPts val="0"/>
+              </a:spcAft>
+            </a:pPr>
+            <a:r>
+              <a:rPr sz="1110" b="1">
+                <a:solidFill>
+                  <a:srgbClr val="1C364E"/>
+                </a:solidFill>
+                <a:latin typeface="Arial"/>
+              </a:rPr>
+              <a:t>Frontend</a:t>
+            </a:r>
+          </a:p>
+        </p:txBody>
+      </p:sp>
+      <p:sp>
+        <p:nvSpPr>
+          <p:cNvPr id="26" name="TextBox 25"/>
+          <p:cNvSpPr txBox="1"/>
+          <p:nvPr/>
+        </p:nvSpPr>
+        <p:spPr>
+          <a:xfrm>
+            <a:off x="3044952" y="4169664"/>
+            <a:ext cx="3429000" cy="320040"/>
+          </a:xfrm>
+          <a:prstGeom prst="rect">
+            <a:avLst/>
+          </a:prstGeom>
+          <a:noFill/>
+        </p:spPr>
+        <p:txBody>
+          <a:bodyPr wrap="square" lIns="0" rIns="0" tIns="0" bIns="0" anchor="t">
+            <a:spAutoFit/>
+          </a:bodyPr>
+          <a:lstStyle/>
+          <a:p>
+            <a:pPr algn="l">
+              <a:lnSpc>
+                <a:spcPct val="110000"/>
+              </a:lnSpc>
+              <a:spcBef>
+                <a:spcPts val="0"/>
+              </a:spcBef>
+              <a:spcAft>
+                <a:spcPts val="0"/>
+              </a:spcAft>
+            </a:pPr>
+            <a:r>
+              <a:rPr sz="1090" b="0">
+                <a:solidFill>
+                  <a:srgbClr val="203041"/>
+                </a:solidFill>
+                <a:latin typeface="Arial"/>
+              </a:rPr>
+              <a:t>Android-экраны намерений и мест</a:t>
+            </a:r>
+          </a:p>
+        </p:txBody>
+      </p:sp>
+      <p:sp>
+        <p:nvSpPr>
+          <p:cNvPr id="27" name="TextBox 26"/>
+          <p:cNvSpPr txBox="1"/>
+          <p:nvPr/>
+        </p:nvSpPr>
+        <p:spPr>
+          <a:xfrm>
+            <a:off x="6556248" y="4169664"/>
+            <a:ext cx="4498848" cy="320040"/>
+          </a:xfrm>
+          <a:prstGeom prst="rect">
+            <a:avLst/>
+          </a:prstGeom>
+          <a:noFill/>
+        </p:spPr>
+        <p:txBody>
+          <a:bodyPr wrap="square" lIns="0" rIns="0" tIns="0" bIns="0" anchor="t">
+            <a:spAutoFit/>
+          </a:bodyPr>
+          <a:lstStyle/>
+          <a:p>
+            <a:pPr algn="l">
+              <a:lnSpc>
+                <a:spcPct val="110000"/>
+              </a:lnSpc>
+              <a:spcBef>
+                <a:spcPts val="0"/>
+              </a:spcBef>
+              <a:spcAft>
+                <a:spcPts val="0"/>
+              </a:spcAft>
+            </a:pPr>
+            <a:r>
+              <a:rPr sz="1080" b="0">
+                <a:solidFill>
+                  <a:srgbClr val="203041"/>
+                </a:solidFill>
+                <a:latin typeface="Arial"/>
+              </a:rPr>
+              <a:t>UI-стек ещё нужно подтвердить.</a:t>
+            </a:r>
+          </a:p>
+        </p:txBody>
+      </p:sp>
+      <p:sp>
+        <p:nvSpPr>
+          <p:cNvPr id="28" name="Rectangle 27"/>
+          <p:cNvSpPr/>
+          <p:nvPr/>
+        </p:nvSpPr>
+        <p:spPr>
+          <a:xfrm>
+            <a:off x="822960" y="4663440"/>
+            <a:ext cx="10552176" cy="539496"/>
+          </a:xfrm>
+          <a:prstGeom prst="rect">
+            <a:avLst/>
           </a:prstGeom>
           <a:solidFill>
             <a:srgbClr val="EFF4F9"/>
@@ -7593,149 +8166,149 @@
       </p:sp>
       <p:sp>
         <p:nvSpPr>
-          <p:cNvPr id="16" name="TextBox 15"/>
-          <p:cNvSpPr txBox="1"/>
-          <p:nvPr/>
-        </p:nvSpPr>
-        <p:spPr>
-          <a:xfrm>
-            <a:off x="5303520" y="2148840"/>
-            <a:ext cx="1645920" cy="466344"/>
-          </a:xfrm>
-          <a:prstGeom prst="rect">
-            <a:avLst/>
-          </a:prstGeom>
-          <a:noFill/>
-        </p:spPr>
-        <p:txBody>
-          <a:bodyPr wrap="square" lIns="0" rIns="0" tIns="0" bIns="0" anchor="t">
-            <a:spAutoFit/>
-          </a:bodyPr>
-          <a:lstStyle/>
-          <a:p>
-            <a:pPr algn="ctr">
-              <a:lnSpc>
-                <a:spcPct val="110000"/>
-              </a:lnSpc>
-              <a:spcBef>
-                <a:spcPts val="0"/>
-              </a:spcBef>
-              <a:spcAft>
-                <a:spcPts val="0"/>
-              </a:spcAft>
-            </a:pPr>
-            <a:r>
-              <a:rPr sz="1400" b="1">
+          <p:cNvPr id="29" name="TextBox 28"/>
+          <p:cNvSpPr txBox="1"/>
+          <p:nvPr/>
+        </p:nvSpPr>
+        <p:spPr>
+          <a:xfrm>
+            <a:off x="1005840" y="4800600"/>
+            <a:ext cx="1956816" cy="320040"/>
+          </a:xfrm>
+          <a:prstGeom prst="rect">
+            <a:avLst/>
+          </a:prstGeom>
+          <a:noFill/>
+        </p:spPr>
+        <p:txBody>
+          <a:bodyPr wrap="square" lIns="0" rIns="0" tIns="0" bIns="0" anchor="t">
+            <a:spAutoFit/>
+          </a:bodyPr>
+          <a:lstStyle/>
+          <a:p>
+            <a:pPr algn="l">
+              <a:lnSpc>
+                <a:spcPct val="110000"/>
+              </a:lnSpc>
+              <a:spcBef>
+                <a:spcPts val="0"/>
+              </a:spcBef>
+              <a:spcAft>
+                <a:spcPts val="0"/>
+              </a:spcAft>
+            </a:pPr>
+            <a:r>
+              <a:rPr sz="1110" b="1">
                 <a:solidFill>
                   <a:srgbClr val="1C364E"/>
                 </a:solidFill>
                 <a:latin typeface="Arial"/>
               </a:rPr>
-              <a:t>Context Snapshot</a:t>
-            </a:r>
-          </a:p>
-        </p:txBody>
-      </p:sp>
-      <p:sp>
-        <p:nvSpPr>
-          <p:cNvPr id="17" name="TextBox 16"/>
-          <p:cNvSpPr txBox="1"/>
-          <p:nvPr/>
-        </p:nvSpPr>
-        <p:spPr>
-          <a:xfrm>
-            <a:off x="5303520" y="2743200"/>
-            <a:ext cx="1645920" cy="438912"/>
-          </a:xfrm>
-          <a:prstGeom prst="rect">
-            <a:avLst/>
-          </a:prstGeom>
-          <a:noFill/>
-        </p:spPr>
-        <p:txBody>
-          <a:bodyPr wrap="square" lIns="0" rIns="0" tIns="0" bIns="0" anchor="t">
-            <a:spAutoFit/>
-          </a:bodyPr>
-          <a:lstStyle/>
-          <a:p>
-            <a:pPr algn="ctr">
-              <a:lnSpc>
-                <a:spcPct val="110000"/>
-              </a:lnSpc>
-              <a:spcBef>
-                <a:spcPts val="0"/>
-              </a:spcBef>
-              <a:spcAft>
-                <a:spcPts val="0"/>
-              </a:spcAft>
-            </a:pPr>
-            <a:r>
-              <a:rPr sz="1100" b="0">
-                <a:solidFill>
-                  <a:srgbClr val="647384"/>
-                </a:solidFill>
-                <a:latin typeface="Arial"/>
-              </a:rPr>
-              <a:t>нормализованное состояние</a:t>
-            </a:r>
-          </a:p>
-        </p:txBody>
-      </p:sp>
-      <p:sp>
-        <p:nvSpPr>
-          <p:cNvPr id="18" name="TextBox 17"/>
-          <p:cNvSpPr txBox="1"/>
-          <p:nvPr/>
-        </p:nvSpPr>
-        <p:spPr>
-          <a:xfrm>
-            <a:off x="7123176" y="2459736"/>
-            <a:ext cx="192024" cy="274320"/>
-          </a:xfrm>
-          <a:prstGeom prst="rect">
-            <a:avLst/>
-          </a:prstGeom>
-          <a:noFill/>
-        </p:spPr>
-        <p:txBody>
-          <a:bodyPr wrap="square" lIns="0" rIns="0" tIns="0" bIns="0" anchor="t">
-            <a:spAutoFit/>
-          </a:bodyPr>
-          <a:lstStyle/>
-          <a:p>
-            <a:pPr algn="l">
-              <a:lnSpc>
-                <a:spcPct val="110000"/>
-              </a:lnSpc>
-              <a:spcBef>
-                <a:spcPts val="0"/>
-              </a:spcBef>
-              <a:spcAft>
-                <a:spcPts val="0"/>
-              </a:spcAft>
-            </a:pPr>
-            <a:r>
-              <a:rPr sz="1800" b="1">
-                <a:solidFill>
-                  <a:srgbClr val="2B71B2"/>
-                </a:solidFill>
-                <a:latin typeface="Arial"/>
-              </a:rPr>
-              <a:t>→</a:t>
-            </a:r>
-          </a:p>
-        </p:txBody>
-      </p:sp>
-      <p:sp>
-        <p:nvSpPr>
-          <p:cNvPr id="19" name="Rounded Rectangle 18"/>
+              <a:t>Репозиторий и трекер</a:t>
+            </a:r>
+          </a:p>
+        </p:txBody>
+      </p:sp>
+      <p:sp>
+        <p:nvSpPr>
+          <p:cNvPr id="30" name="TextBox 29"/>
+          <p:cNvSpPr txBox="1"/>
+          <p:nvPr/>
+        </p:nvSpPr>
+        <p:spPr>
+          <a:xfrm>
+            <a:off x="3044952" y="4800600"/>
+            <a:ext cx="3429000" cy="320040"/>
+          </a:xfrm>
+          <a:prstGeom prst="rect">
+            <a:avLst/>
+          </a:prstGeom>
+          <a:noFill/>
+        </p:spPr>
+        <p:txBody>
+          <a:bodyPr wrap="square" lIns="0" rIns="0" tIns="0" bIns="0" anchor="t">
+            <a:spAutoFit/>
+          </a:bodyPr>
+          <a:lstStyle/>
+          <a:p>
+            <a:pPr algn="l">
+              <a:lnSpc>
+                <a:spcPct val="110000"/>
+              </a:lnSpc>
+              <a:spcBef>
+                <a:spcPts val="0"/>
+              </a:spcBef>
+              <a:spcAft>
+                <a:spcPts val="0"/>
+              </a:spcAft>
+            </a:pPr>
+            <a:r>
+              <a:rPr sz="1090" b="0">
+                <a:solidFill>
+                  <a:srgbClr val="203041"/>
+                </a:solidFill>
+                <a:latin typeface="Arial"/>
+              </a:rPr>
+              <a:t>GitHub + Projects</a:t>
+            </a:r>
+          </a:p>
+        </p:txBody>
+      </p:sp>
+      <p:sp>
+        <p:nvSpPr>
+          <p:cNvPr id="31" name="TextBox 30"/>
+          <p:cNvSpPr txBox="1"/>
+          <p:nvPr/>
+        </p:nvSpPr>
+        <p:spPr>
+          <a:xfrm>
+            <a:off x="6556248" y="4800600"/>
+            <a:ext cx="4498848" cy="320040"/>
+          </a:xfrm>
+          <a:prstGeom prst="rect">
+            <a:avLst/>
+          </a:prstGeom>
+          <a:noFill/>
+        </p:spPr>
+        <p:txBody>
+          <a:bodyPr wrap="square" lIns="0" rIns="0" tIns="0" bIns="0" anchor="t">
+            <a:spAutoFit/>
+          </a:bodyPr>
+          <a:lstStyle/>
+          <a:p>
+            <a:pPr algn="l">
+              <a:lnSpc>
+                <a:spcPct val="110000"/>
+              </a:lnSpc>
+              <a:spcBef>
+                <a:spcPts val="0"/>
+              </a:spcBef>
+              <a:spcAft>
+                <a:spcPts val="0"/>
+              </a:spcAft>
+            </a:pPr>
+            <a:r>
+              <a:rPr sz="1080" b="0">
+                <a:solidFill>
+                  <a:srgbClr val="203041"/>
+                </a:solidFill>
+                <a:latin typeface="Arial"/>
+              </a:rPr>
+              <a:t>Код, документы и задачи в одном месте.</a:t>
+            </a:r>
+          </a:p>
+        </p:txBody>
+      </p:sp>
+      <p:sp>
+        <p:nvSpPr>
+          <p:cNvPr id="32" name="Rounded Rectangle 31"/>
           <p:cNvSpPr/>
           <p:nvPr/>
         </p:nvSpPr>
         <p:spPr>
           <a:xfrm>
-            <a:off x="7324344" y="1901952"/>
-            <a:ext cx="1929384" cy="1490472"/>
+            <a:off x="822960" y="5449824"/>
+            <a:ext cx="10552176" cy="566928"/>
           </a:xfrm>
           <a:prstGeom prst="roundRect">
             <a:avLst>
@@ -7773,27 +8346,27 @@
       </p:sp>
       <p:sp>
         <p:nvSpPr>
-          <p:cNvPr id="20" name="TextBox 19"/>
-          <p:cNvSpPr txBox="1"/>
-          <p:nvPr/>
-        </p:nvSpPr>
-        <p:spPr>
-          <a:xfrm>
-            <a:off x="7470648" y="2148840"/>
-            <a:ext cx="1645920" cy="466344"/>
-          </a:xfrm>
-          <a:prstGeom prst="rect">
-            <a:avLst/>
-          </a:prstGeom>
-          <a:noFill/>
-        </p:spPr>
-        <p:txBody>
-          <a:bodyPr wrap="square" lIns="0" rIns="0" tIns="0" bIns="0" anchor="t">
-            <a:spAutoFit/>
-          </a:bodyPr>
-          <a:lstStyle/>
-          <a:p>
-            <a:pPr algn="ctr">
+          <p:cNvPr id="33" name="TextBox 32"/>
+          <p:cNvSpPr txBox="1"/>
+          <p:nvPr/>
+        </p:nvSpPr>
+        <p:spPr>
+          <a:xfrm>
+            <a:off x="1078992" y="5568696"/>
+            <a:ext cx="10030968" cy="338328"/>
+          </a:xfrm>
+          <a:prstGeom prst="rect">
+            <a:avLst/>
+          </a:prstGeom>
+          <a:noFill/>
+        </p:spPr>
+        <p:txBody>
+          <a:bodyPr wrap="square" lIns="0" rIns="0" tIns="0" bIns="0" anchor="t">
+            <a:spAutoFit/>
+          </a:bodyPr>
+          <a:lstStyle/>
+          <a:p>
+            <a:pPr algn="l">
               <a:lnSpc>
                 <a:spcPct val="110000"/>
               </a:lnSpc>
@@ -7811,367 +8384,7 @@
                 </a:solidFill>
                 <a:latin typeface="Arial"/>
               </a:rPr>
-              <a:t>Intent Engine</a:t>
-            </a:r>
-          </a:p>
-        </p:txBody>
-      </p:sp>
-      <p:sp>
-        <p:nvSpPr>
-          <p:cNvPr id="21" name="TextBox 20"/>
-          <p:cNvSpPr txBox="1"/>
-          <p:nvPr/>
-        </p:nvSpPr>
-        <p:spPr>
-          <a:xfrm>
-            <a:off x="7470648" y="2743200"/>
-            <a:ext cx="1645920" cy="438912"/>
-          </a:xfrm>
-          <a:prstGeom prst="rect">
-            <a:avLst/>
-          </a:prstGeom>
-          <a:noFill/>
-        </p:spPr>
-        <p:txBody>
-          <a:bodyPr wrap="square" lIns="0" rIns="0" tIns="0" bIns="0" anchor="t">
-            <a:spAutoFit/>
-          </a:bodyPr>
-          <a:lstStyle/>
-          <a:p>
-            <a:pPr algn="ctr">
-              <a:lnSpc>
-                <a:spcPct val="110000"/>
-              </a:lnSpc>
-              <a:spcBef>
-                <a:spcPts val="0"/>
-              </a:spcBef>
-              <a:spcAft>
-                <a:spcPts val="0"/>
-              </a:spcAft>
-            </a:pPr>
-            <a:r>
-              <a:rPr sz="1100" b="0">
-                <a:solidFill>
-                  <a:srgbClr val="FFFFFF"/>
-                </a:solidFill>
-                <a:latin typeface="Arial"/>
-              </a:rPr>
-              <a:t>проверка требований</a:t>
-            </a:r>
-          </a:p>
-        </p:txBody>
-      </p:sp>
-      <p:sp>
-        <p:nvSpPr>
-          <p:cNvPr id="22" name="TextBox 21"/>
-          <p:cNvSpPr txBox="1"/>
-          <p:nvPr/>
-        </p:nvSpPr>
-        <p:spPr>
-          <a:xfrm>
-            <a:off x="9290304" y="2459736"/>
-            <a:ext cx="192024" cy="274320"/>
-          </a:xfrm>
-          <a:prstGeom prst="rect">
-            <a:avLst/>
-          </a:prstGeom>
-          <a:noFill/>
-        </p:spPr>
-        <p:txBody>
-          <a:bodyPr wrap="square" lIns="0" rIns="0" tIns="0" bIns="0" anchor="t">
-            <a:spAutoFit/>
-          </a:bodyPr>
-          <a:lstStyle/>
-          <a:p>
-            <a:pPr algn="l">
-              <a:lnSpc>
-                <a:spcPct val="110000"/>
-              </a:lnSpc>
-              <a:spcBef>
-                <a:spcPts val="0"/>
-              </a:spcBef>
-              <a:spcAft>
-                <a:spcPts val="0"/>
-              </a:spcAft>
-            </a:pPr>
-            <a:r>
-              <a:rPr sz="1800" b="1">
-                <a:solidFill>
-                  <a:srgbClr val="2B71B2"/>
-                </a:solidFill>
-                <a:latin typeface="Arial"/>
-              </a:rPr>
-              <a:t>→</a:t>
-            </a:r>
-          </a:p>
-        </p:txBody>
-      </p:sp>
-      <p:sp>
-        <p:nvSpPr>
-          <p:cNvPr id="23" name="Rounded Rectangle 22"/>
-          <p:cNvSpPr/>
-          <p:nvPr/>
-        </p:nvSpPr>
-        <p:spPr>
-          <a:xfrm>
-            <a:off x="9491472" y="1901952"/>
-            <a:ext cx="1929384" cy="1490472"/>
-          </a:xfrm>
-          <a:prstGeom prst="roundRect">
-            <a:avLst>
-              <a:gd name="adj" fmla="val 12000"/>
-            </a:avLst>
-          </a:prstGeom>
-          <a:solidFill>
-            <a:srgbClr val="EFF4F9"/>
-          </a:solidFill>
-          <a:ln>
-            <a:noFill/>
-          </a:ln>
-        </p:spPr>
-        <p:style>
-          <a:lnRef idx="1">
-            <a:schemeClr val="accent1"/>
-          </a:lnRef>
-          <a:fillRef idx="3">
-            <a:schemeClr val="accent1"/>
-          </a:fillRef>
-          <a:effectRef idx="2">
-            <a:schemeClr val="accent1"/>
-          </a:effectRef>
-          <a:fontRef idx="minor">
-            <a:schemeClr val="lt1"/>
-          </a:fontRef>
-        </p:style>
-        <p:txBody>
-          <a:bodyPr rtlCol="0" anchor="ctr"/>
-          <a:lstStyle/>
-          <a:p>
-            <a:pPr algn="ctr"/>
-          </a:p>
-        </p:txBody>
-      </p:sp>
-      <p:sp>
-        <p:nvSpPr>
-          <p:cNvPr id="24" name="TextBox 23"/>
-          <p:cNvSpPr txBox="1"/>
-          <p:nvPr/>
-        </p:nvSpPr>
-        <p:spPr>
-          <a:xfrm>
-            <a:off x="9637776" y="2148840"/>
-            <a:ext cx="1645920" cy="466344"/>
-          </a:xfrm>
-          <a:prstGeom prst="rect">
-            <a:avLst/>
-          </a:prstGeom>
-          <a:noFill/>
-        </p:spPr>
-        <p:txBody>
-          <a:bodyPr wrap="square" lIns="0" rIns="0" tIns="0" bIns="0" anchor="t">
-            <a:spAutoFit/>
-          </a:bodyPr>
-          <a:lstStyle/>
-          <a:p>
-            <a:pPr algn="ctr">
-              <a:lnSpc>
-                <a:spcPct val="110000"/>
-              </a:lnSpc>
-              <a:spcBef>
-                <a:spcPts val="0"/>
-              </a:spcBef>
-              <a:spcAft>
-                <a:spcPts val="0"/>
-              </a:spcAft>
-            </a:pPr>
-            <a:r>
-              <a:rPr sz="1400" b="1">
-                <a:solidFill>
-                  <a:srgbClr val="1C364E"/>
-                </a:solidFill>
-                <a:latin typeface="Arial"/>
-              </a:rPr>
-              <a:t>Уведомление</a:t>
-            </a:r>
-          </a:p>
-        </p:txBody>
-      </p:sp>
-      <p:sp>
-        <p:nvSpPr>
-          <p:cNvPr id="25" name="TextBox 24"/>
-          <p:cNvSpPr txBox="1"/>
-          <p:nvPr/>
-        </p:nvSpPr>
-        <p:spPr>
-          <a:xfrm>
-            <a:off x="9637776" y="2743200"/>
-            <a:ext cx="1645920" cy="438912"/>
-          </a:xfrm>
-          <a:prstGeom prst="rect">
-            <a:avLst/>
-          </a:prstGeom>
-          <a:noFill/>
-        </p:spPr>
-        <p:txBody>
-          <a:bodyPr wrap="square" lIns="0" rIns="0" tIns="0" bIns="0" anchor="t">
-            <a:spAutoFit/>
-          </a:bodyPr>
-          <a:lstStyle/>
-          <a:p>
-            <a:pPr algn="ctr">
-              <a:lnSpc>
-                <a:spcPct val="110000"/>
-              </a:lnSpc>
-              <a:spcBef>
-                <a:spcPts val="0"/>
-              </a:spcBef>
-              <a:spcAft>
-                <a:spcPts val="0"/>
-              </a:spcAft>
-            </a:pPr>
-            <a:r>
-              <a:rPr sz="1100" b="0">
-                <a:solidFill>
-                  <a:srgbClr val="647384"/>
-                </a:solidFill>
-                <a:latin typeface="Arial"/>
-              </a:rPr>
-              <a:t>одна группа за визит</a:t>
-            </a:r>
-          </a:p>
-        </p:txBody>
-      </p:sp>
-      <p:sp>
-        <p:nvSpPr>
-          <p:cNvPr id="26" name="Rounded Rectangle 25"/>
-          <p:cNvSpPr/>
-          <p:nvPr/>
-        </p:nvSpPr>
-        <p:spPr>
-          <a:xfrm>
-            <a:off x="822960" y="3877056"/>
-            <a:ext cx="10552176" cy="813816"/>
-          </a:xfrm>
-          <a:prstGeom prst="roundRect">
-            <a:avLst>
-              <a:gd name="adj" fmla="val 12000"/>
-            </a:avLst>
-          </a:prstGeom>
-          <a:solidFill>
-            <a:srgbClr val="E2EEF8"/>
-          </a:solidFill>
-          <a:ln>
-            <a:noFill/>
-          </a:ln>
-        </p:spPr>
-        <p:style>
-          <a:lnRef idx="1">
-            <a:schemeClr val="accent1"/>
-          </a:lnRef>
-          <a:fillRef idx="3">
-            <a:schemeClr val="accent1"/>
-          </a:fillRef>
-          <a:effectRef idx="2">
-            <a:schemeClr val="accent1"/>
-          </a:effectRef>
-          <a:fontRef idx="minor">
-            <a:schemeClr val="lt1"/>
-          </a:fontRef>
-        </p:style>
-        <p:txBody>
-          <a:bodyPr rtlCol="0" anchor="ctr"/>
-          <a:lstStyle/>
-          <a:p>
-            <a:pPr algn="ctr"/>
-          </a:p>
-        </p:txBody>
-      </p:sp>
-      <p:sp>
-        <p:nvSpPr>
-          <p:cNvPr id="27" name="TextBox 26"/>
-          <p:cNvSpPr txBox="1"/>
-          <p:nvPr/>
-        </p:nvSpPr>
-        <p:spPr>
-          <a:xfrm>
-            <a:off x="1088136" y="4096512"/>
-            <a:ext cx="10030968" cy="384048"/>
-          </a:xfrm>
-          <a:prstGeom prst="rect">
-            <a:avLst/>
-          </a:prstGeom>
-          <a:noFill/>
-        </p:spPr>
-        <p:txBody>
-          <a:bodyPr wrap="square" lIns="0" rIns="0" tIns="0" bIns="0" anchor="t">
-            <a:spAutoFit/>
-          </a:bodyPr>
-          <a:lstStyle/>
-          <a:p>
-            <a:pPr algn="l">
-              <a:lnSpc>
-                <a:spcPct val="110000"/>
-              </a:lnSpc>
-              <a:spcBef>
-                <a:spcPts val="0"/>
-              </a:spcBef>
-              <a:spcAft>
-                <a:spcPts val="0"/>
-              </a:spcAft>
-            </a:pPr>
-            <a:r>
-              <a:rPr sz="1700" b="1">
-                <a:solidFill>
-                  <a:srgbClr val="1C364E"/>
-                </a:solidFill>
-                <a:latin typeface="Arial"/>
-              </a:rPr>
-              <a:t>Логика намерений не получает координаты GPS — только подтверждённый контекст.</a:t>
-            </a:r>
-          </a:p>
-        </p:txBody>
-      </p:sp>
-      <p:sp>
-        <p:nvSpPr>
-          <p:cNvPr id="28" name="TextBox 27"/>
-          <p:cNvSpPr txBox="1"/>
-          <p:nvPr/>
-        </p:nvSpPr>
-        <p:spPr>
-          <a:xfrm>
-            <a:off x="822960" y="5065776"/>
-            <a:ext cx="10515600" cy="640080"/>
-          </a:xfrm>
-          <a:prstGeom prst="rect">
-            <a:avLst/>
-          </a:prstGeom>
-          <a:noFill/>
-        </p:spPr>
-        <p:txBody>
-          <a:bodyPr wrap="square" lIns="0" rIns="0" tIns="0" bIns="0" anchor="t">
-            <a:spAutoFit/>
-          </a:bodyPr>
-          <a:lstStyle/>
-          <a:p>
-            <a:pPr algn="l">
-              <a:lnSpc>
-                <a:spcPct val="110000"/>
-              </a:lnSpc>
-              <a:spcBef>
-                <a:spcPts val="0"/>
-              </a:spcBef>
-              <a:spcAft>
-                <a:spcPts val="0"/>
-              </a:spcAft>
-            </a:pPr>
-            <a:r>
-              <a:rPr sz="1300" b="0">
-                <a:solidFill>
-                  <a:srgbClr val="203041"/>
-                </a:solidFill>
-                <a:latin typeface="Arial"/>
-              </a:rPr>
-              <a:t>Платформа: нативный Android. Хранение: локально. Сначала детерминированные правила и симулятор; после этого — одна реальная геозона на Samsung Galaxy S25.</a:t>
+              <a:t>Геозона → подтверждённый визит → контекст → подходящие дела → одно уведомление.</a:t>
             </a:r>
           </a:p>
         </p:txBody>
@@ -9170,7 +9383,7 @@
                 </a:solidFill>
                 <a:latin typeface="Arial"/>
               </a:rPr>
-              <a:t>Проблема: дело известно, момент упущен</a:t>
+              <a:t>Проблема, пользователи и решение</a:t>
             </a:r>
           </a:p>
         </p:txBody>
@@ -9252,98 +9465,8 @@
         </p:nvSpPr>
         <p:spPr>
           <a:xfrm>
-            <a:off x="822960" y="1591056"/>
-            <a:ext cx="10561320" cy="932688"/>
-          </a:xfrm>
-          <a:prstGeom prst="roundRect">
-            <a:avLst>
-              <a:gd name="adj" fmla="val 12000"/>
-            </a:avLst>
-          </a:prstGeom>
-          <a:solidFill>
-            <a:srgbClr val="E2EEF8"/>
-          </a:solidFill>
-          <a:ln>
-            <a:noFill/>
-          </a:ln>
-        </p:spPr>
-        <p:style>
-          <a:lnRef idx="1">
-            <a:schemeClr val="accent1"/>
-          </a:lnRef>
-          <a:fillRef idx="3">
-            <a:schemeClr val="accent1"/>
-          </a:fillRef>
-          <a:effectRef idx="2">
-            <a:schemeClr val="accent1"/>
-          </a:effectRef>
-          <a:fontRef idx="minor">
-            <a:schemeClr val="lt1"/>
-          </a:fontRef>
-        </p:style>
-        <p:txBody>
-          <a:bodyPr rtlCol="0" anchor="ctr"/>
-          <a:lstStyle/>
-          <a:p>
-            <a:pPr algn="ctr"/>
-          </a:p>
-        </p:txBody>
-      </p:sp>
-      <p:sp>
-        <p:nvSpPr>
-          <p:cNvPr id="8" name="TextBox 7"/>
-          <p:cNvSpPr txBox="1"/>
-          <p:nvPr/>
-        </p:nvSpPr>
-        <p:spPr>
-          <a:xfrm>
-            <a:off x="1097280" y="1792224"/>
-            <a:ext cx="10012680" cy="576072"/>
-          </a:xfrm>
-          <a:prstGeom prst="rect">
-            <a:avLst/>
-          </a:prstGeom>
-          <a:noFill/>
-        </p:spPr>
-        <p:txBody>
-          <a:bodyPr wrap="square" lIns="0" rIns="0" tIns="0" bIns="0" anchor="t">
-            <a:spAutoFit/>
-          </a:bodyPr>
-          <a:lstStyle/>
-          <a:p>
-            <a:pPr algn="l">
-              <a:lnSpc>
-                <a:spcPct val="110000"/>
-              </a:lnSpc>
-              <a:spcBef>
-                <a:spcPts val="0"/>
-              </a:spcBef>
-              <a:spcAft>
-                <a:spcPts val="0"/>
-              </a:spcAft>
-            </a:pPr>
-            <a:r>
-              <a:rPr sz="2200" b="1">
-                <a:solidFill>
-                  <a:srgbClr val="1C364E"/>
-                </a:solidFill>
-                <a:latin typeface="Arial"/>
-              </a:rPr>
-              <a:t>«Купить батарейки» записано — но вспоминается уже после магазина.</a:t>
-            </a:r>
-          </a:p>
-        </p:txBody>
-      </p:sp>
-      <p:sp>
-        <p:nvSpPr>
-          <p:cNvPr id="9" name="Rounded Rectangle 8"/>
-          <p:cNvSpPr/>
-          <p:nvPr/>
-        </p:nvSpPr>
-        <p:spPr>
-          <a:xfrm>
-            <a:off x="822960" y="2752344"/>
-            <a:ext cx="3337560" cy="2267712"/>
+            <a:off x="822960" y="1563624"/>
+            <a:ext cx="3364992" cy="1792224"/>
           </a:xfrm>
           <a:prstGeom prst="roundRect">
             <a:avLst>
@@ -9381,14 +9504,14 @@
       </p:sp>
       <p:sp>
         <p:nvSpPr>
-          <p:cNvPr id="10" name="TextBox 9"/>
-          <p:cNvSpPr txBox="1"/>
-          <p:nvPr/>
-        </p:nvSpPr>
-        <p:spPr>
-          <a:xfrm>
-            <a:off x="1051560" y="2953512"/>
-            <a:ext cx="2880360" cy="310896"/>
+          <p:cNvPr id="8" name="TextBox 7"/>
+          <p:cNvSpPr txBox="1"/>
+          <p:nvPr/>
+        </p:nvSpPr>
+        <p:spPr>
+          <a:xfrm>
+            <a:off x="1051560" y="1764792"/>
+            <a:ext cx="2907792" cy="310896"/>
           </a:xfrm>
           <a:prstGeom prst="rect">
             <a:avLst/>
@@ -9419,66 +9542,66 @@
                 </a:solidFill>
                 <a:latin typeface="Arial"/>
               </a:rPr>
-              <a:t>Кому</a:t>
-            </a:r>
-          </a:p>
-        </p:txBody>
-      </p:sp>
-      <p:sp>
-        <p:nvSpPr>
-          <p:cNvPr id="11" name="TextBox 10"/>
-          <p:cNvSpPr txBox="1"/>
-          <p:nvPr/>
-        </p:nvSpPr>
-        <p:spPr>
-          <a:xfrm>
-            <a:off x="1051560" y="3374136"/>
-            <a:ext cx="2880360" cy="1490472"/>
-          </a:xfrm>
-          <a:prstGeom prst="rect">
-            <a:avLst/>
-          </a:prstGeom>
-          <a:noFill/>
-        </p:spPr>
-        <p:txBody>
-          <a:bodyPr wrap="square" lIns="0" rIns="0" tIns="0" bIns="0" anchor="t">
-            <a:spAutoFit/>
-          </a:bodyPr>
-          <a:lstStyle/>
-          <a:p>
-            <a:pPr algn="l">
-              <a:lnSpc>
-                <a:spcPct val="110000"/>
-              </a:lnSpc>
-              <a:spcBef>
-                <a:spcPts val="0"/>
-              </a:spcBef>
-              <a:spcAft>
-                <a:spcPts val="0"/>
-              </a:spcAft>
-            </a:pPr>
-            <a:r>
-              <a:rPr sz="1600" b="0">
+              <a:t>Проблема</a:t>
+            </a:r>
+          </a:p>
+        </p:txBody>
+      </p:sp>
+      <p:sp>
+        <p:nvSpPr>
+          <p:cNvPr id="9" name="TextBox 8"/>
+          <p:cNvSpPr txBox="1"/>
+          <p:nvPr/>
+        </p:nvSpPr>
+        <p:spPr>
+          <a:xfrm>
+            <a:off x="1051560" y="2185416"/>
+            <a:ext cx="2907792" cy="1014983"/>
+          </a:xfrm>
+          <a:prstGeom prst="rect">
+            <a:avLst/>
+          </a:prstGeom>
+          <a:noFill/>
+        </p:spPr>
+        <p:txBody>
+          <a:bodyPr wrap="square" lIns="0" rIns="0" tIns="0" bIns="0" anchor="t">
+            <a:spAutoFit/>
+          </a:bodyPr>
+          <a:lstStyle/>
+          <a:p>
+            <a:pPr algn="l">
+              <a:lnSpc>
+                <a:spcPct val="110000"/>
+              </a:lnSpc>
+              <a:spcBef>
+                <a:spcPts val="0"/>
+              </a:spcBef>
+              <a:spcAft>
+                <a:spcPts val="0"/>
+              </a:spcAft>
+            </a:pPr>
+            <a:r>
+              <a:rPr sz="1300" b="0">
                 <a:solidFill>
                   <a:srgbClr val="203041"/>
                 </a:solidFill>
                 <a:latin typeface="Arial"/>
               </a:rPr>
-              <a:t>Людям с бытовыми поручениями: покупками, аптекой, почтой.</a:t>
-            </a:r>
-          </a:p>
-        </p:txBody>
-      </p:sp>
-      <p:sp>
-        <p:nvSpPr>
-          <p:cNvPr id="12" name="Rounded Rectangle 11"/>
+              <a:t>О деле вспоминают после ухода из нужного места; список надо проверять самому.</a:t>
+            </a:r>
+          </a:p>
+        </p:txBody>
+      </p:sp>
+      <p:sp>
+        <p:nvSpPr>
+          <p:cNvPr id="10" name="Rounded Rectangle 9"/>
           <p:cNvSpPr/>
           <p:nvPr/>
         </p:nvSpPr>
         <p:spPr>
           <a:xfrm>
-            <a:off x="4425696" y="2752344"/>
-            <a:ext cx="3337560" cy="2267712"/>
+            <a:off x="4425696" y="1563624"/>
+            <a:ext cx="3364992" cy="1792224"/>
           </a:xfrm>
           <a:prstGeom prst="roundRect">
             <a:avLst>
@@ -9516,14 +9639,14 @@
       </p:sp>
       <p:sp>
         <p:nvSpPr>
-          <p:cNvPr id="13" name="TextBox 12"/>
-          <p:cNvSpPr txBox="1"/>
-          <p:nvPr/>
-        </p:nvSpPr>
-        <p:spPr>
-          <a:xfrm>
-            <a:off x="4654296" y="2953512"/>
-            <a:ext cx="2880360" cy="310896"/>
+          <p:cNvPr id="11" name="TextBox 10"/>
+          <p:cNvSpPr txBox="1"/>
+          <p:nvPr/>
+        </p:nvSpPr>
+        <p:spPr>
+          <a:xfrm>
+            <a:off x="4654296" y="1764792"/>
+            <a:ext cx="2907792" cy="310896"/>
           </a:xfrm>
           <a:prstGeom prst="rect">
             <a:avLst/>
@@ -9554,66 +9677,66 @@
                 </a:solidFill>
                 <a:latin typeface="Arial"/>
               </a:rPr>
-              <a:t>Почему это происходит</a:t>
-            </a:r>
-          </a:p>
-        </p:txBody>
-      </p:sp>
-      <p:sp>
-        <p:nvSpPr>
-          <p:cNvPr id="14" name="TextBox 13"/>
-          <p:cNvSpPr txBox="1"/>
-          <p:nvPr/>
-        </p:nvSpPr>
-        <p:spPr>
-          <a:xfrm>
-            <a:off x="4654296" y="3374136"/>
-            <a:ext cx="2880360" cy="1490472"/>
-          </a:xfrm>
-          <a:prstGeom prst="rect">
-            <a:avLst/>
-          </a:prstGeom>
-          <a:noFill/>
-        </p:spPr>
-        <p:txBody>
-          <a:bodyPr wrap="square" lIns="0" rIns="0" tIns="0" bIns="0" anchor="t">
-            <a:spAutoFit/>
-          </a:bodyPr>
-          <a:lstStyle/>
-          <a:p>
-            <a:pPr algn="l">
-              <a:lnSpc>
-                <a:spcPct val="110000"/>
-              </a:lnSpc>
-              <a:spcBef>
-                <a:spcPts val="0"/>
-              </a:spcBef>
-              <a:spcAft>
-                <a:spcPts val="0"/>
-              </a:spcAft>
-            </a:pPr>
-            <a:r>
-              <a:rPr sz="1500" b="0">
+              <a:t>Пользователи</a:t>
+            </a:r>
+          </a:p>
+        </p:txBody>
+      </p:sp>
+      <p:sp>
+        <p:nvSpPr>
+          <p:cNvPr id="12" name="TextBox 11"/>
+          <p:cNvSpPr txBox="1"/>
+          <p:nvPr/>
+        </p:nvSpPr>
+        <p:spPr>
+          <a:xfrm>
+            <a:off x="4654296" y="2185416"/>
+            <a:ext cx="2907792" cy="1014983"/>
+          </a:xfrm>
+          <a:prstGeom prst="rect">
+            <a:avLst/>
+          </a:prstGeom>
+          <a:noFill/>
+        </p:spPr>
+        <p:txBody>
+          <a:bodyPr wrap="square" lIns="0" rIns="0" tIns="0" bIns="0" anchor="t">
+            <a:spAutoFit/>
+          </a:bodyPr>
+          <a:lstStyle/>
+          <a:p>
+            <a:pPr algn="l">
+              <a:lnSpc>
+                <a:spcPct val="110000"/>
+              </a:lnSpc>
+              <a:spcBef>
+                <a:spcPts val="0"/>
+              </a:spcBef>
+              <a:spcAft>
+                <a:spcPts val="0"/>
+              </a:spcAft>
+            </a:pPr>
+            <a:r>
+              <a:rPr sz="1300" b="0">
                 <a:solidFill>
                   <a:srgbClr val="203041"/>
                 </a:solidFill>
                 <a:latin typeface="Arial"/>
               </a:rPr>
-              <a:t>Список надо открыть самому; время напоминания не совпадает с посещением места.</a:t>
-            </a:r>
-          </a:p>
-        </p:txBody>
-      </p:sp>
-      <p:sp>
-        <p:nvSpPr>
-          <p:cNvPr id="15" name="Rounded Rectangle 14"/>
+              <a:t>Люди с бытовыми поручениями: покупки, аптека, почта.</a:t>
+            </a:r>
+          </a:p>
+        </p:txBody>
+      </p:sp>
+      <p:sp>
+        <p:nvSpPr>
+          <p:cNvPr id="13" name="Rounded Rectangle 12"/>
           <p:cNvSpPr/>
           <p:nvPr/>
         </p:nvSpPr>
         <p:spPr>
           <a:xfrm>
-            <a:off x="8028431" y="2752344"/>
-            <a:ext cx="3337560" cy="2267712"/>
+            <a:off x="8028431" y="1563624"/>
+            <a:ext cx="3364992" cy="1792224"/>
           </a:xfrm>
           <a:prstGeom prst="roundRect">
             <a:avLst>
@@ -9651,14 +9774,14 @@
       </p:sp>
       <p:sp>
         <p:nvSpPr>
-          <p:cNvPr id="16" name="TextBox 15"/>
-          <p:cNvSpPr txBox="1"/>
-          <p:nvPr/>
-        </p:nvSpPr>
-        <p:spPr>
-          <a:xfrm>
-            <a:off x="8257031" y="2953512"/>
-            <a:ext cx="2880360" cy="310896"/>
+          <p:cNvPr id="14" name="TextBox 13"/>
+          <p:cNvSpPr txBox="1"/>
+          <p:nvPr/>
+        </p:nvSpPr>
+        <p:spPr>
+          <a:xfrm>
+            <a:off x="8257031" y="1764792"/>
+            <a:ext cx="2907792" cy="310896"/>
           </a:xfrm>
           <a:prstGeom prst="rect">
             <a:avLst/>
@@ -9689,66 +9812,66 @@
                 </a:solidFill>
                 <a:latin typeface="Arial"/>
               </a:rPr>
-              <a:t>Последствие</a:t>
-            </a:r>
-          </a:p>
-        </p:txBody>
-      </p:sp>
-      <p:sp>
-        <p:nvSpPr>
-          <p:cNvPr id="17" name="TextBox 16"/>
-          <p:cNvSpPr txBox="1"/>
-          <p:nvPr/>
-        </p:nvSpPr>
-        <p:spPr>
-          <a:xfrm>
-            <a:off x="8257031" y="3374136"/>
-            <a:ext cx="2880360" cy="1490472"/>
-          </a:xfrm>
-          <a:prstGeom prst="rect">
-            <a:avLst/>
-          </a:prstGeom>
-          <a:noFill/>
-        </p:spPr>
-        <p:txBody>
-          <a:bodyPr wrap="square" lIns="0" rIns="0" tIns="0" bIns="0" anchor="t">
-            <a:spAutoFit/>
-          </a:bodyPr>
-          <a:lstStyle/>
-          <a:p>
-            <a:pPr algn="l">
-              <a:lnSpc>
-                <a:spcPct val="110000"/>
-              </a:lnSpc>
-              <a:spcBef>
-                <a:spcPts val="0"/>
-              </a:spcBef>
-              <a:spcAft>
-                <a:spcPts val="0"/>
-              </a:spcAft>
-            </a:pPr>
-            <a:r>
-              <a:rPr sz="1600" b="0">
+              <a:t>Решение</a:t>
+            </a:r>
+          </a:p>
+        </p:txBody>
+      </p:sp>
+      <p:sp>
+        <p:nvSpPr>
+          <p:cNvPr id="15" name="TextBox 14"/>
+          <p:cNvSpPr txBox="1"/>
+          <p:nvPr/>
+        </p:nvSpPr>
+        <p:spPr>
+          <a:xfrm>
+            <a:off x="8257031" y="2185416"/>
+            <a:ext cx="2907792" cy="1014983"/>
+          </a:xfrm>
+          <a:prstGeom prst="rect">
+            <a:avLst/>
+          </a:prstGeom>
+          <a:noFill/>
+        </p:spPr>
+        <p:txBody>
+          <a:bodyPr wrap="square" lIns="0" rIns="0" tIns="0" bIns="0" anchor="t">
+            <a:spAutoFit/>
+          </a:bodyPr>
+          <a:lstStyle/>
+          <a:p>
+            <a:pPr algn="l">
+              <a:lnSpc>
+                <a:spcPct val="110000"/>
+              </a:lnSpc>
+              <a:spcBef>
+                <a:spcPts val="0"/>
+              </a:spcBef>
+              <a:spcAft>
+                <a:spcPts val="0"/>
+              </a:spcAft>
+            </a:pPr>
+            <a:r>
+              <a:rPr sz="1300" b="0">
                 <a:solidFill>
                   <a:srgbClr val="203041"/>
                 </a:solidFill>
                 <a:latin typeface="Arial"/>
               </a:rPr>
-              <a:t>Забытое дело, повторный визит или лишняя поездка.</a:t>
-            </a:r>
-          </a:p>
-        </p:txBody>
-      </p:sp>
-      <p:sp>
-        <p:nvSpPr>
-          <p:cNvPr id="18" name="Rounded Rectangle 17"/>
+              <a:t>Намерения, свой магазин, подтверждённый визит, общий список, журнал и симулятор.</a:t>
+            </a:r>
+          </a:p>
+        </p:txBody>
+      </p:sp>
+      <p:sp>
+        <p:nvSpPr>
+          <p:cNvPr id="16" name="Rounded Rectangle 15"/>
           <p:cNvSpPr/>
           <p:nvPr/>
         </p:nvSpPr>
         <p:spPr>
           <a:xfrm>
-            <a:off x="822960" y="5294376"/>
-            <a:ext cx="10543032" cy="512064"/>
+            <a:off x="822960" y="3557016"/>
+            <a:ext cx="3364992" cy="1792224"/>
           </a:xfrm>
           <a:prstGeom prst="roundRect">
             <a:avLst>
@@ -9756,7 +9879,7 @@
             </a:avLst>
           </a:prstGeom>
           <a:solidFill>
-            <a:srgbClr val="FCF4E5"/>
+            <a:srgbClr val="EFF4F9"/>
           </a:solidFill>
           <a:ln>
             <a:noFill/>
@@ -9786,45 +9909,405 @@
       </p:sp>
       <p:sp>
         <p:nvSpPr>
-          <p:cNvPr id="19" name="TextBox 18"/>
-          <p:cNvSpPr txBox="1"/>
-          <p:nvPr/>
-        </p:nvSpPr>
-        <p:spPr>
-          <a:xfrm>
-            <a:off x="896112" y="5294376"/>
-            <a:ext cx="10396728" cy="512064"/>
-          </a:xfrm>
-          <a:prstGeom prst="rect">
-            <a:avLst/>
-          </a:prstGeom>
-          <a:noFill/>
-        </p:spPr>
-        <p:txBody>
-          <a:bodyPr wrap="square" lIns="0" rIns="0" tIns="0" bIns="0" anchor="ctr">
-            <a:spAutoFit/>
-          </a:bodyPr>
-          <a:lstStyle/>
-          <a:p>
-            <a:pPr algn="ctr">
-              <a:lnSpc>
-                <a:spcPct val="110000"/>
-              </a:lnSpc>
-              <a:spcBef>
-                <a:spcPts val="0"/>
-              </a:spcBef>
-              <a:spcAft>
-                <a:spcPts val="0"/>
-              </a:spcAft>
-            </a:pPr>
-            <a:r>
-              <a:rPr sz="1100" b="1">
-                <a:solidFill>
-                  <a:srgbClr val="AD6E1C"/>
-                </a:solidFill>
-                <a:latin typeface="Arial"/>
-              </a:rPr>
-              <a:t>Это продуктовая гипотеза; проверка сценариев с добровольцами запланирована (#13).</a:t>
+          <p:cNvPr id="17" name="TextBox 16"/>
+          <p:cNvSpPr txBox="1"/>
+          <p:nvPr/>
+        </p:nvSpPr>
+        <p:spPr>
+          <a:xfrm>
+            <a:off x="1051560" y="3758184"/>
+            <a:ext cx="2907792" cy="310896"/>
+          </a:xfrm>
+          <a:prstGeom prst="rect">
+            <a:avLst/>
+          </a:prstGeom>
+          <a:noFill/>
+        </p:spPr>
+        <p:txBody>
+          <a:bodyPr wrap="square" lIns="0" rIns="0" tIns="0" bIns="0" anchor="t">
+            <a:spAutoFit/>
+          </a:bodyPr>
+          <a:lstStyle/>
+          <a:p>
+            <a:pPr algn="l">
+              <a:lnSpc>
+                <a:spcPct val="110000"/>
+              </a:lnSpc>
+              <a:spcBef>
+                <a:spcPts val="0"/>
+              </a:spcBef>
+              <a:spcAft>
+                <a:spcPts val="0"/>
+              </a:spcAft>
+            </a:pPr>
+            <a:r>
+              <a:rPr sz="1500" b="1">
+                <a:solidFill>
+                  <a:srgbClr val="2B71B2"/>
+                </a:solidFill>
+                <a:latin typeface="Arial"/>
+              </a:rPr>
+              <a:t>Заказчик</a:t>
+            </a:r>
+          </a:p>
+        </p:txBody>
+      </p:sp>
+      <p:sp>
+        <p:nvSpPr>
+          <p:cNvPr id="18" name="TextBox 17"/>
+          <p:cNvSpPr txBox="1"/>
+          <p:nvPr/>
+        </p:nvSpPr>
+        <p:spPr>
+          <a:xfrm>
+            <a:off x="1051560" y="4178808"/>
+            <a:ext cx="2907792" cy="1014983"/>
+          </a:xfrm>
+          <a:prstGeom prst="rect">
+            <a:avLst/>
+          </a:prstGeom>
+          <a:noFill/>
+        </p:spPr>
+        <p:txBody>
+          <a:bodyPr wrap="square" lIns="0" rIns="0" tIns="0" bIns="0" anchor="t">
+            <a:spAutoFit/>
+          </a:bodyPr>
+          <a:lstStyle/>
+          <a:p>
+            <a:pPr algn="l">
+              <a:lnSpc>
+                <a:spcPct val="110000"/>
+              </a:lnSpc>
+              <a:spcBef>
+                <a:spcPts val="0"/>
+              </a:spcBef>
+              <a:spcAft>
+                <a:spcPts val="0"/>
+              </a:spcAft>
+            </a:pPr>
+            <a:r>
+              <a:rPr sz="1300" b="0">
+                <a:solidFill>
+                  <a:srgbClr val="203041"/>
+                </a:solidFill>
+                <a:latin typeface="Arial"/>
+              </a:rPr>
+              <a:t>Инициативный проект команды («самореализация»); внешнего заказчика нет.</a:t>
+            </a:r>
+          </a:p>
+        </p:txBody>
+      </p:sp>
+      <p:sp>
+        <p:nvSpPr>
+          <p:cNvPr id="19" name="Rounded Rectangle 18"/>
+          <p:cNvSpPr/>
+          <p:nvPr/>
+        </p:nvSpPr>
+        <p:spPr>
+          <a:xfrm>
+            <a:off x="4425696" y="3557016"/>
+            <a:ext cx="3364992" cy="1792224"/>
+          </a:xfrm>
+          <a:prstGeom prst="roundRect">
+            <a:avLst>
+              <a:gd name="adj" fmla="val 12000"/>
+            </a:avLst>
+          </a:prstGeom>
+          <a:solidFill>
+            <a:srgbClr val="EFF4F9"/>
+          </a:solidFill>
+          <a:ln>
+            <a:noFill/>
+          </a:ln>
+        </p:spPr>
+        <p:style>
+          <a:lnRef idx="1">
+            <a:schemeClr val="accent1"/>
+          </a:lnRef>
+          <a:fillRef idx="3">
+            <a:schemeClr val="accent1"/>
+          </a:fillRef>
+          <a:effectRef idx="2">
+            <a:schemeClr val="accent1"/>
+          </a:effectRef>
+          <a:fontRef idx="minor">
+            <a:schemeClr val="lt1"/>
+          </a:fontRef>
+        </p:style>
+        <p:txBody>
+          <a:bodyPr rtlCol="0" anchor="ctr"/>
+          <a:lstStyle/>
+          <a:p>
+            <a:pPr algn="ctr"/>
+          </a:p>
+        </p:txBody>
+      </p:sp>
+      <p:sp>
+        <p:nvSpPr>
+          <p:cNvPr id="20" name="TextBox 19"/>
+          <p:cNvSpPr txBox="1"/>
+          <p:nvPr/>
+        </p:nvSpPr>
+        <p:spPr>
+          <a:xfrm>
+            <a:off x="4654296" y="3758184"/>
+            <a:ext cx="2907792" cy="310896"/>
+          </a:xfrm>
+          <a:prstGeom prst="rect">
+            <a:avLst/>
+          </a:prstGeom>
+          <a:noFill/>
+        </p:spPr>
+        <p:txBody>
+          <a:bodyPr wrap="square" lIns="0" rIns="0" tIns="0" bIns="0" anchor="t">
+            <a:spAutoFit/>
+          </a:bodyPr>
+          <a:lstStyle/>
+          <a:p>
+            <a:pPr algn="l">
+              <a:lnSpc>
+                <a:spcPct val="110000"/>
+              </a:lnSpc>
+              <a:spcBef>
+                <a:spcPts val="0"/>
+              </a:spcBef>
+              <a:spcAft>
+                <a:spcPts val="0"/>
+              </a:spcAft>
+            </a:pPr>
+            <a:r>
+              <a:rPr sz="1500" b="1">
+                <a:solidFill>
+                  <a:srgbClr val="2B71B2"/>
+                </a:solidFill>
+                <a:latin typeface="Arial"/>
+              </a:rPr>
+              <a:t>Аналоги</a:t>
+            </a:r>
+          </a:p>
+        </p:txBody>
+      </p:sp>
+      <p:sp>
+        <p:nvSpPr>
+          <p:cNvPr id="21" name="TextBox 20"/>
+          <p:cNvSpPr txBox="1"/>
+          <p:nvPr/>
+        </p:nvSpPr>
+        <p:spPr>
+          <a:xfrm>
+            <a:off x="4654296" y="4178808"/>
+            <a:ext cx="2907792" cy="1014983"/>
+          </a:xfrm>
+          <a:prstGeom prst="rect">
+            <a:avLst/>
+          </a:prstGeom>
+          <a:noFill/>
+        </p:spPr>
+        <p:txBody>
+          <a:bodyPr wrap="square" lIns="0" rIns="0" tIns="0" bIns="0" anchor="t">
+            <a:spAutoFit/>
+          </a:bodyPr>
+          <a:lstStyle/>
+          <a:p>
+            <a:pPr algn="l">
+              <a:lnSpc>
+                <a:spcPct val="110000"/>
+              </a:lnSpc>
+              <a:spcBef>
+                <a:spcPts val="0"/>
+              </a:spcBef>
+              <a:spcAft>
+                <a:spcPts val="0"/>
+              </a:spcAft>
+            </a:pPr>
+            <a:r>
+              <a:rPr sz="1300" b="0">
+                <a:solidFill>
+                  <a:srgbClr val="203041"/>
+                </a:solidFill>
+                <a:latin typeface="Arial"/>
+              </a:rPr>
+              <a:t>Apple Reminders: напоминание по месту. Google Keep/Tasks: заметки и задачи.</a:t>
+            </a:r>
+          </a:p>
+        </p:txBody>
+      </p:sp>
+      <p:sp>
+        <p:nvSpPr>
+          <p:cNvPr id="22" name="Rounded Rectangle 21"/>
+          <p:cNvSpPr/>
+          <p:nvPr/>
+        </p:nvSpPr>
+        <p:spPr>
+          <a:xfrm>
+            <a:off x="8028431" y="3557016"/>
+            <a:ext cx="3364992" cy="1792224"/>
+          </a:xfrm>
+          <a:prstGeom prst="roundRect">
+            <a:avLst>
+              <a:gd name="adj" fmla="val 12000"/>
+            </a:avLst>
+          </a:prstGeom>
+          <a:solidFill>
+            <a:srgbClr val="2B71B2"/>
+          </a:solidFill>
+          <a:ln>
+            <a:noFill/>
+          </a:ln>
+        </p:spPr>
+        <p:style>
+          <a:lnRef idx="1">
+            <a:schemeClr val="accent1"/>
+          </a:lnRef>
+          <a:fillRef idx="3">
+            <a:schemeClr val="accent1"/>
+          </a:fillRef>
+          <a:effectRef idx="2">
+            <a:schemeClr val="accent1"/>
+          </a:effectRef>
+          <a:fontRef idx="minor">
+            <a:schemeClr val="lt1"/>
+          </a:fontRef>
+        </p:style>
+        <p:txBody>
+          <a:bodyPr rtlCol="0" anchor="ctr"/>
+          <a:lstStyle/>
+          <a:p>
+            <a:pPr algn="ctr"/>
+          </a:p>
+        </p:txBody>
+      </p:sp>
+      <p:sp>
+        <p:nvSpPr>
+          <p:cNvPr id="23" name="TextBox 22"/>
+          <p:cNvSpPr txBox="1"/>
+          <p:nvPr/>
+        </p:nvSpPr>
+        <p:spPr>
+          <a:xfrm>
+            <a:off x="8257031" y="3758184"/>
+            <a:ext cx="2907792" cy="310896"/>
+          </a:xfrm>
+          <a:prstGeom prst="rect">
+            <a:avLst/>
+          </a:prstGeom>
+          <a:noFill/>
+        </p:spPr>
+        <p:txBody>
+          <a:bodyPr wrap="square" lIns="0" rIns="0" tIns="0" bIns="0" anchor="t">
+            <a:spAutoFit/>
+          </a:bodyPr>
+          <a:lstStyle/>
+          <a:p>
+            <a:pPr algn="l">
+              <a:lnSpc>
+                <a:spcPct val="110000"/>
+              </a:lnSpc>
+              <a:spcBef>
+                <a:spcPts val="0"/>
+              </a:spcBef>
+              <a:spcAft>
+                <a:spcPts val="0"/>
+              </a:spcAft>
+            </a:pPr>
+            <a:r>
+              <a:rPr sz="1500" b="1">
+                <a:solidFill>
+                  <a:srgbClr val="FFFFFF"/>
+                </a:solidFill>
+                <a:latin typeface="Arial"/>
+              </a:rPr>
+              <a:t>Наше отличие</a:t>
+            </a:r>
+          </a:p>
+        </p:txBody>
+      </p:sp>
+      <p:sp>
+        <p:nvSpPr>
+          <p:cNvPr id="24" name="TextBox 23"/>
+          <p:cNvSpPr txBox="1"/>
+          <p:nvPr/>
+        </p:nvSpPr>
+        <p:spPr>
+          <a:xfrm>
+            <a:off x="8257031" y="4178808"/>
+            <a:ext cx="2907792" cy="1014983"/>
+          </a:xfrm>
+          <a:prstGeom prst="rect">
+            <a:avLst/>
+          </a:prstGeom>
+          <a:noFill/>
+        </p:spPr>
+        <p:txBody>
+          <a:bodyPr wrap="square" lIns="0" rIns="0" tIns="0" bIns="0" anchor="t">
+            <a:spAutoFit/>
+          </a:bodyPr>
+          <a:lstStyle/>
+          <a:p>
+            <a:pPr algn="l">
+              <a:lnSpc>
+                <a:spcPct val="110000"/>
+              </a:lnSpc>
+              <a:spcBef>
+                <a:spcPts val="0"/>
+              </a:spcBef>
+              <a:spcAft>
+                <a:spcPts val="0"/>
+              </a:spcAft>
+            </a:pPr>
+            <a:r>
+              <a:rPr sz="1300" b="0">
+                <a:solidFill>
+                  <a:srgbClr val="FFFFFF"/>
+                </a:solidFill>
+                <a:latin typeface="Arial"/>
+              </a:rPr>
+              <a:t>Android MVP: остановка перед сигналом, группировка дел и отсутствие дублей.</a:t>
+            </a:r>
+          </a:p>
+        </p:txBody>
+      </p:sp>
+      <p:sp>
+        <p:nvSpPr>
+          <p:cNvPr id="25" name="TextBox 24"/>
+          <p:cNvSpPr txBox="1"/>
+          <p:nvPr/>
+        </p:nvSpPr>
+        <p:spPr>
+          <a:xfrm>
+            <a:off x="822960" y="5641848"/>
+            <a:ext cx="10515600" cy="457200"/>
+          </a:xfrm>
+          <a:prstGeom prst="rect">
+            <a:avLst/>
+          </a:prstGeom>
+          <a:noFill/>
+        </p:spPr>
+        <p:txBody>
+          <a:bodyPr wrap="square" lIns="0" rIns="0" tIns="0" bIns="0" anchor="t">
+            <a:spAutoFit/>
+          </a:bodyPr>
+          <a:lstStyle/>
+          <a:p>
+            <a:pPr algn="l">
+              <a:lnSpc>
+                <a:spcPct val="110000"/>
+              </a:lnSpc>
+              <a:spcBef>
+                <a:spcPts val="0"/>
+              </a:spcBef>
+              <a:spcAft>
+                <a:spcPts val="0"/>
+              </a:spcAft>
+            </a:pPr>
+            <a:r>
+              <a:rPr sz="1050" b="0">
+                <a:solidFill>
+                  <a:srgbClr val="647384"/>
+                </a:solidFill>
+                <a:latin typeface="Arial"/>
+              </a:rPr>
+              <a:t>Ориентир исходного проекта — локальная работа в РФ; кроссплатформенность вне Android MVP. Ценность и поведение при визите ещё нужно проверить.</a:t>
             </a:r>
           </a:p>
         </p:txBody>
@@ -10218,35 +10701,57 @@
               </a:spcAft>
             </a:pPr>
             <a:r>
-              <a:rPr sz="1400" b="0">
+              <a:rPr sz="1250" b="0">
                 <a:solidFill>
                   <a:srgbClr val="203041"/>
                 </a:solidFill>
                 <a:latin typeface="Arial"/>
               </a:rPr>
-              <a:t>Менеджер проекта · аналитик · техписатель</a:t>
-            </a:r>
-          </a:p>
-          <a:p>
-            <a:pPr algn="l">
-              <a:lnSpc>
-                <a:spcPct val="110000"/>
-              </a:lnSpc>
-              <a:spcBef>
-                <a:spcPts val="0"/>
-              </a:spcBef>
-              <a:spcAft>
-                <a:spcPts val="0"/>
-              </a:spcAft>
-            </a:pPr>
-            <a:r>
-              <a:rPr sz="1400" b="0">
+              <a:t>Менеджер · аналитик · техписатель</a:t>
+            </a:r>
+          </a:p>
+          <a:p>
+            <a:pPr algn="l">
+              <a:lnSpc>
+                <a:spcPct val="110000"/>
+              </a:lnSpc>
+              <a:spcBef>
+                <a:spcPts val="0"/>
+              </a:spcBef>
+              <a:spcAft>
+                <a:spcPts val="0"/>
+              </a:spcAft>
+            </a:pPr>
+            <a:r>
+              <a:rPr sz="1250" b="0">
                 <a:solidFill>
                   <a:srgbClr val="203041"/>
                 </a:solidFill>
                 <a:latin typeface="Arial"/>
               </a:rPr>
-              <a:t>Требования, приоритеты, план и документация.</a:t>
+              <a:t>Потребности, требования, план.</a:t>
+            </a:r>
+          </a:p>
+          <a:p>
+            <a:pPr algn="l">
+              <a:lnSpc>
+                <a:spcPct val="110000"/>
+              </a:lnSpc>
+              <a:spcBef>
+                <a:spcPts val="0"/>
+              </a:spcBef>
+              <a:spcAft>
+                <a:spcPts val="0"/>
+              </a:spcAft>
+            </a:pPr>
+            <a:r>
+              <a:rPr sz="1250" b="0">
+                <a:solidFill>
+                  <a:srgbClr val="203041"/>
+                </a:solidFill>
+                <a:latin typeface="Arial"/>
+              </a:rPr>
+              <a:t>Артефакты: Vision, бэклог, ТЗ v1.</a:t>
             </a:r>
           </a:p>
         </p:txBody>
@@ -10375,7 +10880,7 @@
               </a:spcAft>
             </a:pPr>
             <a:r>
-              <a:rPr sz="1400" b="0">
+              <a:rPr sz="1250" b="0">
                 <a:solidFill>
                   <a:srgbClr val="203041"/>
                 </a:solidFill>
@@ -10397,13 +10902,35 @@
               </a:spcAft>
             </a:pPr>
             <a:r>
-              <a:rPr sz="1400" b="0">
+              <a:rPr sz="1250" b="0">
                 <a:solidFill>
                   <a:srgbClr val="203041"/>
                 </a:solidFill>
                 <a:latin typeface="Arial"/>
               </a:rPr>
-              <a:t>Правила показа намерений и техническая документация.</a:t>
+              <a:t>Правила показа, документация.</a:t>
+            </a:r>
+          </a:p>
+          <a:p>
+            <a:pPr algn="l">
+              <a:lnSpc>
+                <a:spcPct val="110000"/>
+              </a:lnSpc>
+              <a:spcBef>
+                <a:spcPts val="0"/>
+              </a:spcBef>
+              <a:spcAft>
+                <a:spcPts val="0"/>
+              </a:spcAft>
+            </a:pPr>
+            <a:r>
+              <a:rPr sz="1250" b="0">
+                <a:solidFill>
+                  <a:srgbClr val="203041"/>
+                </a:solidFill>
+                <a:latin typeface="Arial"/>
+              </a:rPr>
+              <a:t>Артефакт: проектные решения.</a:t>
             </a:r>
           </a:p>
         </p:txBody>
@@ -10532,7 +11059,7 @@
               </a:spcAft>
             </a:pPr>
             <a:r>
-              <a:rPr sz="1400" b="0">
+              <a:rPr sz="1250" b="0">
                 <a:solidFill>
                   <a:srgbClr val="203041"/>
                 </a:solidFill>
@@ -10554,13 +11081,35 @@
               </a:spcAft>
             </a:pPr>
             <a:r>
-              <a:rPr sz="1400" b="0">
+              <a:rPr sz="1250" b="0">
                 <a:solidFill>
                   <a:srgbClr val="203041"/>
                 </a:solidFill>
                 <a:latin typeface="Arial"/>
               </a:rPr>
-              <a:t>Экраны добавления, выбора места и просмотра дел.</a:t>
+              <a:t>Экраны намерений, места и списка.</a:t>
+            </a:r>
+          </a:p>
+          <a:p>
+            <a:pPr algn="l">
+              <a:lnSpc>
+                <a:spcPct val="110000"/>
+              </a:lnSpc>
+              <a:spcBef>
+                <a:spcPts val="0"/>
+              </a:spcBef>
+              <a:spcAft>
+                <a:spcPts val="0"/>
+              </a:spcAft>
+            </a:pPr>
+            <a:r>
+              <a:rPr sz="1250" b="0">
+                <a:solidFill>
+                  <a:srgbClr val="203041"/>
+                </a:solidFill>
+                <a:latin typeface="Arial"/>
+              </a:rPr>
+              <a:t>Артефакт: критерии приёмки.</a:t>
             </a:r>
           </a:p>
         </p:txBody>
@@ -10689,7 +11238,7 @@
               </a:spcAft>
             </a:pPr>
             <a:r>
-              <a:rPr sz="1400" b="0">
+              <a:rPr sz="1250" b="0">
                 <a:solidFill>
                   <a:srgbClr val="203041"/>
                 </a:solidFill>
@@ -10711,13 +11260,35 @@
               </a:spcAft>
             </a:pPr>
             <a:r>
-              <a:rPr sz="1400" b="0">
+              <a:rPr sz="1250" b="0">
                 <a:solidFill>
                   <a:srgbClr val="203041"/>
                 </a:solidFill>
                 <a:latin typeface="Arial"/>
               </a:rPr>
-              <a:t>Уведомления и проверки сценариев визита.</a:t>
+              <a:t>Уведомления и сценарии визита.</a:t>
+            </a:r>
+          </a:p>
+          <a:p>
+            <a:pPr algn="l">
+              <a:lnSpc>
+                <a:spcPct val="110000"/>
+              </a:lnSpc>
+              <a:spcBef>
+                <a:spcPts val="0"/>
+              </a:spcBef>
+              <a:spcAft>
+                <a:spcPts val="0"/>
+              </a:spcAft>
+            </a:pPr>
+            <a:r>
+              <a:rPr sz="1250" b="0">
+                <a:solidFill>
+                  <a:srgbClr val="203041"/>
+                </a:solidFill>
+                <a:latin typeface="Arial"/>
+              </a:rPr>
+              <a:t>План: прототип и отчёт тестирования.</a:t>
             </a:r>
           </a:p>
         </p:txBody>
@@ -10730,39 +11301,39 @@
         </p:nvSpPr>
         <p:spPr>
           <a:xfrm>
-            <a:off x="822960" y="5641848"/>
-            <a:ext cx="10515600" cy="292608"/>
-          </a:xfrm>
-          <a:prstGeom prst="rect">
-            <a:avLst/>
-          </a:prstGeom>
-          <a:noFill/>
-        </p:spPr>
-        <p:txBody>
-          <a:bodyPr wrap="square" lIns="0" rIns="0" tIns="0" bIns="0" anchor="t">
-            <a:spAutoFit/>
-          </a:bodyPr>
-          <a:lstStyle/>
-          <a:p>
-            <a:pPr algn="l">
-              <a:lnSpc>
-                <a:spcPct val="110000"/>
-              </a:lnSpc>
-              <a:spcBef>
-                <a:spcPts val="0"/>
-              </a:spcBef>
-              <a:spcAft>
-                <a:spcPts val="0"/>
-              </a:spcAft>
-            </a:pPr>
-            <a:r>
-              <a:rPr sz="1100" b="0">
+            <a:off x="822960" y="5577840"/>
+            <a:ext cx="10515600" cy="512064"/>
+          </a:xfrm>
+          <a:prstGeom prst="rect">
+            <a:avLst/>
+          </a:prstGeom>
+          <a:noFill/>
+        </p:spPr>
+        <p:txBody>
+          <a:bodyPr wrap="square" lIns="0" rIns="0" tIns="0" bIns="0" anchor="t">
+            <a:spAutoFit/>
+          </a:bodyPr>
+          <a:lstStyle/>
+          <a:p>
+            <a:pPr algn="l">
+              <a:lnSpc>
+                <a:spcPct val="110000"/>
+              </a:lnSpc>
+              <a:spcBef>
+                <a:spcPts val="0"/>
+              </a:spcBef>
+              <a:spcAft>
+                <a:spcPts val="0"/>
+              </a:spcAft>
+            </a:pPr>
+            <a:r>
+              <a:rPr sz="1050" b="0">
                 <a:solidFill>
                   <a:srgbClr val="647384"/>
                 </a:solidFill>
                 <a:latin typeface="Arial"/>
               </a:rPr>
-              <a:t>Решения по архитектуре разработчики принимают совместно; ведущий итерации определяется командой.</a:t>
+              <a:t>PM: Бартоломей. Ведущий итерации (Scrum Master) назначается командой; плановые артефакты ещё не означают их готовность.</a:t>
             </a:r>
           </a:p>
         </p:txBody>
@@ -10995,8 +11566,8 @@
         </p:nvSpPr>
         <p:spPr>
           <a:xfrm>
-            <a:off x="822960" y="1554480"/>
-            <a:ext cx="10561320" cy="914400"/>
+            <a:off x="822960" y="1490472"/>
+            <a:ext cx="10561320" cy="1042415"/>
           </a:xfrm>
           <a:prstGeom prst="roundRect">
             <a:avLst>
@@ -11040,39 +11611,39 @@
         </p:nvSpPr>
         <p:spPr>
           <a:xfrm>
-            <a:off x="1115568" y="1764792"/>
-            <a:ext cx="9966960" cy="539496"/>
-          </a:xfrm>
-          <a:prstGeom prst="rect">
-            <a:avLst/>
-          </a:prstGeom>
-          <a:noFill/>
-        </p:spPr>
-        <p:txBody>
-          <a:bodyPr wrap="square" lIns="0" rIns="0" tIns="0" bIns="0" anchor="t">
-            <a:spAutoFit/>
-          </a:bodyPr>
-          <a:lstStyle/>
-          <a:p>
-            <a:pPr algn="l">
-              <a:lnSpc>
-                <a:spcPct val="110000"/>
-              </a:lnSpc>
-              <a:spcBef>
-                <a:spcPts val="0"/>
-              </a:spcBef>
-              <a:spcAft>
-                <a:spcPts val="0"/>
-              </a:spcAft>
-            </a:pPr>
-            <a:r>
-              <a:rPr sz="2100" b="1">
+            <a:off x="1115568" y="1636776"/>
+            <a:ext cx="9966960" cy="777240"/>
+          </a:xfrm>
+          <a:prstGeom prst="rect">
+            <a:avLst/>
+          </a:prstGeom>
+          <a:noFill/>
+        </p:spPr>
+        <p:txBody>
+          <a:bodyPr wrap="square" lIns="0" rIns="0" tIns="0" bIns="0" anchor="t">
+            <a:spAutoFit/>
+          </a:bodyPr>
+          <a:lstStyle/>
+          <a:p>
+            <a:pPr algn="l">
+              <a:lnSpc>
+                <a:spcPct val="110000"/>
+              </a:lnSpc>
+              <a:spcBef>
+                <a:spcPts val="0"/>
+              </a:spcBef>
+              <a:spcAft>
+                <a:spcPts val="0"/>
+              </a:spcAft>
+            </a:pPr>
+            <a:r>
+              <a:rPr sz="1850" b="1">
                 <a:solidFill>
                   <a:srgbClr val="FFFFFF"/>
                 </a:solidFill>
                 <a:latin typeface="Arial"/>
               </a:rPr>
-              <a:t>GoCue возвращает намерение, когда пользователь действительно может действовать.</a:t>
+              <a:t>Для людей с делами, привязанными к месту, GoCue — приложение, которое возвращает намерение во время подходящего визита.</a:t>
             </a:r>
           </a:p>
         </p:txBody>
@@ -11297,7 +11868,7 @@
                 </a:solidFill>
                 <a:latin typeface="Arial"/>
               </a:rPr>
-              <a:t>«Купить туалетную бумагу»</a:t>
+              <a:t>«Купить батарейки»</a:t>
             </a:r>
           </a:p>
         </p:txBody>
@@ -12120,39 +12691,39 @@
         </p:nvSpPr>
         <p:spPr>
           <a:xfrm>
-            <a:off x="822960" y="5020056"/>
-            <a:ext cx="10543032" cy="704088"/>
-          </a:xfrm>
-          <a:prstGeom prst="rect">
-            <a:avLst/>
-          </a:prstGeom>
-          <a:noFill/>
-        </p:spPr>
-        <p:txBody>
-          <a:bodyPr wrap="square" lIns="0" rIns="0" tIns="0" bIns="0" anchor="t">
-            <a:spAutoFit/>
-          </a:bodyPr>
-          <a:lstStyle/>
-          <a:p>
-            <a:pPr algn="l">
-              <a:lnSpc>
-                <a:spcPct val="110000"/>
-              </a:lnSpc>
-              <a:spcBef>
-                <a:spcPts val="0"/>
-              </a:spcBef>
-              <a:spcAft>
-                <a:spcPts val="0"/>
-              </a:spcAft>
-            </a:pPr>
-            <a:r>
-              <a:rPr sz="1400" b="0">
+            <a:off x="822960" y="4965192"/>
+            <a:ext cx="10543032" cy="950976"/>
+          </a:xfrm>
+          <a:prstGeom prst="rect">
+            <a:avLst/>
+          </a:prstGeom>
+          <a:noFill/>
+        </p:spPr>
+        <p:txBody>
+          <a:bodyPr wrap="square" lIns="0" rIns="0" tIns="0" bIns="0" anchor="t">
+            <a:spAutoFit/>
+          </a:bodyPr>
+          <a:lstStyle/>
+          <a:p>
+            <a:pPr algn="l">
+              <a:lnSpc>
+                <a:spcPct val="110000"/>
+              </a:lnSpc>
+              <a:spcBef>
+                <a:spcPts val="0"/>
+              </a:spcBef>
+              <a:spcAft>
+                <a:spcPts val="0"/>
+              </a:spcAft>
+            </a:pPr>
+            <a:r>
+              <a:rPr sz="1300" b="0">
                 <a:solidFill>
                   <a:srgbClr val="1C364E"/>
                 </a:solidFill>
                 <a:latin typeface="Arial"/>
               </a:rPr>
-              <a:t>Отличие от списка дел и напоминания по времени: семантическое место, подтверждённый визит, группировка и отсутствие дублей в одном визите.</a:t>
+              <a:t>В отличие от обычного списка и напоминания по времени: семантическое место, подтверждённый визит и один список без дублей. Ожидаемая выгода — меньше лишних поездок; её ещё нужно проверить с пользователями.</a:t>
             </a:r>
           </a:p>
         </p:txBody>
@@ -13372,7 +13943,7 @@
                 </a:solidFill>
                 <a:latin typeface="Arial"/>
               </a:rPr>
-              <a:t>Цель и границы MVP</a:t>
+              <a:t>Цель и границы проекта</a:t>
             </a:r>
           </a:p>
         </p:txBody>
@@ -13454,8 +14025,8 @@
         </p:nvSpPr>
         <p:spPr>
           <a:xfrm>
-            <a:off x="822960" y="1508760"/>
-            <a:ext cx="10561320" cy="859536"/>
+            <a:off x="822960" y="1444752"/>
+            <a:ext cx="10561320" cy="1225296"/>
           </a:xfrm>
           <a:prstGeom prst="roundRect">
             <a:avLst>
@@ -13499,39 +14070,39 @@
         </p:nvSpPr>
         <p:spPr>
           <a:xfrm>
-            <a:off x="1078992" y="1691640"/>
-            <a:ext cx="10058400" cy="521207"/>
-          </a:xfrm>
-          <a:prstGeom prst="rect">
-            <a:avLst/>
-          </a:prstGeom>
-          <a:noFill/>
-        </p:spPr>
-        <p:txBody>
-          <a:bodyPr wrap="square" lIns="0" rIns="0" tIns="0" bIns="0" anchor="t">
-            <a:spAutoFit/>
-          </a:bodyPr>
-          <a:lstStyle/>
-          <a:p>
-            <a:pPr algn="l">
-              <a:lnSpc>
-                <a:spcPct val="110000"/>
-              </a:lnSpc>
-              <a:spcBef>
-                <a:spcPts val="0"/>
-              </a:spcBef>
-              <a:spcAft>
-                <a:spcPts val="0"/>
-              </a:spcAft>
-            </a:pPr>
-            <a:r>
-              <a:rPr sz="1900" b="1">
+            <a:off x="1078992" y="1572768"/>
+            <a:ext cx="10058400" cy="1033271"/>
+          </a:xfrm>
+          <a:prstGeom prst="rect">
+            <a:avLst/>
+          </a:prstGeom>
+          <a:noFill/>
+        </p:spPr>
+        <p:txBody>
+          <a:bodyPr wrap="square" lIns="0" rIns="0" tIns="0" bIns="0" anchor="t">
+            <a:spAutoFit/>
+          </a:bodyPr>
+          <a:lstStyle/>
+          <a:p>
+            <a:pPr algn="l">
+              <a:lnSpc>
+                <a:spcPct val="110000"/>
+              </a:lnSpc>
+              <a:spcBef>
+                <a:spcPts val="0"/>
+              </a:spcBef>
+              <a:spcAft>
+                <a:spcPts val="0"/>
+              </a:spcAft>
+            </a:pPr>
+            <a:r>
+              <a:rPr sz="1600" b="1">
                 <a:solidFill>
                   <a:srgbClr val="1C364E"/>
                 </a:solidFill>
                 <a:latin typeface="Arial"/>
               </a:rPr>
-              <a:t>Показать Android-прототип: от записи дела до одного уместного уведомления за визит.</a:t>
+              <a:t>К 12-й неделе 8-го семестра показать Android-прототип: запись дела, свой магазин, подтверждённый визит, групповой сигнал, завершение и следующий визит. Пройти 20 симуляций без ложных сигналов и дублей, затем проверить одно реальное место.</a:t>
             </a:r>
           </a:p>
         </p:txBody>
@@ -13544,8 +14115,8 @@
         </p:nvSpPr>
         <p:spPr>
           <a:xfrm>
-            <a:off x="822960" y="2642616"/>
-            <a:ext cx="5111496" cy="2660904"/>
+            <a:off x="822960" y="2843784"/>
+            <a:ext cx="5111496" cy="2542032"/>
           </a:xfrm>
           <a:prstGeom prst="roundRect">
             <a:avLst>
@@ -13589,7 +14160,7 @@
         </p:nvSpPr>
         <p:spPr>
           <a:xfrm>
-            <a:off x="1051560" y="2843784"/>
+            <a:off x="1051560" y="3044952"/>
             <a:ext cx="4654296" cy="310896"/>
           </a:xfrm>
           <a:prstGeom prst="rect">
@@ -13621,7 +14192,7 @@
                 </a:solidFill>
                 <a:latin typeface="Arial"/>
               </a:rPr>
-              <a:t>Входит</a:t>
+              <a:t>Входит в проект</a:t>
             </a:r>
           </a:p>
         </p:txBody>
@@ -13634,8 +14205,8 @@
         </p:nvSpPr>
         <p:spPr>
           <a:xfrm>
-            <a:off x="1051560" y="3264408"/>
-            <a:ext cx="4654296" cy="1883664"/>
+            <a:off x="1051560" y="3465576"/>
+            <a:ext cx="4654296" cy="1764791"/>
           </a:xfrm>
           <a:prstGeom prst="rect">
             <a:avLst/>
@@ -13767,8 +14338,8 @@
         </p:nvSpPr>
         <p:spPr>
           <a:xfrm>
-            <a:off x="6199632" y="2642616"/>
-            <a:ext cx="5184648" cy="2660904"/>
+            <a:off x="6199632" y="2843784"/>
+            <a:ext cx="5184648" cy="2542032"/>
           </a:xfrm>
           <a:prstGeom prst="roundRect">
             <a:avLst>
@@ -13812,7 +14383,7 @@
         </p:nvSpPr>
         <p:spPr>
           <a:xfrm>
-            <a:off x="6428232" y="2843784"/>
+            <a:off x="6428232" y="3044952"/>
             <a:ext cx="4727448" cy="310896"/>
           </a:xfrm>
           <a:prstGeom prst="rect">
@@ -13844,7 +14415,7 @@
                 </a:solidFill>
                 <a:latin typeface="Arial"/>
               </a:rPr>
-              <a:t>Не входит</a:t>
+              <a:t>Не входит в проект</a:t>
             </a:r>
           </a:p>
         </p:txBody>
@@ -13857,8 +14428,8 @@
         </p:nvSpPr>
         <p:spPr>
           <a:xfrm>
-            <a:off x="6428232" y="3264408"/>
-            <a:ext cx="4727448" cy="1883664"/>
+            <a:off x="6428232" y="3465576"/>
+            <a:ext cx="4727448" cy="1764791"/>
           </a:xfrm>
           <a:prstGeom prst="rect">
             <a:avLst/>
@@ -13990,39 +14561,39 @@
         </p:nvSpPr>
         <p:spPr>
           <a:xfrm>
-            <a:off x="822960" y="5559552"/>
-            <a:ext cx="10497312" cy="374904"/>
-          </a:xfrm>
-          <a:prstGeom prst="rect">
-            <a:avLst/>
-          </a:prstGeom>
-          <a:noFill/>
-        </p:spPr>
-        <p:txBody>
-          <a:bodyPr wrap="square" lIns="0" rIns="0" tIns="0" bIns="0" anchor="t">
-            <a:spAutoFit/>
-          </a:bodyPr>
-          <a:lstStyle/>
-          <a:p>
-            <a:pPr algn="l">
-              <a:lnSpc>
-                <a:spcPct val="110000"/>
-              </a:lnSpc>
-              <a:spcBef>
-                <a:spcPts val="0"/>
-              </a:spcBef>
-              <a:spcAft>
-                <a:spcPts val="0"/>
-              </a:spcAft>
-            </a:pPr>
-            <a:r>
-              <a:rPr sz="1100" b="0">
+            <a:off x="822960" y="5614416"/>
+            <a:ext cx="10497312" cy="438912"/>
+          </a:xfrm>
+          <a:prstGeom prst="rect">
+            <a:avLst/>
+          </a:prstGeom>
+          <a:noFill/>
+        </p:spPr>
+        <p:txBody>
+          <a:bodyPr wrap="square" lIns="0" rIns="0" tIns="0" bIns="0" anchor="t">
+            <a:spAutoFit/>
+          </a:bodyPr>
+          <a:lstStyle/>
+          <a:p>
+            <a:pPr algn="l">
+              <a:lnSpc>
+                <a:spcPct val="110000"/>
+              </a:lnSpc>
+              <a:spcBef>
+                <a:spcPts val="0"/>
+              </a:spcBef>
+              <a:spcAft>
+                <a:spcPts val="0"/>
+              </a:spcAft>
+            </a:pPr>
+            <a:r>
+              <a:rPr sz="1050" b="0">
                 <a:solidFill>
                   <a:srgbClr val="647384"/>
                 </a:solidFill>
                 <a:latin typeface="Arial"/>
               </a:rPr>
-              <a:t>Целевой срок — 12-я неделя 8-го семестра; календарные даты сверяются с дорожной картой курса.</a:t>
+              <a:t>Ограничение: локальный Android без сервера и аккаунта; точность геозоны нельзя обещать до испытаний. Календарные даты сверяем с дорожной картой курса.</a:t>
             </a:r>
           </a:p>
         </p:txBody>
@@ -14255,8 +14826,8 @@
         </p:nvSpPr>
         <p:spPr>
           <a:xfrm>
-            <a:off x="822960" y="1591056"/>
-            <a:ext cx="2450592" cy="1225296"/>
+            <a:off x="822960" y="1545336"/>
+            <a:ext cx="2450592" cy="1042415"/>
           </a:xfrm>
           <a:prstGeom prst="roundRect">
             <a:avLst>
@@ -14300,7 +14871,7 @@
         </p:nvSpPr>
         <p:spPr>
           <a:xfrm>
-            <a:off x="978408" y="1746504"/>
+            <a:off x="978408" y="1673352"/>
             <a:ext cx="2139696" cy="237744"/>
           </a:xfrm>
           <a:prstGeom prst="rect">
@@ -14345,33 +14916,33 @@
         </p:nvSpPr>
         <p:spPr>
           <a:xfrm>
-            <a:off x="978408" y="2075688"/>
-            <a:ext cx="2112264" cy="557784"/>
-          </a:xfrm>
-          <a:prstGeom prst="rect">
-            <a:avLst/>
-          </a:prstGeom>
-          <a:noFill/>
-        </p:spPr>
-        <p:txBody>
-          <a:bodyPr wrap="square" lIns="0" rIns="0" tIns="0" bIns="0" anchor="t">
-            <a:spAutoFit/>
-          </a:bodyPr>
-          <a:lstStyle/>
-          <a:p>
-            <a:pPr algn="l">
-              <a:lnSpc>
-                <a:spcPct val="110000"/>
-              </a:lnSpc>
-              <a:spcBef>
-                <a:spcPts val="0"/>
-              </a:spcBef>
-              <a:spcAft>
-                <a:spcPts val="0"/>
-              </a:spcAft>
-            </a:pPr>
-            <a:r>
-              <a:rPr sz="1200" b="0">
+            <a:off x="978408" y="1984248"/>
+            <a:ext cx="2112264" cy="457200"/>
+          </a:xfrm>
+          <a:prstGeom prst="rect">
+            <a:avLst/>
+          </a:prstGeom>
+          <a:noFill/>
+        </p:spPr>
+        <p:txBody>
+          <a:bodyPr wrap="square" lIns="0" rIns="0" tIns="0" bIns="0" anchor="t">
+            <a:spAutoFit/>
+          </a:bodyPr>
+          <a:lstStyle/>
+          <a:p>
+            <a:pPr algn="l">
+              <a:lnSpc>
+                <a:spcPct val="110000"/>
+              </a:lnSpc>
+              <a:spcBef>
+                <a:spcPts val="0"/>
+              </a:spcBef>
+              <a:spcAft>
+                <a:spcPts val="0"/>
+              </a:spcAft>
+            </a:pPr>
+            <a:r>
+              <a:rPr sz="1150" b="0">
                 <a:solidFill>
                   <a:srgbClr val="FFFFFF"/>
                 </a:solidFill>
@@ -14390,8 +14961,8 @@
         </p:nvSpPr>
         <p:spPr>
           <a:xfrm>
-            <a:off x="3511296" y="1591056"/>
-            <a:ext cx="2450592" cy="1225296"/>
+            <a:off x="3511296" y="1545336"/>
+            <a:ext cx="2450592" cy="1042415"/>
           </a:xfrm>
           <a:prstGeom prst="roundRect">
             <a:avLst>
@@ -14435,7 +15006,7 @@
         </p:nvSpPr>
         <p:spPr>
           <a:xfrm>
-            <a:off x="3666744" y="1746504"/>
+            <a:off x="3666744" y="1673352"/>
             <a:ext cx="2139696" cy="237744"/>
           </a:xfrm>
           <a:prstGeom prst="rect">
@@ -14480,33 +15051,33 @@
         </p:nvSpPr>
         <p:spPr>
           <a:xfrm>
-            <a:off x="3666744" y="2075688"/>
-            <a:ext cx="2112264" cy="557784"/>
-          </a:xfrm>
-          <a:prstGeom prst="rect">
-            <a:avLst/>
-          </a:prstGeom>
-          <a:noFill/>
-        </p:spPr>
-        <p:txBody>
-          <a:bodyPr wrap="square" lIns="0" rIns="0" tIns="0" bIns="0" anchor="t">
-            <a:spAutoFit/>
-          </a:bodyPr>
-          <a:lstStyle/>
-          <a:p>
-            <a:pPr algn="l">
-              <a:lnSpc>
-                <a:spcPct val="110000"/>
-              </a:lnSpc>
-              <a:spcBef>
-                <a:spcPts val="0"/>
-              </a:spcBef>
-              <a:spcAft>
-                <a:spcPts val="0"/>
-              </a:spcAft>
-            </a:pPr>
-            <a:r>
-              <a:rPr sz="1200" b="0">
+            <a:off x="3666744" y="1984248"/>
+            <a:ext cx="2112264" cy="457200"/>
+          </a:xfrm>
+          <a:prstGeom prst="rect">
+            <a:avLst/>
+          </a:prstGeom>
+          <a:noFill/>
+        </p:spPr>
+        <p:txBody>
+          <a:bodyPr wrap="square" lIns="0" rIns="0" tIns="0" bIns="0" anchor="t">
+            <a:spAutoFit/>
+          </a:bodyPr>
+          <a:lstStyle/>
+          <a:p>
+            <a:pPr algn="l">
+              <a:lnSpc>
+                <a:spcPct val="110000"/>
+              </a:lnSpc>
+              <a:spcBef>
+                <a:spcPts val="0"/>
+              </a:spcBef>
+              <a:spcAft>
+                <a:spcPts val="0"/>
+              </a:spcAft>
+            </a:pPr>
+            <a:r>
+              <a:rPr sz="1150" b="0">
                 <a:solidFill>
                   <a:srgbClr val="203041"/>
                 </a:solidFill>
@@ -14525,8 +15096,8 @@
         </p:nvSpPr>
         <p:spPr>
           <a:xfrm>
-            <a:off x="6199632" y="1591056"/>
-            <a:ext cx="2450592" cy="1225296"/>
+            <a:off x="6199632" y="1545336"/>
+            <a:ext cx="2450592" cy="1042415"/>
           </a:xfrm>
           <a:prstGeom prst="roundRect">
             <a:avLst>
@@ -14570,7 +15141,7 @@
         </p:nvSpPr>
         <p:spPr>
           <a:xfrm>
-            <a:off x="6355080" y="1746504"/>
+            <a:off x="6355080" y="1673352"/>
             <a:ext cx="2139696" cy="237744"/>
           </a:xfrm>
           <a:prstGeom prst="rect">
@@ -14615,33 +15186,33 @@
         </p:nvSpPr>
         <p:spPr>
           <a:xfrm>
-            <a:off x="6355080" y="2075688"/>
-            <a:ext cx="2112264" cy="557784"/>
-          </a:xfrm>
-          <a:prstGeom prst="rect">
-            <a:avLst/>
-          </a:prstGeom>
-          <a:noFill/>
-        </p:spPr>
-        <p:txBody>
-          <a:bodyPr wrap="square" lIns="0" rIns="0" tIns="0" bIns="0" anchor="t">
-            <a:spAutoFit/>
-          </a:bodyPr>
-          <a:lstStyle/>
-          <a:p>
-            <a:pPr algn="l">
-              <a:lnSpc>
-                <a:spcPct val="110000"/>
-              </a:lnSpc>
-              <a:spcBef>
-                <a:spcPts val="0"/>
-              </a:spcBef>
-              <a:spcAft>
-                <a:spcPts val="0"/>
-              </a:spcAft>
-            </a:pPr>
-            <a:r>
-              <a:rPr sz="1200" b="0">
+            <a:off x="6355080" y="1984248"/>
+            <a:ext cx="2112264" cy="457200"/>
+          </a:xfrm>
+          <a:prstGeom prst="rect">
+            <a:avLst/>
+          </a:prstGeom>
+          <a:noFill/>
+        </p:spPr>
+        <p:txBody>
+          <a:bodyPr wrap="square" lIns="0" rIns="0" tIns="0" bIns="0" anchor="t">
+            <a:spAutoFit/>
+          </a:bodyPr>
+          <a:lstStyle/>
+          <a:p>
+            <a:pPr algn="l">
+              <a:lnSpc>
+                <a:spcPct val="110000"/>
+              </a:lnSpc>
+              <a:spcBef>
+                <a:spcPts val="0"/>
+              </a:spcBef>
+              <a:spcAft>
+                <a:spcPts val="0"/>
+              </a:spcAft>
+            </a:pPr>
+            <a:r>
+              <a:rPr sz="1150" b="0">
                 <a:solidFill>
                   <a:srgbClr val="203041"/>
                 </a:solidFill>
@@ -14660,8 +15231,8 @@
         </p:nvSpPr>
         <p:spPr>
           <a:xfrm>
-            <a:off x="8887968" y="1591056"/>
-            <a:ext cx="2450592" cy="1225296"/>
+            <a:off x="8887968" y="1545336"/>
+            <a:ext cx="2450592" cy="1042415"/>
           </a:xfrm>
           <a:prstGeom prst="roundRect">
             <a:avLst>
@@ -14705,7 +15276,7 @@
         </p:nvSpPr>
         <p:spPr>
           <a:xfrm>
-            <a:off x="9043416" y="1746504"/>
+            <a:off x="9043416" y="1673352"/>
             <a:ext cx="2139696" cy="237744"/>
           </a:xfrm>
           <a:prstGeom prst="rect">
@@ -14750,33 +15321,33 @@
         </p:nvSpPr>
         <p:spPr>
           <a:xfrm>
-            <a:off x="9043416" y="2075688"/>
-            <a:ext cx="2112264" cy="557784"/>
-          </a:xfrm>
-          <a:prstGeom prst="rect">
-            <a:avLst/>
-          </a:prstGeom>
-          <a:noFill/>
-        </p:spPr>
-        <p:txBody>
-          <a:bodyPr wrap="square" lIns="0" rIns="0" tIns="0" bIns="0" anchor="t">
-            <a:spAutoFit/>
-          </a:bodyPr>
-          <a:lstStyle/>
-          <a:p>
-            <a:pPr algn="l">
-              <a:lnSpc>
-                <a:spcPct val="110000"/>
-              </a:lnSpc>
-              <a:spcBef>
-                <a:spcPts val="0"/>
-              </a:spcBef>
-              <a:spcAft>
-                <a:spcPts val="0"/>
-              </a:spcAft>
-            </a:pPr>
-            <a:r>
-              <a:rPr sz="1200" b="0">
+            <a:off x="9043416" y="1984248"/>
+            <a:ext cx="2112264" cy="457200"/>
+          </a:xfrm>
+          <a:prstGeom prst="rect">
+            <a:avLst/>
+          </a:prstGeom>
+          <a:noFill/>
+        </p:spPr>
+        <p:txBody>
+          <a:bodyPr wrap="square" lIns="0" rIns="0" tIns="0" bIns="0" anchor="t">
+            <a:spAutoFit/>
+          </a:bodyPr>
+          <a:lstStyle/>
+          <a:p>
+            <a:pPr algn="l">
+              <a:lnSpc>
+                <a:spcPct val="110000"/>
+              </a:lnSpc>
+              <a:spcBef>
+                <a:spcPts val="0"/>
+              </a:spcBef>
+              <a:spcAft>
+                <a:spcPts val="0"/>
+              </a:spcAft>
+            </a:pPr>
+            <a:r>
+              <a:rPr sz="1150" b="0">
                 <a:solidFill>
                   <a:srgbClr val="203041"/>
                 </a:solidFill>
@@ -14795,7 +15366,7 @@
         </p:nvSpPr>
         <p:spPr>
           <a:xfrm>
-            <a:off x="822960" y="3090672"/>
+            <a:off x="822960" y="2798064"/>
             <a:ext cx="10424160" cy="274320"/>
           </a:xfrm>
           <a:prstGeom prst="rect">
@@ -14821,13 +15392,13 @@
               </a:spcAft>
             </a:pPr>
             <a:r>
-              <a:rPr sz="1600" b="1">
+              <a:rPr sz="1450" b="1">
                 <a:solidFill>
                   <a:srgbClr val="2B71B2"/>
                 </a:solidFill>
                 <a:latin typeface="Arial"/>
               </a:rPr>
-              <a:t>Ключевые риски и ответ</a:t>
+              <a:t>Ключевые риски · вероятность / влияние · мера · ответственный</a:t>
             </a:r>
           </a:p>
         </p:txBody>
@@ -14840,8 +15411,8 @@
         </p:nvSpPr>
         <p:spPr>
           <a:xfrm>
-            <a:off x="822960" y="3529584"/>
-            <a:ext cx="10552176" cy="594360"/>
+            <a:off x="822960" y="3182112"/>
+            <a:ext cx="10552176" cy="475488"/>
           </a:xfrm>
           <a:prstGeom prst="roundRect">
             <a:avLst>
@@ -14885,39 +15456,39 @@
         </p:nvSpPr>
         <p:spPr>
           <a:xfrm>
-            <a:off x="1060704" y="3675887"/>
-            <a:ext cx="4389120" cy="320040"/>
-          </a:xfrm>
-          <a:prstGeom prst="rect">
-            <a:avLst/>
-          </a:prstGeom>
-          <a:noFill/>
-        </p:spPr>
-        <p:txBody>
-          <a:bodyPr wrap="square" lIns="0" rIns="0" tIns="0" bIns="0" anchor="t">
-            <a:spAutoFit/>
-          </a:bodyPr>
-          <a:lstStyle/>
-          <a:p>
-            <a:pPr algn="l">
-              <a:lnSpc>
-                <a:spcPct val="110000"/>
-              </a:lnSpc>
-              <a:spcBef>
-                <a:spcPts val="0"/>
-              </a:spcBef>
-              <a:spcAft>
-                <a:spcPts val="0"/>
-              </a:spcAft>
-            </a:pPr>
-            <a:r>
-              <a:rPr sz="1300" b="1">
+            <a:off x="987552" y="3291840"/>
+            <a:ext cx="4087368" cy="274320"/>
+          </a:xfrm>
+          <a:prstGeom prst="rect">
+            <a:avLst/>
+          </a:prstGeom>
+          <a:noFill/>
+        </p:spPr>
+        <p:txBody>
+          <a:bodyPr wrap="square" lIns="0" rIns="0" tIns="0" bIns="0" anchor="t">
+            <a:spAutoFit/>
+          </a:bodyPr>
+          <a:lstStyle/>
+          <a:p>
+            <a:pPr algn="l">
+              <a:lnSpc>
+                <a:spcPct val="110000"/>
+              </a:lnSpc>
+              <a:spcBef>
+                <a:spcPts val="0"/>
+              </a:spcBef>
+              <a:spcAft>
+                <a:spcPts val="0"/>
+              </a:spcAft>
+            </a:pPr>
+            <a:r>
+              <a:rPr sz="1080" b="1">
                 <a:solidFill>
                   <a:srgbClr val="1C364E"/>
                 </a:solidFill>
                 <a:latin typeface="Arial"/>
               </a:rPr>
-              <a:t>Событие геозоны задержится</a:t>
+              <a:t>Событие геозоны задержится · В/В</a:t>
             </a:r>
           </a:p>
         </p:txBody>
@@ -14930,53 +15501,98 @@
         </p:nvSpPr>
         <p:spPr>
           <a:xfrm>
-            <a:off x="5532120" y="3675887"/>
-            <a:ext cx="5532120" cy="320040"/>
-          </a:xfrm>
-          <a:prstGeom prst="rect">
-            <a:avLst/>
-          </a:prstGeom>
-          <a:noFill/>
-        </p:spPr>
-        <p:txBody>
-          <a:bodyPr wrap="square" lIns="0" rIns="0" tIns="0" bIns="0" anchor="t">
-            <a:spAutoFit/>
-          </a:bodyPr>
-          <a:lstStyle/>
-          <a:p>
-            <a:pPr algn="l">
-              <a:lnSpc>
-                <a:spcPct val="110000"/>
-              </a:lnSpc>
-              <a:spcBef>
-                <a:spcPts val="0"/>
-              </a:spcBef>
-              <a:spcAft>
-                <a:spcPts val="0"/>
-              </a:spcAft>
-            </a:pPr>
-            <a:r>
-              <a:rPr sz="1300" b="0">
+            <a:off x="5166360" y="3291840"/>
+            <a:ext cx="4288536" cy="274320"/>
+          </a:xfrm>
+          <a:prstGeom prst="rect">
+            <a:avLst/>
+          </a:prstGeom>
+          <a:noFill/>
+        </p:spPr>
+        <p:txBody>
+          <a:bodyPr wrap="square" lIns="0" rIns="0" tIns="0" bIns="0" anchor="t">
+            <a:spAutoFit/>
+          </a:bodyPr>
+          <a:lstStyle/>
+          <a:p>
+            <a:pPr algn="l">
+              <a:lnSpc>
+                <a:spcPct val="110000"/>
+              </a:lnSpc>
+              <a:spcBef>
+                <a:spcPts val="0"/>
+              </a:spcBef>
+              <a:spcAft>
+                <a:spcPts val="0"/>
+              </a:spcAft>
+            </a:pPr>
+            <a:r>
+              <a:rPr sz="1080" b="0">
                 <a:solidFill>
                   <a:srgbClr val="203041"/>
                 </a:solidFill>
                 <a:latin typeface="Arial"/>
               </a:rPr>
-              <a:t>Сначала симулятор, затем тест на Galaxy S25</a:t>
-            </a:r>
-          </a:p>
-        </p:txBody>
-      </p:sp>
-      <p:sp>
-        <p:nvSpPr>
-          <p:cNvPr id="23" name="Rounded Rectangle 22"/>
+              <a:t>Симулятор → Galaxy S25; документировать</a:t>
+            </a:r>
+          </a:p>
+        </p:txBody>
+      </p:sp>
+      <p:sp>
+        <p:nvSpPr>
+          <p:cNvPr id="23" name="TextBox 22"/>
+          <p:cNvSpPr txBox="1"/>
+          <p:nvPr/>
+        </p:nvSpPr>
+        <p:spPr>
+          <a:xfrm>
+            <a:off x="9509760" y="3291840"/>
+            <a:ext cx="1645920" cy="274320"/>
+          </a:xfrm>
+          <a:prstGeom prst="rect">
+            <a:avLst/>
+          </a:prstGeom>
+          <a:noFill/>
+        </p:spPr>
+        <p:txBody>
+          <a:bodyPr wrap="square" lIns="0" rIns="0" tIns="0" bIns="0" anchor="t">
+            <a:spAutoFit/>
+          </a:bodyPr>
+          <a:lstStyle/>
+          <a:p>
+            <a:pPr algn="l">
+              <a:lnSpc>
+                <a:spcPct val="110000"/>
+              </a:lnSpc>
+              <a:spcBef>
+                <a:spcPts val="0"/>
+              </a:spcBef>
+              <a:spcAft>
+                <a:spcPts val="0"/>
+              </a:spcAft>
+            </a:pPr>
+            <a:r>
+              <a:rPr sz="1000" b="0">
+                <a:solidFill>
+                  <a:srgbClr val="647384"/>
+                </a:solidFill>
+                <a:latin typeface="Arial"/>
+              </a:rPr>
+              <a:t>Боровик</a:t>
+            </a:r>
+          </a:p>
+        </p:txBody>
+      </p:sp>
+      <p:sp>
+        <p:nvSpPr>
+          <p:cNvPr id="24" name="Rounded Rectangle 23"/>
           <p:cNvSpPr/>
           <p:nvPr/>
         </p:nvSpPr>
         <p:spPr>
           <a:xfrm>
-            <a:off x="822960" y="4251960"/>
-            <a:ext cx="10552176" cy="594360"/>
+            <a:off x="822960" y="3730752"/>
+            <a:ext cx="10552176" cy="475488"/>
           </a:xfrm>
           <a:prstGeom prst="roundRect">
             <a:avLst>
@@ -15014,104 +15630,149 @@
       </p:sp>
       <p:sp>
         <p:nvSpPr>
-          <p:cNvPr id="24" name="TextBox 23"/>
-          <p:cNvSpPr txBox="1"/>
-          <p:nvPr/>
-        </p:nvSpPr>
-        <p:spPr>
-          <a:xfrm>
-            <a:off x="1060704" y="4398264"/>
-            <a:ext cx="4389120" cy="320040"/>
-          </a:xfrm>
-          <a:prstGeom prst="rect">
-            <a:avLst/>
-          </a:prstGeom>
-          <a:noFill/>
-        </p:spPr>
-        <p:txBody>
-          <a:bodyPr wrap="square" lIns="0" rIns="0" tIns="0" bIns="0" anchor="t">
-            <a:spAutoFit/>
-          </a:bodyPr>
-          <a:lstStyle/>
-          <a:p>
-            <a:pPr algn="l">
-              <a:lnSpc>
-                <a:spcPct val="110000"/>
-              </a:lnSpc>
-              <a:spcBef>
-                <a:spcPts val="0"/>
-              </a:spcBef>
-              <a:spcAft>
-                <a:spcPts val="0"/>
-              </a:spcAft>
-            </a:pPr>
-            <a:r>
-              <a:rPr sz="1300" b="1">
+          <p:cNvPr id="25" name="TextBox 24"/>
+          <p:cNvSpPr txBox="1"/>
+          <p:nvPr/>
+        </p:nvSpPr>
+        <p:spPr>
+          <a:xfrm>
+            <a:off x="987552" y="3840480"/>
+            <a:ext cx="4087368" cy="274320"/>
+          </a:xfrm>
+          <a:prstGeom prst="rect">
+            <a:avLst/>
+          </a:prstGeom>
+          <a:noFill/>
+        </p:spPr>
+        <p:txBody>
+          <a:bodyPr wrap="square" lIns="0" rIns="0" tIns="0" bIns="0" anchor="t">
+            <a:spAutoFit/>
+          </a:bodyPr>
+          <a:lstStyle/>
+          <a:p>
+            <a:pPr algn="l">
+              <a:lnSpc>
+                <a:spcPct val="110000"/>
+              </a:lnSpc>
+              <a:spcBef>
+                <a:spcPts val="0"/>
+              </a:spcBef>
+              <a:spcAft>
+                <a:spcPts val="0"/>
+              </a:spcAft>
+            </a:pPr>
+            <a:r>
+              <a:rPr sz="1080" b="1">
                 <a:solidFill>
                   <a:srgbClr val="1C364E"/>
                 </a:solidFill>
                 <a:latin typeface="Arial"/>
               </a:rPr>
-              <a:t>Проезд мимо вызовет ложный сигнал</a:t>
-            </a:r>
-          </a:p>
-        </p:txBody>
-      </p:sp>
-      <p:sp>
-        <p:nvSpPr>
-          <p:cNvPr id="25" name="TextBox 24"/>
-          <p:cNvSpPr txBox="1"/>
-          <p:nvPr/>
-        </p:nvSpPr>
-        <p:spPr>
-          <a:xfrm>
-            <a:off x="5532120" y="4398264"/>
-            <a:ext cx="5532120" cy="320040"/>
-          </a:xfrm>
-          <a:prstGeom prst="rect">
-            <a:avLst/>
-          </a:prstGeom>
-          <a:noFill/>
-        </p:spPr>
-        <p:txBody>
-          <a:bodyPr wrap="square" lIns="0" rIns="0" tIns="0" bIns="0" anchor="t">
-            <a:spAutoFit/>
-          </a:bodyPr>
-          <a:lstStyle/>
-          <a:p>
-            <a:pPr algn="l">
-              <a:lnSpc>
-                <a:spcPct val="110000"/>
-              </a:lnSpc>
-              <a:spcBef>
-                <a:spcPts val="0"/>
-              </a:spcBef>
-              <a:spcAft>
-                <a:spcPts val="0"/>
-              </a:spcAft>
-            </a:pPr>
-            <a:r>
-              <a:rPr sz="1300" b="0">
+              <a:t>Проезд мимо даст ложный сигнал · В/В</a:t>
+            </a:r>
+          </a:p>
+        </p:txBody>
+      </p:sp>
+      <p:sp>
+        <p:nvSpPr>
+          <p:cNvPr id="26" name="TextBox 25"/>
+          <p:cNvSpPr txBox="1"/>
+          <p:nvPr/>
+        </p:nvSpPr>
+        <p:spPr>
+          <a:xfrm>
+            <a:off x="5166360" y="3840480"/>
+            <a:ext cx="4288536" cy="274320"/>
+          </a:xfrm>
+          <a:prstGeom prst="rect">
+            <a:avLst/>
+          </a:prstGeom>
+          <a:noFill/>
+        </p:spPr>
+        <p:txBody>
+          <a:bodyPr wrap="square" lIns="0" rIns="0" tIns="0" bIns="0" anchor="t">
+            <a:spAutoFit/>
+          </a:bodyPr>
+          <a:lstStyle/>
+          <a:p>
+            <a:pPr algn="l">
+              <a:lnSpc>
+                <a:spcPct val="110000"/>
+              </a:lnSpc>
+              <a:spcBef>
+                <a:spcPts val="0"/>
+              </a:spcBef>
+              <a:spcAft>
+                <a:spcPts val="0"/>
+              </a:spcAft>
+            </a:pPr>
+            <a:r>
+              <a:rPr sz="1080" b="0">
                 <a:solidFill>
                   <a:srgbClr val="203041"/>
                 </a:solidFill>
                 <a:latin typeface="Arial"/>
               </a:rPr>
-              <a:t>CANDIDATE → выдержка → CONFIRMED</a:t>
-            </a:r>
-          </a:p>
-        </p:txBody>
-      </p:sp>
-      <p:sp>
-        <p:nvSpPr>
-          <p:cNvPr id="26" name="Rounded Rectangle 25"/>
+              <a:t>CANDIDATE + выдержка; тест границ</a:t>
+            </a:r>
+          </a:p>
+        </p:txBody>
+      </p:sp>
+      <p:sp>
+        <p:nvSpPr>
+          <p:cNvPr id="27" name="TextBox 26"/>
+          <p:cNvSpPr txBox="1"/>
+          <p:nvPr/>
+        </p:nvSpPr>
+        <p:spPr>
+          <a:xfrm>
+            <a:off x="9509760" y="3840480"/>
+            <a:ext cx="1645920" cy="274320"/>
+          </a:xfrm>
+          <a:prstGeom prst="rect">
+            <a:avLst/>
+          </a:prstGeom>
+          <a:noFill/>
+        </p:spPr>
+        <p:txBody>
+          <a:bodyPr wrap="square" lIns="0" rIns="0" tIns="0" bIns="0" anchor="t">
+            <a:spAutoFit/>
+          </a:bodyPr>
+          <a:lstStyle/>
+          <a:p>
+            <a:pPr algn="l">
+              <a:lnSpc>
+                <a:spcPct val="110000"/>
+              </a:lnSpc>
+              <a:spcBef>
+                <a:spcPts val="0"/>
+              </a:spcBef>
+              <a:spcAft>
+                <a:spcPts val="0"/>
+              </a:spcAft>
+            </a:pPr>
+            <a:r>
+              <a:rPr sz="1000" b="0">
+                <a:solidFill>
+                  <a:srgbClr val="647384"/>
+                </a:solidFill>
+                <a:latin typeface="Arial"/>
+              </a:rPr>
+              <a:t>Поспелова</a:t>
+            </a:r>
+          </a:p>
+        </p:txBody>
+      </p:sp>
+      <p:sp>
+        <p:nvSpPr>
+          <p:cNvPr id="28" name="Rounded Rectangle 27"/>
           <p:cNvSpPr/>
           <p:nvPr/>
         </p:nvSpPr>
         <p:spPr>
           <a:xfrm>
-            <a:off x="822960" y="4974336"/>
-            <a:ext cx="10552176" cy="594360"/>
+            <a:off x="822960" y="4279392"/>
+            <a:ext cx="10552176" cy="475488"/>
           </a:xfrm>
           <a:prstGeom prst="roundRect">
             <a:avLst>
@@ -15149,90 +15810,540 @@
       </p:sp>
       <p:sp>
         <p:nvSpPr>
-          <p:cNvPr id="27" name="TextBox 26"/>
-          <p:cNvSpPr txBox="1"/>
-          <p:nvPr/>
-        </p:nvSpPr>
-        <p:spPr>
-          <a:xfrm>
-            <a:off x="1060704" y="5120640"/>
-            <a:ext cx="4389120" cy="320040"/>
-          </a:xfrm>
-          <a:prstGeom prst="rect">
-            <a:avLst/>
-          </a:prstGeom>
-          <a:noFill/>
-        </p:spPr>
-        <p:txBody>
-          <a:bodyPr wrap="square" lIns="0" rIns="0" tIns="0" bIns="0" anchor="t">
-            <a:spAutoFit/>
-          </a:bodyPr>
-          <a:lstStyle/>
-          <a:p>
-            <a:pPr algn="l">
-              <a:lnSpc>
-                <a:spcPct val="110000"/>
-              </a:lnSpc>
-              <a:spcBef>
-                <a:spcPts val="0"/>
-              </a:spcBef>
-              <a:spcAft>
-                <a:spcPts val="0"/>
-              </a:spcAft>
-            </a:pPr>
-            <a:r>
-              <a:rPr sz="1300" b="1">
+          <p:cNvPr id="29" name="TextBox 28"/>
+          <p:cNvSpPr txBox="1"/>
+          <p:nvPr/>
+        </p:nvSpPr>
+        <p:spPr>
+          <a:xfrm>
+            <a:off x="987552" y="4389120"/>
+            <a:ext cx="4087368" cy="274320"/>
+          </a:xfrm>
+          <a:prstGeom prst="rect">
+            <a:avLst/>
+          </a:prstGeom>
+          <a:noFill/>
+        </p:spPr>
+        <p:txBody>
+          <a:bodyPr wrap="square" lIns="0" rIns="0" tIns="0" bIns="0" anchor="t">
+            <a:spAutoFit/>
+          </a:bodyPr>
+          <a:lstStyle/>
+          <a:p>
+            <a:pPr algn="l">
+              <a:lnSpc>
+                <a:spcPct val="110000"/>
+              </a:lnSpc>
+              <a:spcBef>
+                <a:spcPts val="0"/>
+              </a:spcBef>
+              <a:spcAft>
+                <a:spcPts val="0"/>
+              </a:spcAft>
+            </a:pPr>
+            <a:r>
+              <a:rPr sz="1080" b="1">
                 <a:solidFill>
                   <a:srgbClr val="1C364E"/>
                 </a:solidFill>
                 <a:latin typeface="Arial"/>
               </a:rPr>
-              <a:t>Перезапуск создаст дубль</a:t>
-            </a:r>
-          </a:p>
-        </p:txBody>
-      </p:sp>
-      <p:sp>
-        <p:nvSpPr>
-          <p:cNvPr id="28" name="TextBox 27"/>
-          <p:cNvSpPr txBox="1"/>
-          <p:nvPr/>
-        </p:nvSpPr>
-        <p:spPr>
-          <a:xfrm>
-            <a:off x="5532120" y="5120640"/>
-            <a:ext cx="5532120" cy="320040"/>
-          </a:xfrm>
-          <a:prstGeom prst="rect">
-            <a:avLst/>
-          </a:prstGeom>
-          <a:noFill/>
-        </p:spPr>
-        <p:txBody>
-          <a:bodyPr wrap="square" lIns="0" rIns="0" tIns="0" bIns="0" anchor="t">
-            <a:spAutoFit/>
-          </a:bodyPr>
-          <a:lstStyle/>
-          <a:p>
-            <a:pPr algn="l">
-              <a:lnSpc>
-                <a:spcPct val="110000"/>
-              </a:lnSpc>
-              <a:spcBef>
-                <a:spcPts val="0"/>
-              </a:spcBef>
-              <a:spcAft>
-                <a:spcPts val="0"/>
-              </a:spcAft>
-            </a:pPr>
-            <a:r>
-              <a:rPr sz="1300" b="0">
+              <a:t>Перезапуск создаст дубль · С/В</a:t>
+            </a:r>
+          </a:p>
+        </p:txBody>
+      </p:sp>
+      <p:sp>
+        <p:nvSpPr>
+          <p:cNvPr id="30" name="TextBox 29"/>
+          <p:cNvSpPr txBox="1"/>
+          <p:nvPr/>
+        </p:nvSpPr>
+        <p:spPr>
+          <a:xfrm>
+            <a:off x="5166360" y="4389120"/>
+            <a:ext cx="4288536" cy="274320"/>
+          </a:xfrm>
+          <a:prstGeom prst="rect">
+            <a:avLst/>
+          </a:prstGeom>
+          <a:noFill/>
+        </p:spPr>
+        <p:txBody>
+          <a:bodyPr wrap="square" lIns="0" rIns="0" tIns="0" bIns="0" anchor="t">
+            <a:spAutoFit/>
+          </a:bodyPr>
+          <a:lstStyle/>
+          <a:p>
+            <a:pPr algn="l">
+              <a:lnSpc>
+                <a:spcPct val="110000"/>
+              </a:lnSpc>
+              <a:spcBef>
+                <a:spcPts val="0"/>
+              </a:spcBef>
+              <a:spcAft>
+                <a:spcPts val="0"/>
+              </a:spcAft>
+            </a:pPr>
+            <a:r>
+              <a:rPr sz="1080" b="0">
                 <a:solidFill>
                   <a:srgbClr val="203041"/>
                 </a:solidFill>
                 <a:latin typeface="Arial"/>
               </a:rPr>
-              <a:t>Хранить визит и ключ уведомления локально</a:t>
+              <a:t>Хранить визит и ключ уведомления</a:t>
+            </a:r>
+          </a:p>
+        </p:txBody>
+      </p:sp>
+      <p:sp>
+        <p:nvSpPr>
+          <p:cNvPr id="31" name="TextBox 30"/>
+          <p:cNvSpPr txBox="1"/>
+          <p:nvPr/>
+        </p:nvSpPr>
+        <p:spPr>
+          <a:xfrm>
+            <a:off x="9509760" y="4389120"/>
+            <a:ext cx="1645920" cy="274320"/>
+          </a:xfrm>
+          <a:prstGeom prst="rect">
+            <a:avLst/>
+          </a:prstGeom>
+          <a:noFill/>
+        </p:spPr>
+        <p:txBody>
+          <a:bodyPr wrap="square" lIns="0" rIns="0" tIns="0" bIns="0" anchor="t">
+            <a:spAutoFit/>
+          </a:bodyPr>
+          <a:lstStyle/>
+          <a:p>
+            <a:pPr algn="l">
+              <a:lnSpc>
+                <a:spcPct val="110000"/>
+              </a:lnSpc>
+              <a:spcBef>
+                <a:spcPts val="0"/>
+              </a:spcBef>
+              <a:spcAft>
+                <a:spcPts val="0"/>
+              </a:spcAft>
+            </a:pPr>
+            <a:r>
+              <a:rPr sz="1000" b="0">
+                <a:solidFill>
+                  <a:srgbClr val="647384"/>
+                </a:solidFill>
+                <a:latin typeface="Arial"/>
+              </a:rPr>
+              <a:t>Боровик / Поспелова</a:t>
+            </a:r>
+          </a:p>
+        </p:txBody>
+      </p:sp>
+      <p:sp>
+        <p:nvSpPr>
+          <p:cNvPr id="32" name="Rounded Rectangle 31"/>
+          <p:cNvSpPr/>
+          <p:nvPr/>
+        </p:nvSpPr>
+        <p:spPr>
+          <a:xfrm>
+            <a:off x="822960" y="4828031"/>
+            <a:ext cx="10552176" cy="475488"/>
+          </a:xfrm>
+          <a:prstGeom prst="roundRect">
+            <a:avLst>
+              <a:gd name="adj" fmla="val 12000"/>
+            </a:avLst>
+          </a:prstGeom>
+          <a:solidFill>
+            <a:srgbClr val="EFF4F9"/>
+          </a:solidFill>
+          <a:ln>
+            <a:noFill/>
+          </a:ln>
+        </p:spPr>
+        <p:style>
+          <a:lnRef idx="1">
+            <a:schemeClr val="accent1"/>
+          </a:lnRef>
+          <a:fillRef idx="3">
+            <a:schemeClr val="accent1"/>
+          </a:fillRef>
+          <a:effectRef idx="2">
+            <a:schemeClr val="accent1"/>
+          </a:effectRef>
+          <a:fontRef idx="minor">
+            <a:schemeClr val="lt1"/>
+          </a:fontRef>
+        </p:style>
+        <p:txBody>
+          <a:bodyPr rtlCol="0" anchor="ctr"/>
+          <a:lstStyle/>
+          <a:p>
+            <a:pPr algn="ctr"/>
+          </a:p>
+        </p:txBody>
+      </p:sp>
+      <p:sp>
+        <p:nvSpPr>
+          <p:cNvPr id="33" name="TextBox 32"/>
+          <p:cNvSpPr txBox="1"/>
+          <p:nvPr/>
+        </p:nvSpPr>
+        <p:spPr>
+          <a:xfrm>
+            <a:off x="987552" y="4937759"/>
+            <a:ext cx="4087368" cy="274320"/>
+          </a:xfrm>
+          <a:prstGeom prst="rect">
+            <a:avLst/>
+          </a:prstGeom>
+          <a:noFill/>
+        </p:spPr>
+        <p:txBody>
+          <a:bodyPr wrap="square" lIns="0" rIns="0" tIns="0" bIns="0" anchor="t">
+            <a:spAutoFit/>
+          </a:bodyPr>
+          <a:lstStyle/>
+          <a:p>
+            <a:pPr algn="l">
+              <a:lnSpc>
+                <a:spcPct val="110000"/>
+              </a:lnSpc>
+              <a:spcBef>
+                <a:spcPts val="0"/>
+              </a:spcBef>
+              <a:spcAft>
+                <a:spcPts val="0"/>
+              </a:spcAft>
+            </a:pPr>
+            <a:r>
+              <a:rPr sz="1080" b="1">
+                <a:solidFill>
+                  <a:srgbClr val="1C364E"/>
+                </a:solidFill>
+                <a:latin typeface="Arial"/>
+              </a:rPr>
+              <a:t>Нативный Android займёт больше времени · С/В</a:t>
+            </a:r>
+          </a:p>
+        </p:txBody>
+      </p:sp>
+      <p:sp>
+        <p:nvSpPr>
+          <p:cNvPr id="34" name="TextBox 33"/>
+          <p:cNvSpPr txBox="1"/>
+          <p:nvPr/>
+        </p:nvSpPr>
+        <p:spPr>
+          <a:xfrm>
+            <a:off x="5166360" y="4937759"/>
+            <a:ext cx="4288536" cy="274320"/>
+          </a:xfrm>
+          <a:prstGeom prst="rect">
+            <a:avLst/>
+          </a:prstGeom>
+          <a:noFill/>
+        </p:spPr>
+        <p:txBody>
+          <a:bodyPr wrap="square" lIns="0" rIns="0" tIns="0" bIns="0" anchor="t">
+            <a:spAutoFit/>
+          </a:bodyPr>
+          <a:lstStyle/>
+          <a:p>
+            <a:pPr algn="l">
+              <a:lnSpc>
+                <a:spcPct val="110000"/>
+              </a:lnSpc>
+              <a:spcBef>
+                <a:spcPts val="0"/>
+              </a:spcBef>
+              <a:spcAft>
+                <a:spcPts val="0"/>
+              </a:spcAft>
+            </a:pPr>
+            <a:r>
+              <a:rPr sz="1080" b="0">
+                <a:solidFill>
+                  <a:srgbClr val="203041"/>
+                </a:solidFill>
+                <a:latin typeface="Arial"/>
+              </a:rPr>
+              <a:t>Ограничить объём; начать с логики</a:t>
+            </a:r>
+          </a:p>
+        </p:txBody>
+      </p:sp>
+      <p:sp>
+        <p:nvSpPr>
+          <p:cNvPr id="35" name="TextBox 34"/>
+          <p:cNvSpPr txBox="1"/>
+          <p:nvPr/>
+        </p:nvSpPr>
+        <p:spPr>
+          <a:xfrm>
+            <a:off x="9509760" y="4937759"/>
+            <a:ext cx="1645920" cy="274320"/>
+          </a:xfrm>
+          <a:prstGeom prst="rect">
+            <a:avLst/>
+          </a:prstGeom>
+          <a:noFill/>
+        </p:spPr>
+        <p:txBody>
+          <a:bodyPr wrap="square" lIns="0" rIns="0" tIns="0" bIns="0" anchor="t">
+            <a:spAutoFit/>
+          </a:bodyPr>
+          <a:lstStyle/>
+          <a:p>
+            <a:pPr algn="l">
+              <a:lnSpc>
+                <a:spcPct val="110000"/>
+              </a:lnSpc>
+              <a:spcBef>
+                <a:spcPts val="0"/>
+              </a:spcBef>
+              <a:spcAft>
+                <a:spcPts val="0"/>
+              </a:spcAft>
+            </a:pPr>
+            <a:r>
+              <a:rPr sz="1000" b="0">
+                <a:solidFill>
+                  <a:srgbClr val="647384"/>
+                </a:solidFill>
+                <a:latin typeface="Arial"/>
+              </a:rPr>
+              <a:t>Бартоломей</a:t>
+            </a:r>
+          </a:p>
+        </p:txBody>
+      </p:sp>
+      <p:sp>
+        <p:nvSpPr>
+          <p:cNvPr id="36" name="Rounded Rectangle 35"/>
+          <p:cNvSpPr/>
+          <p:nvPr/>
+        </p:nvSpPr>
+        <p:spPr>
+          <a:xfrm>
+            <a:off x="822960" y="5376672"/>
+            <a:ext cx="10552176" cy="475488"/>
+          </a:xfrm>
+          <a:prstGeom prst="roundRect">
+            <a:avLst>
+              <a:gd name="adj" fmla="val 12000"/>
+            </a:avLst>
+          </a:prstGeom>
+          <a:solidFill>
+            <a:srgbClr val="EFF4F9"/>
+          </a:solidFill>
+          <a:ln>
+            <a:noFill/>
+          </a:ln>
+        </p:spPr>
+        <p:style>
+          <a:lnRef idx="1">
+            <a:schemeClr val="accent1"/>
+          </a:lnRef>
+          <a:fillRef idx="3">
+            <a:schemeClr val="accent1"/>
+          </a:fillRef>
+          <a:effectRef idx="2">
+            <a:schemeClr val="accent1"/>
+          </a:effectRef>
+          <a:fontRef idx="minor">
+            <a:schemeClr val="lt1"/>
+          </a:fontRef>
+        </p:style>
+        <p:txBody>
+          <a:bodyPr rtlCol="0" anchor="ctr"/>
+          <a:lstStyle/>
+          <a:p>
+            <a:pPr algn="ctr"/>
+          </a:p>
+        </p:txBody>
+      </p:sp>
+      <p:sp>
+        <p:nvSpPr>
+          <p:cNvPr id="37" name="TextBox 36"/>
+          <p:cNvSpPr txBox="1"/>
+          <p:nvPr/>
+        </p:nvSpPr>
+        <p:spPr>
+          <a:xfrm>
+            <a:off x="987552" y="5486400"/>
+            <a:ext cx="4087368" cy="274320"/>
+          </a:xfrm>
+          <a:prstGeom prst="rect">
+            <a:avLst/>
+          </a:prstGeom>
+          <a:noFill/>
+        </p:spPr>
+        <p:txBody>
+          <a:bodyPr wrap="square" lIns="0" rIns="0" tIns="0" bIns="0" anchor="t">
+            <a:spAutoFit/>
+          </a:bodyPr>
+          <a:lstStyle/>
+          <a:p>
+            <a:pPr algn="l">
+              <a:lnSpc>
+                <a:spcPct val="110000"/>
+              </a:lnSpc>
+              <a:spcBef>
+                <a:spcPts val="0"/>
+              </a:spcBef>
+              <a:spcAft>
+                <a:spcPts val="0"/>
+              </a:spcAft>
+            </a:pPr>
+            <a:r>
+              <a:rPr sz="1080" b="1">
+                <a:solidFill>
+                  <a:srgbClr val="1C364E"/>
+                </a:solidFill>
+                <a:latin typeface="Arial"/>
+              </a:rPr>
+              <a:t>Геоданные вызовут недоверие · С/В</a:t>
+            </a:r>
+          </a:p>
+        </p:txBody>
+      </p:sp>
+      <p:sp>
+        <p:nvSpPr>
+          <p:cNvPr id="38" name="TextBox 37"/>
+          <p:cNvSpPr txBox="1"/>
+          <p:nvPr/>
+        </p:nvSpPr>
+        <p:spPr>
+          <a:xfrm>
+            <a:off x="5166360" y="5486400"/>
+            <a:ext cx="4288536" cy="274320"/>
+          </a:xfrm>
+          <a:prstGeom prst="rect">
+            <a:avLst/>
+          </a:prstGeom>
+          <a:noFill/>
+        </p:spPr>
+        <p:txBody>
+          <a:bodyPr wrap="square" lIns="0" rIns="0" tIns="0" bIns="0" anchor="t">
+            <a:spAutoFit/>
+          </a:bodyPr>
+          <a:lstStyle/>
+          <a:p>
+            <a:pPr algn="l">
+              <a:lnSpc>
+                <a:spcPct val="110000"/>
+              </a:lnSpc>
+              <a:spcBef>
+                <a:spcPts val="0"/>
+              </a:spcBef>
+              <a:spcAft>
+                <a:spcPts val="0"/>
+              </a:spcAft>
+            </a:pPr>
+            <a:r>
+              <a:rPr sz="1080" b="0">
+                <a:solidFill>
+                  <a:srgbClr val="203041"/>
+                </a:solidFill>
+                <a:latin typeface="Arial"/>
+              </a:rPr>
+              <a:t>Локально, минимум событий, удаление</a:t>
+            </a:r>
+          </a:p>
+        </p:txBody>
+      </p:sp>
+      <p:sp>
+        <p:nvSpPr>
+          <p:cNvPr id="39" name="TextBox 38"/>
+          <p:cNvSpPr txBox="1"/>
+          <p:nvPr/>
+        </p:nvSpPr>
+        <p:spPr>
+          <a:xfrm>
+            <a:off x="9509760" y="5486400"/>
+            <a:ext cx="1645920" cy="274320"/>
+          </a:xfrm>
+          <a:prstGeom prst="rect">
+            <a:avLst/>
+          </a:prstGeom>
+          <a:noFill/>
+        </p:spPr>
+        <p:txBody>
+          <a:bodyPr wrap="square" lIns="0" rIns="0" tIns="0" bIns="0" anchor="t">
+            <a:spAutoFit/>
+          </a:bodyPr>
+          <a:lstStyle/>
+          <a:p>
+            <a:pPr algn="l">
+              <a:lnSpc>
+                <a:spcPct val="110000"/>
+              </a:lnSpc>
+              <a:spcBef>
+                <a:spcPts val="0"/>
+              </a:spcBef>
+              <a:spcAft>
+                <a:spcPts val="0"/>
+              </a:spcAft>
+            </a:pPr>
+            <a:r>
+              <a:rPr sz="1000" b="0">
+                <a:solidFill>
+                  <a:srgbClr val="647384"/>
+                </a:solidFill>
+                <a:latin typeface="Arial"/>
+              </a:rPr>
+              <a:t>Золотилина</a:t>
+            </a:r>
+          </a:p>
+        </p:txBody>
+      </p:sp>
+      <p:sp>
+        <p:nvSpPr>
+          <p:cNvPr id="40" name="TextBox 39"/>
+          <p:cNvSpPr txBox="1"/>
+          <p:nvPr/>
+        </p:nvSpPr>
+        <p:spPr>
+          <a:xfrm>
+            <a:off x="822960" y="5943600"/>
+            <a:ext cx="10469880" cy="320040"/>
+          </a:xfrm>
+          <a:prstGeom prst="rect">
+            <a:avLst/>
+          </a:prstGeom>
+          <a:noFill/>
+        </p:spPr>
+        <p:txBody>
+          <a:bodyPr wrap="square" lIns="0" rIns="0" tIns="0" bIns="0" anchor="t">
+            <a:spAutoFit/>
+          </a:bodyPr>
+          <a:lstStyle/>
+          <a:p>
+            <a:pPr algn="l">
+              <a:lnSpc>
+                <a:spcPct val="110000"/>
+              </a:lnSpc>
+              <a:spcBef>
+                <a:spcPts val="0"/>
+              </a:spcBef>
+              <a:spcAft>
+                <a:spcPts val="0"/>
+              </a:spcAft>
+            </a:pPr>
+            <a:r>
+              <a:rPr sz="950" b="0">
+                <a:solidFill>
+                  <a:srgbClr val="647384"/>
+                </a:solidFill>
+                <a:latin typeface="Arial"/>
+              </a:rPr>
+              <a:t>Ориентир исходного плана: MVP к концу декабря; дату уточняем по дорожной карте курса.</a:t>
             </a:r>
           </a:p>
         </p:txBody>
@@ -15383,7 +16494,7 @@
                 </a:solidFill>
                 <a:latin typeface="Arial"/>
               </a:rPr>
-              <a:t>Состояние задач КТ1</a:t>
+              <a:t>Распределение задач до КТ1</a:t>
             </a:r>
           </a:p>
         </p:txBody>
@@ -15428,7 +16539,7 @@
                 </a:solidFill>
                 <a:latin typeface="Arial"/>
               </a:rPr>
-              <a:t>Состояние доски GitHub Projects на 15.10.2026; проценты готовности не выдумываем.</a:t>
+              <a:t>Плановые даты команды и фактические статусы GitHub Projects на 15.10.2026.</a:t>
             </a:r>
           </a:p>
         </p:txBody>
@@ -16179,14 +17290,194 @@
       </p:sp>
       <p:sp>
         <p:nvSpPr>
-          <p:cNvPr id="23" name="Rectangle 22"/>
+          <p:cNvPr id="23" name="TextBox 22"/>
+          <p:cNvSpPr txBox="1"/>
+          <p:nvPr/>
+        </p:nvSpPr>
+        <p:spPr>
+          <a:xfrm>
+            <a:off x="1005840" y="2660904"/>
+            <a:ext cx="594360" cy="246888"/>
+          </a:xfrm>
+          <a:prstGeom prst="rect">
+            <a:avLst/>
+          </a:prstGeom>
+          <a:noFill/>
+        </p:spPr>
+        <p:txBody>
+          <a:bodyPr wrap="square" lIns="0" rIns="0" tIns="0" bIns="0" anchor="t">
+            <a:spAutoFit/>
+          </a:bodyPr>
+          <a:lstStyle/>
+          <a:p>
+            <a:pPr algn="l">
+              <a:lnSpc>
+                <a:spcPct val="110000"/>
+              </a:lnSpc>
+              <a:spcBef>
+                <a:spcPts val="0"/>
+              </a:spcBef>
+              <a:spcAft>
+                <a:spcPts val="0"/>
+              </a:spcAft>
+            </a:pPr>
+            <a:r>
+              <a:rPr sz="1050" b="1">
+                <a:solidFill>
+                  <a:srgbClr val="2B71B2"/>
+                </a:solidFill>
+                <a:latin typeface="Arial"/>
+              </a:rPr>
+              <a:t>Issue</a:t>
+            </a:r>
+          </a:p>
+        </p:txBody>
+      </p:sp>
+      <p:sp>
+        <p:nvSpPr>
+          <p:cNvPr id="24" name="TextBox 23"/>
+          <p:cNvSpPr txBox="1"/>
+          <p:nvPr/>
+        </p:nvSpPr>
+        <p:spPr>
+          <a:xfrm>
+            <a:off x="1755648" y="2660904"/>
+            <a:ext cx="5715000" cy="246888"/>
+          </a:xfrm>
+          <a:prstGeom prst="rect">
+            <a:avLst/>
+          </a:prstGeom>
+          <a:noFill/>
+        </p:spPr>
+        <p:txBody>
+          <a:bodyPr wrap="square" lIns="0" rIns="0" tIns="0" bIns="0" anchor="t">
+            <a:spAutoFit/>
+          </a:bodyPr>
+          <a:lstStyle/>
+          <a:p>
+            <a:pPr algn="l">
+              <a:lnSpc>
+                <a:spcPct val="110000"/>
+              </a:lnSpc>
+              <a:spcBef>
+                <a:spcPts val="0"/>
+              </a:spcBef>
+              <a:spcAft>
+                <a:spcPts val="0"/>
+              </a:spcAft>
+            </a:pPr>
+            <a:r>
+              <a:rPr sz="1050" b="1">
+                <a:solidFill>
+                  <a:srgbClr val="2B71B2"/>
+                </a:solidFill>
+                <a:latin typeface="Arial"/>
+              </a:rPr>
+              <a:t>Задача исходного плана</a:t>
+            </a:r>
+          </a:p>
+        </p:txBody>
+      </p:sp>
+      <p:sp>
+        <p:nvSpPr>
+          <p:cNvPr id="25" name="TextBox 24"/>
+          <p:cNvSpPr txBox="1"/>
+          <p:nvPr/>
+        </p:nvSpPr>
+        <p:spPr>
+          <a:xfrm>
+            <a:off x="8001000" y="2660904"/>
+            <a:ext cx="1188720" cy="246888"/>
+          </a:xfrm>
+          <a:prstGeom prst="rect">
+            <a:avLst/>
+          </a:prstGeom>
+          <a:noFill/>
+        </p:spPr>
+        <p:txBody>
+          <a:bodyPr wrap="square" lIns="0" rIns="0" tIns="0" bIns="0" anchor="t">
+            <a:spAutoFit/>
+          </a:bodyPr>
+          <a:lstStyle/>
+          <a:p>
+            <a:pPr algn="l">
+              <a:lnSpc>
+                <a:spcPct val="110000"/>
+              </a:lnSpc>
+              <a:spcBef>
+                <a:spcPts val="0"/>
+              </a:spcBef>
+              <a:spcAft>
+                <a:spcPts val="0"/>
+              </a:spcAft>
+            </a:pPr>
+            <a:r>
+              <a:rPr sz="1050" b="1">
+                <a:solidFill>
+                  <a:srgbClr val="2B71B2"/>
+                </a:solidFill>
+                <a:latin typeface="Arial"/>
+              </a:rPr>
+              <a:t>План</a:t>
+            </a:r>
+          </a:p>
+        </p:txBody>
+      </p:sp>
+      <p:sp>
+        <p:nvSpPr>
+          <p:cNvPr id="26" name="TextBox 25"/>
+          <p:cNvSpPr txBox="1"/>
+          <p:nvPr/>
+        </p:nvSpPr>
+        <p:spPr>
+          <a:xfrm>
+            <a:off x="9409176" y="2660904"/>
+            <a:ext cx="1755648" cy="246888"/>
+          </a:xfrm>
+          <a:prstGeom prst="rect">
+            <a:avLst/>
+          </a:prstGeom>
+          <a:noFill/>
+        </p:spPr>
+        <p:txBody>
+          <a:bodyPr wrap="square" lIns="0" rIns="0" tIns="0" bIns="0" anchor="t">
+            <a:spAutoFit/>
+          </a:bodyPr>
+          <a:lstStyle/>
+          <a:p>
+            <a:pPr algn="l">
+              <a:lnSpc>
+                <a:spcPct val="110000"/>
+              </a:lnSpc>
+              <a:spcBef>
+                <a:spcPts val="0"/>
+              </a:spcBef>
+              <a:spcAft>
+                <a:spcPts val="0"/>
+              </a:spcAft>
+            </a:pPr>
+            <a:r>
+              <a:rPr sz="1050" b="1">
+                <a:solidFill>
+                  <a:srgbClr val="2B71B2"/>
+                </a:solidFill>
+                <a:latin typeface="Arial"/>
+              </a:rPr>
+              <a:t>Факт</a:t>
+            </a:r>
+          </a:p>
+        </p:txBody>
+      </p:sp>
+      <p:sp>
+        <p:nvSpPr>
+          <p:cNvPr id="27" name="Rectangle 26"/>
           <p:cNvSpPr/>
           <p:nvPr/>
         </p:nvSpPr>
         <p:spPr>
           <a:xfrm>
-            <a:off x="822960" y="2761488"/>
-            <a:ext cx="10552176" cy="466344"/>
+            <a:off x="822960" y="2962656"/>
+            <a:ext cx="10552176" cy="457200"/>
           </a:xfrm>
           <a:prstGeom prst="rect">
             <a:avLst/>
@@ -16222,14 +17513,14 @@
       </p:sp>
       <p:sp>
         <p:nvSpPr>
-          <p:cNvPr id="24" name="TextBox 23"/>
-          <p:cNvSpPr txBox="1"/>
-          <p:nvPr/>
-        </p:nvSpPr>
-        <p:spPr>
-          <a:xfrm>
-            <a:off x="1005840" y="2843784"/>
-            <a:ext cx="1417320" cy="292608"/>
+          <p:cNvPr id="28" name="TextBox 27"/>
+          <p:cNvSpPr txBox="1"/>
+          <p:nvPr/>
+        </p:nvSpPr>
+        <p:spPr>
+          <a:xfrm>
+            <a:off x="1005840" y="3044952"/>
+            <a:ext cx="621792" cy="274320"/>
           </a:xfrm>
           <a:prstGeom prst="rect">
             <a:avLst/>
@@ -16260,111 +17551,156 @@
                 </a:solidFill>
                 <a:latin typeface="Arial"/>
               </a:rPr>
-              <a:t>#2–#4</a:t>
-            </a:r>
-          </a:p>
-        </p:txBody>
-      </p:sp>
-      <p:sp>
-        <p:nvSpPr>
-          <p:cNvPr id="25" name="TextBox 24"/>
-          <p:cNvSpPr txBox="1"/>
-          <p:nvPr/>
-        </p:nvSpPr>
-        <p:spPr>
-          <a:xfrm>
-            <a:off x="2487168" y="2843784"/>
-            <a:ext cx="6629400" cy="292608"/>
-          </a:xfrm>
-          <a:prstGeom prst="rect">
-            <a:avLst/>
-          </a:prstGeom>
-          <a:noFill/>
-        </p:spPr>
-        <p:txBody>
-          <a:bodyPr wrap="square" lIns="0" rIns="0" tIns="0" bIns="0" anchor="t">
-            <a:spAutoFit/>
-          </a:bodyPr>
-          <a:lstStyle/>
-          <a:p>
-            <a:pPr algn="l">
-              <a:lnSpc>
-                <a:spcPct val="110000"/>
-              </a:lnSpc>
-              <a:spcBef>
-                <a:spcPts val="0"/>
-              </a:spcBef>
-              <a:spcAft>
-                <a:spcPts val="0"/>
-              </a:spcAft>
-            </a:pPr>
-            <a:r>
-              <a:rPr sz="1200" b="0">
+              <a:t>#8</a:t>
+            </a:r>
+          </a:p>
+        </p:txBody>
+      </p:sp>
+      <p:sp>
+        <p:nvSpPr>
+          <p:cNvPr id="29" name="TextBox 28"/>
+          <p:cNvSpPr txBox="1"/>
+          <p:nvPr/>
+        </p:nvSpPr>
+        <p:spPr>
+          <a:xfrm>
+            <a:off x="1755648" y="3044952"/>
+            <a:ext cx="5952744" cy="274320"/>
+          </a:xfrm>
+          <a:prstGeom prst="rect">
+            <a:avLst/>
+          </a:prstGeom>
+          <a:noFill/>
+        </p:spPr>
+        <p:txBody>
+          <a:bodyPr wrap="square" lIns="0" rIns="0" tIns="0" bIns="0" anchor="t">
+            <a:spAutoFit/>
+          </a:bodyPr>
+          <a:lstStyle/>
+          <a:p>
+            <a:pPr algn="l">
+              <a:lnSpc>
+                <a:spcPct val="110000"/>
+              </a:lnSpc>
+              <a:spcBef>
+                <a:spcPts val="0"/>
+              </a:spcBef>
+              <a:spcAft>
+                <a:spcPts val="0"/>
+              </a:spcAft>
+            </a:pPr>
+            <a:r>
+              <a:rPr sz="1150" b="0">
                 <a:solidFill>
                   <a:srgbClr val="203041"/>
                 </a:solidFill>
                 <a:latin typeface="Arial"/>
               </a:rPr>
-              <a:t>Тема, репозиторий, доска</a:t>
-            </a:r>
-          </a:p>
-        </p:txBody>
-      </p:sp>
-      <p:sp>
-        <p:nvSpPr>
-          <p:cNvPr id="26" name="TextBox 25"/>
-          <p:cNvSpPr txBox="1"/>
-          <p:nvPr/>
-        </p:nvSpPr>
-        <p:spPr>
-          <a:xfrm>
-            <a:off x="9555480" y="2843784"/>
-            <a:ext cx="1517904" cy="292608"/>
-          </a:xfrm>
-          <a:prstGeom prst="rect">
-            <a:avLst/>
-          </a:prstGeom>
-          <a:noFill/>
-        </p:spPr>
-        <p:txBody>
-          <a:bodyPr wrap="square" lIns="0" rIns="0" tIns="0" bIns="0" anchor="t">
-            <a:spAutoFit/>
-          </a:bodyPr>
-          <a:lstStyle/>
-          <a:p>
-            <a:pPr algn="l">
-              <a:lnSpc>
-                <a:spcPct val="110000"/>
-              </a:lnSpc>
-              <a:spcBef>
-                <a:spcPts val="0"/>
-              </a:spcBef>
-              <a:spcAft>
-                <a:spcPts val="0"/>
-              </a:spcAft>
-            </a:pPr>
-            <a:r>
-              <a:rPr sz="1000" b="1">
+              <a:t>Рабочие соглашения и критерии готовности</a:t>
+            </a:r>
+          </a:p>
+        </p:txBody>
+      </p:sp>
+      <p:sp>
+        <p:nvSpPr>
+          <p:cNvPr id="30" name="TextBox 29"/>
+          <p:cNvSpPr txBox="1"/>
+          <p:nvPr/>
+        </p:nvSpPr>
+        <p:spPr>
+          <a:xfrm>
+            <a:off x="8001000" y="3044952"/>
+            <a:ext cx="1188720" cy="274320"/>
+          </a:xfrm>
+          <a:prstGeom prst="rect">
+            <a:avLst/>
+          </a:prstGeom>
+          <a:noFill/>
+        </p:spPr>
+        <p:txBody>
+          <a:bodyPr wrap="square" lIns="0" rIns="0" tIns="0" bIns="0" anchor="t">
+            <a:spAutoFit/>
+          </a:bodyPr>
+          <a:lstStyle/>
+          <a:p>
+            <a:pPr algn="l">
+              <a:lnSpc>
+                <a:spcPct val="110000"/>
+              </a:lnSpc>
+              <a:spcBef>
+                <a:spcPts val="0"/>
+              </a:spcBef>
+              <a:spcAft>
+                <a:spcPts val="0"/>
+              </a:spcAft>
+            </a:pPr>
+            <a:r>
+              <a:rPr sz="1100" b="0">
                 <a:solidFill>
                   <a:srgbClr val="647384"/>
                 </a:solidFill>
                 <a:latin typeface="Arial"/>
               </a:rPr>
-              <a:t>Done</a:t>
-            </a:r>
-          </a:p>
-        </p:txBody>
-      </p:sp>
-      <p:sp>
-        <p:nvSpPr>
-          <p:cNvPr id="27" name="TextBox 26"/>
-          <p:cNvSpPr txBox="1"/>
-          <p:nvPr/>
-        </p:nvSpPr>
-        <p:spPr>
-          <a:xfrm>
-            <a:off x="1005840" y="3355848"/>
-            <a:ext cx="1417320" cy="292608"/>
+              <a:t>30.09</a:t>
+            </a:r>
+          </a:p>
+        </p:txBody>
+      </p:sp>
+      <p:sp>
+        <p:nvSpPr>
+          <p:cNvPr id="31" name="TextBox 30"/>
+          <p:cNvSpPr txBox="1"/>
+          <p:nvPr/>
+        </p:nvSpPr>
+        <p:spPr>
+          <a:xfrm>
+            <a:off x="9409176" y="3044952"/>
+            <a:ext cx="1755648" cy="274320"/>
+          </a:xfrm>
+          <a:prstGeom prst="rect">
+            <a:avLst/>
+          </a:prstGeom>
+          <a:noFill/>
+        </p:spPr>
+        <p:txBody>
+          <a:bodyPr wrap="square" lIns="0" rIns="0" tIns="0" bIns="0" anchor="t">
+            <a:spAutoFit/>
+          </a:bodyPr>
+          <a:lstStyle/>
+          <a:p>
+            <a:pPr algn="l">
+              <a:lnSpc>
+                <a:spcPct val="110000"/>
+              </a:lnSpc>
+              <a:spcBef>
+                <a:spcPts val="0"/>
+              </a:spcBef>
+              <a:spcAft>
+                <a:spcPts val="0"/>
+              </a:spcAft>
+            </a:pPr>
+            <a:r>
+              <a:rPr sz="1050" b="1">
+                <a:solidFill>
+                  <a:srgbClr val="1C364E"/>
+                </a:solidFill>
+                <a:latin typeface="Arial"/>
+              </a:rPr>
+              <a:t>Ready</a:t>
+            </a:r>
+          </a:p>
+        </p:txBody>
+      </p:sp>
+      <p:sp>
+        <p:nvSpPr>
+          <p:cNvPr id="32" name="TextBox 31"/>
+          <p:cNvSpPr txBox="1"/>
+          <p:nvPr/>
+        </p:nvSpPr>
+        <p:spPr>
+          <a:xfrm>
+            <a:off x="1005840" y="3547872"/>
+            <a:ext cx="621792" cy="274320"/>
           </a:xfrm>
           <a:prstGeom prst="rect">
             <a:avLst/>
@@ -16395,96 +17731,141 @@
                 </a:solidFill>
                 <a:latin typeface="Arial"/>
               </a:rPr>
-              <a:t>#5, #7, #9</a:t>
-            </a:r>
-          </a:p>
-        </p:txBody>
-      </p:sp>
-      <p:sp>
-        <p:nvSpPr>
-          <p:cNvPr id="28" name="TextBox 27"/>
-          <p:cNvSpPr txBox="1"/>
-          <p:nvPr/>
-        </p:nvSpPr>
-        <p:spPr>
-          <a:xfrm>
-            <a:off x="2487168" y="3355848"/>
-            <a:ext cx="6629400" cy="292608"/>
-          </a:xfrm>
-          <a:prstGeom prst="rect">
-            <a:avLst/>
-          </a:prstGeom>
-          <a:noFill/>
-        </p:spPr>
-        <p:txBody>
-          <a:bodyPr wrap="square" lIns="0" rIns="0" tIns="0" bIns="0" anchor="t">
-            <a:spAutoFit/>
-          </a:bodyPr>
-          <a:lstStyle/>
-          <a:p>
-            <a:pPr algn="l">
-              <a:lnSpc>
-                <a:spcPct val="110000"/>
-              </a:lnSpc>
-              <a:spcBef>
-                <a:spcPts val="0"/>
-              </a:spcBef>
-              <a:spcAft>
-                <a:spcPts val="0"/>
-              </a:spcAft>
-            </a:pPr>
-            <a:r>
-              <a:rPr sz="1200" b="0">
+              <a:t>#9</a:t>
+            </a:r>
+          </a:p>
+        </p:txBody>
+      </p:sp>
+      <p:sp>
+        <p:nvSpPr>
+          <p:cNvPr id="33" name="TextBox 32"/>
+          <p:cNvSpPr txBox="1"/>
+          <p:nvPr/>
+        </p:nvSpPr>
+        <p:spPr>
+          <a:xfrm>
+            <a:off x="1755648" y="3547872"/>
+            <a:ext cx="5952744" cy="274320"/>
+          </a:xfrm>
+          <a:prstGeom prst="rect">
+            <a:avLst/>
+          </a:prstGeom>
+          <a:noFill/>
+        </p:spPr>
+        <p:txBody>
+          <a:bodyPr wrap="square" lIns="0" rIns="0" tIns="0" bIns="0" anchor="t">
+            <a:spAutoFit/>
+          </a:bodyPr>
+          <a:lstStyle/>
+          <a:p>
+            <a:pPr algn="l">
+              <a:lnSpc>
+                <a:spcPct val="110000"/>
+              </a:lnSpc>
+              <a:spcBef>
+                <a:spcPts val="0"/>
+              </a:spcBef>
+              <a:spcAft>
+                <a:spcPts val="0"/>
+              </a:spcAft>
+            </a:pPr>
+            <a:r>
+              <a:rPr sz="1150" b="0">
                 <a:solidFill>
                   <a:srgbClr val="203041"/>
                 </a:solidFill>
                 <a:latin typeface="Arial"/>
               </a:rPr>
-              <a:t>Vision, устав, политика ИИ</a:t>
-            </a:r>
-          </a:p>
-        </p:txBody>
-      </p:sp>
-      <p:sp>
-        <p:nvSpPr>
-          <p:cNvPr id="29" name="TextBox 28"/>
-          <p:cNvSpPr txBox="1"/>
-          <p:nvPr/>
-        </p:nvSpPr>
-        <p:spPr>
-          <a:xfrm>
-            <a:off x="9555480" y="3355848"/>
-            <a:ext cx="1517904" cy="292608"/>
-          </a:xfrm>
-          <a:prstGeom prst="rect">
-            <a:avLst/>
-          </a:prstGeom>
-          <a:noFill/>
-        </p:spPr>
-        <p:txBody>
-          <a:bodyPr wrap="square" lIns="0" rIns="0" tIns="0" bIns="0" anchor="t">
-            <a:spAutoFit/>
-          </a:bodyPr>
-          <a:lstStyle/>
-          <a:p>
-            <a:pPr algn="l">
-              <a:lnSpc>
-                <a:spcPct val="110000"/>
-              </a:lnSpc>
-              <a:spcBef>
-                <a:spcPts val="0"/>
-              </a:spcBef>
-              <a:spcAft>
-                <a:spcPts val="0"/>
-              </a:spcAft>
-            </a:pPr>
-            <a:r>
-              <a:rPr sz="1000" b="1">
+              <a:t>Политика ИИ и журнал использования</a:t>
+            </a:r>
+          </a:p>
+        </p:txBody>
+      </p:sp>
+      <p:sp>
+        <p:nvSpPr>
+          <p:cNvPr id="34" name="TextBox 33"/>
+          <p:cNvSpPr txBox="1"/>
+          <p:nvPr/>
+        </p:nvSpPr>
+        <p:spPr>
+          <a:xfrm>
+            <a:off x="8001000" y="3547872"/>
+            <a:ext cx="1188720" cy="274320"/>
+          </a:xfrm>
+          <a:prstGeom prst="rect">
+            <a:avLst/>
+          </a:prstGeom>
+          <a:noFill/>
+        </p:spPr>
+        <p:txBody>
+          <a:bodyPr wrap="square" lIns="0" rIns="0" tIns="0" bIns="0" anchor="t">
+            <a:spAutoFit/>
+          </a:bodyPr>
+          <a:lstStyle/>
+          <a:p>
+            <a:pPr algn="l">
+              <a:lnSpc>
+                <a:spcPct val="110000"/>
+              </a:lnSpc>
+              <a:spcBef>
+                <a:spcPts val="0"/>
+              </a:spcBef>
+              <a:spcAft>
+                <a:spcPts val="0"/>
+              </a:spcAft>
+            </a:pPr>
+            <a:r>
+              <a:rPr sz="1100" b="0">
                 <a:solidFill>
                   <a:srgbClr val="647384"/>
                 </a:solidFill>
                 <a:latin typeface="Arial"/>
               </a:rPr>
+              <a:t>30.09</a:t>
+            </a:r>
+          </a:p>
+        </p:txBody>
+      </p:sp>
+      <p:sp>
+        <p:nvSpPr>
+          <p:cNvPr id="35" name="TextBox 34"/>
+          <p:cNvSpPr txBox="1"/>
+          <p:nvPr/>
+        </p:nvSpPr>
+        <p:spPr>
+          <a:xfrm>
+            <a:off x="9409176" y="3547872"/>
+            <a:ext cx="1755648" cy="274320"/>
+          </a:xfrm>
+          <a:prstGeom prst="rect">
+            <a:avLst/>
+          </a:prstGeom>
+          <a:noFill/>
+        </p:spPr>
+        <p:txBody>
+          <a:bodyPr wrap="square" lIns="0" rIns="0" tIns="0" bIns="0" anchor="t">
+            <a:spAutoFit/>
+          </a:bodyPr>
+          <a:lstStyle/>
+          <a:p>
+            <a:pPr algn="l">
+              <a:lnSpc>
+                <a:spcPct val="110000"/>
+              </a:lnSpc>
+              <a:spcBef>
+                <a:spcPts val="0"/>
+              </a:spcBef>
+              <a:spcAft>
+                <a:spcPts val="0"/>
+              </a:spcAft>
+            </a:pPr>
+            <a:r>
+              <a:rPr sz="1050" b="1">
+                <a:solidFill>
+                  <a:srgbClr val="1C364E"/>
+                </a:solidFill>
+                <a:latin typeface="Arial"/>
+              </a:rPr>
               <a:t>In review</a:t>
             </a:r>
           </a:p>
@@ -16492,14 +17873,14 @@
       </p:sp>
       <p:sp>
         <p:nvSpPr>
-          <p:cNvPr id="30" name="Rectangle 29"/>
+          <p:cNvPr id="36" name="Rectangle 35"/>
           <p:cNvSpPr/>
           <p:nvPr/>
         </p:nvSpPr>
         <p:spPr>
           <a:xfrm>
-            <a:off x="822960" y="3785616"/>
-            <a:ext cx="10552176" cy="466344"/>
+            <a:off x="822960" y="3968496"/>
+            <a:ext cx="10552176" cy="457200"/>
           </a:xfrm>
           <a:prstGeom prst="rect">
             <a:avLst/>
@@ -16535,14 +17916,14 @@
       </p:sp>
       <p:sp>
         <p:nvSpPr>
-          <p:cNvPr id="31" name="TextBox 30"/>
-          <p:cNvSpPr txBox="1"/>
-          <p:nvPr/>
-        </p:nvSpPr>
-        <p:spPr>
-          <a:xfrm>
-            <a:off x="1005840" y="3867912"/>
-            <a:ext cx="1417320" cy="292608"/>
+          <p:cNvPr id="37" name="TextBox 36"/>
+          <p:cNvSpPr txBox="1"/>
+          <p:nvPr/>
+        </p:nvSpPr>
+        <p:spPr>
+          <a:xfrm>
+            <a:off x="1005840" y="4050791"/>
+            <a:ext cx="621792" cy="274320"/>
           </a:xfrm>
           <a:prstGeom prst="rect">
             <a:avLst/>
@@ -16573,111 +17954,156 @@
                 </a:solidFill>
                 <a:latin typeface="Arial"/>
               </a:rPr>
-              <a:t>#1, #8</a:t>
-            </a:r>
-          </a:p>
-        </p:txBody>
-      </p:sp>
-      <p:sp>
-        <p:nvSpPr>
-          <p:cNvPr id="32" name="TextBox 31"/>
-          <p:cNvSpPr txBox="1"/>
-          <p:nvPr/>
-        </p:nvSpPr>
-        <p:spPr>
-          <a:xfrm>
-            <a:off x="2487168" y="3867912"/>
-            <a:ext cx="6629400" cy="292608"/>
-          </a:xfrm>
-          <a:prstGeom prst="rect">
-            <a:avLst/>
-          </a:prstGeom>
-          <a:noFill/>
-        </p:spPr>
-        <p:txBody>
-          <a:bodyPr wrap="square" lIns="0" rIns="0" tIns="0" bIns="0" anchor="t">
-            <a:spAutoFit/>
-          </a:bodyPr>
-          <a:lstStyle/>
-          <a:p>
-            <a:pPr algn="l">
-              <a:lnSpc>
-                <a:spcPct val="110000"/>
-              </a:lnSpc>
-              <a:spcBef>
-                <a:spcPts val="0"/>
-              </a:spcBef>
-              <a:spcAft>
-                <a:spcPts val="0"/>
-              </a:spcAft>
-            </a:pPr>
-            <a:r>
-              <a:rPr sz="1200" b="0">
+              <a:t>#5</a:t>
+            </a:r>
+          </a:p>
+        </p:txBody>
+      </p:sp>
+      <p:sp>
+        <p:nvSpPr>
+          <p:cNvPr id="38" name="TextBox 37"/>
+          <p:cNvSpPr txBox="1"/>
+          <p:nvPr/>
+        </p:nvSpPr>
+        <p:spPr>
+          <a:xfrm>
+            <a:off x="1755648" y="4050791"/>
+            <a:ext cx="5952744" cy="274320"/>
+          </a:xfrm>
+          <a:prstGeom prst="rect">
+            <a:avLst/>
+          </a:prstGeom>
+          <a:noFill/>
+        </p:spPr>
+        <p:txBody>
+          <a:bodyPr wrap="square" lIns="0" rIns="0" tIns="0" bIns="0" anchor="t">
+            <a:spAutoFit/>
+          </a:bodyPr>
+          <a:lstStyle/>
+          <a:p>
+            <a:pPr algn="l">
+              <a:lnSpc>
+                <a:spcPct val="110000"/>
+              </a:lnSpc>
+              <a:spcBef>
+                <a:spcPts val="0"/>
+              </a:spcBef>
+              <a:spcAft>
+                <a:spcPts val="0"/>
+              </a:spcAft>
+            </a:pPr>
+            <a:r>
+              <a:rPr sz="1150" b="0">
                 <a:solidFill>
                   <a:srgbClr val="203041"/>
                 </a:solidFill>
                 <a:latin typeface="Arial"/>
               </a:rPr>
-              <a:t>Матрица и рабочие соглашения</a:t>
-            </a:r>
-          </a:p>
-        </p:txBody>
-      </p:sp>
-      <p:sp>
-        <p:nvSpPr>
-          <p:cNvPr id="33" name="TextBox 32"/>
-          <p:cNvSpPr txBox="1"/>
-          <p:nvPr/>
-        </p:nvSpPr>
-        <p:spPr>
-          <a:xfrm>
-            <a:off x="9555480" y="3867912"/>
-            <a:ext cx="1517904" cy="292608"/>
-          </a:xfrm>
-          <a:prstGeom prst="rect">
-            <a:avLst/>
-          </a:prstGeom>
-          <a:noFill/>
-        </p:spPr>
-        <p:txBody>
-          <a:bodyPr wrap="square" lIns="0" rIns="0" tIns="0" bIns="0" anchor="t">
-            <a:spAutoFit/>
-          </a:bodyPr>
-          <a:lstStyle/>
-          <a:p>
-            <a:pPr algn="l">
-              <a:lnSpc>
-                <a:spcPct val="110000"/>
-              </a:lnSpc>
-              <a:spcBef>
-                <a:spcPts val="0"/>
-              </a:spcBef>
-              <a:spcAft>
-                <a:spcPts val="0"/>
-              </a:spcAft>
-            </a:pPr>
-            <a:r>
-              <a:rPr sz="1000" b="1">
+              <a:t>Vision проекта</a:t>
+            </a:r>
+          </a:p>
+        </p:txBody>
+      </p:sp>
+      <p:sp>
+        <p:nvSpPr>
+          <p:cNvPr id="39" name="TextBox 38"/>
+          <p:cNvSpPr txBox="1"/>
+          <p:nvPr/>
+        </p:nvSpPr>
+        <p:spPr>
+          <a:xfrm>
+            <a:off x="8001000" y="4050791"/>
+            <a:ext cx="1188720" cy="274320"/>
+          </a:xfrm>
+          <a:prstGeom prst="rect">
+            <a:avLst/>
+          </a:prstGeom>
+          <a:noFill/>
+        </p:spPr>
+        <p:txBody>
+          <a:bodyPr wrap="square" lIns="0" rIns="0" tIns="0" bIns="0" anchor="t">
+            <a:spAutoFit/>
+          </a:bodyPr>
+          <a:lstStyle/>
+          <a:p>
+            <a:pPr algn="l">
+              <a:lnSpc>
+                <a:spcPct val="110000"/>
+              </a:lnSpc>
+              <a:spcBef>
+                <a:spcPts val="0"/>
+              </a:spcBef>
+              <a:spcAft>
+                <a:spcPts val="0"/>
+              </a:spcAft>
+            </a:pPr>
+            <a:r>
+              <a:rPr sz="1100" b="0">
                 <a:solidFill>
                   <a:srgbClr val="647384"/>
                 </a:solidFill>
                 <a:latin typeface="Arial"/>
               </a:rPr>
-              <a:t>Ready</a:t>
-            </a:r>
-          </a:p>
-        </p:txBody>
-      </p:sp>
-      <p:sp>
-        <p:nvSpPr>
-          <p:cNvPr id="34" name="TextBox 33"/>
-          <p:cNvSpPr txBox="1"/>
-          <p:nvPr/>
-        </p:nvSpPr>
-        <p:spPr>
-          <a:xfrm>
-            <a:off x="1005840" y="4379976"/>
-            <a:ext cx="1417320" cy="292608"/>
+              <a:t>14.10</a:t>
+            </a:r>
+          </a:p>
+        </p:txBody>
+      </p:sp>
+      <p:sp>
+        <p:nvSpPr>
+          <p:cNvPr id="40" name="TextBox 39"/>
+          <p:cNvSpPr txBox="1"/>
+          <p:nvPr/>
+        </p:nvSpPr>
+        <p:spPr>
+          <a:xfrm>
+            <a:off x="9409176" y="4050791"/>
+            <a:ext cx="1755648" cy="274320"/>
+          </a:xfrm>
+          <a:prstGeom prst="rect">
+            <a:avLst/>
+          </a:prstGeom>
+          <a:noFill/>
+        </p:spPr>
+        <p:txBody>
+          <a:bodyPr wrap="square" lIns="0" rIns="0" tIns="0" bIns="0" anchor="t">
+            <a:spAutoFit/>
+          </a:bodyPr>
+          <a:lstStyle/>
+          <a:p>
+            <a:pPr algn="l">
+              <a:lnSpc>
+                <a:spcPct val="110000"/>
+              </a:lnSpc>
+              <a:spcBef>
+                <a:spcPts val="0"/>
+              </a:spcBef>
+              <a:spcAft>
+                <a:spcPts val="0"/>
+              </a:spcAft>
+            </a:pPr>
+            <a:r>
+              <a:rPr sz="1050" b="1">
+                <a:solidFill>
+                  <a:srgbClr val="1C364E"/>
+                </a:solidFill>
+                <a:latin typeface="Arial"/>
+              </a:rPr>
+              <a:t>In review</a:t>
+            </a:r>
+          </a:p>
+        </p:txBody>
+      </p:sp>
+      <p:sp>
+        <p:nvSpPr>
+          <p:cNvPr id="41" name="TextBox 40"/>
+          <p:cNvSpPr txBox="1"/>
+          <p:nvPr/>
+        </p:nvSpPr>
+        <p:spPr>
+          <a:xfrm>
+            <a:off x="1005840" y="4553712"/>
+            <a:ext cx="621792" cy="274320"/>
           </a:xfrm>
           <a:prstGeom prst="rect">
             <a:avLst/>
@@ -16708,111 +18134,156 @@
                 </a:solidFill>
                 <a:latin typeface="Arial"/>
               </a:rPr>
-              <a:t>#10</a:t>
-            </a:r>
-          </a:p>
-        </p:txBody>
-      </p:sp>
-      <p:sp>
-        <p:nvSpPr>
-          <p:cNvPr id="35" name="TextBox 34"/>
-          <p:cNvSpPr txBox="1"/>
-          <p:nvPr/>
-        </p:nvSpPr>
-        <p:spPr>
-          <a:xfrm>
-            <a:off x="2487168" y="4379976"/>
-            <a:ext cx="6629400" cy="292608"/>
-          </a:xfrm>
-          <a:prstGeom prst="rect">
-            <a:avLst/>
-          </a:prstGeom>
-          <a:noFill/>
-        </p:spPr>
-        <p:txBody>
-          <a:bodyPr wrap="square" lIns="0" rIns="0" tIns="0" bIns="0" anchor="t">
-            <a:spAutoFit/>
-          </a:bodyPr>
-          <a:lstStyle/>
-          <a:p>
-            <a:pPr algn="l">
-              <a:lnSpc>
-                <a:spcPct val="110000"/>
-              </a:lnSpc>
-              <a:spcBef>
-                <a:spcPts val="0"/>
-              </a:spcBef>
-              <a:spcAft>
-                <a:spcPts val="0"/>
-              </a:spcAft>
-            </a:pPr>
-            <a:r>
-              <a:rPr sz="1200" b="0">
+              <a:t>#4</a:t>
+            </a:r>
+          </a:p>
+        </p:txBody>
+      </p:sp>
+      <p:sp>
+        <p:nvSpPr>
+          <p:cNvPr id="42" name="TextBox 41"/>
+          <p:cNvSpPr txBox="1"/>
+          <p:nvPr/>
+        </p:nvSpPr>
+        <p:spPr>
+          <a:xfrm>
+            <a:off x="1755648" y="4553712"/>
+            <a:ext cx="5952744" cy="274320"/>
+          </a:xfrm>
+          <a:prstGeom prst="rect">
+            <a:avLst/>
+          </a:prstGeom>
+          <a:noFill/>
+        </p:spPr>
+        <p:txBody>
+          <a:bodyPr wrap="square" lIns="0" rIns="0" tIns="0" bIns="0" anchor="t">
+            <a:spAutoFit/>
+          </a:bodyPr>
+          <a:lstStyle/>
+          <a:p>
+            <a:pPr algn="l">
+              <a:lnSpc>
+                <a:spcPct val="110000"/>
+              </a:lnSpc>
+              <a:spcBef>
+                <a:spcPts val="0"/>
+              </a:spcBef>
+              <a:spcAft>
+                <a:spcPts val="0"/>
+              </a:spcAft>
+            </a:pPr>
+            <a:r>
+              <a:rPr sz="1150" b="0">
                 <a:solidFill>
                   <a:srgbClr val="203041"/>
                 </a:solidFill>
                 <a:latin typeface="Arial"/>
               </a:rPr>
-              <a:t>Отчёт и сдача</a:t>
-            </a:r>
-          </a:p>
-        </p:txBody>
-      </p:sp>
-      <p:sp>
-        <p:nvSpPr>
-          <p:cNvPr id="36" name="TextBox 35"/>
-          <p:cNvSpPr txBox="1"/>
-          <p:nvPr/>
-        </p:nvSpPr>
-        <p:spPr>
-          <a:xfrm>
-            <a:off x="9555480" y="4379976"/>
-            <a:ext cx="1517904" cy="292608"/>
-          </a:xfrm>
-          <a:prstGeom prst="rect">
-            <a:avLst/>
-          </a:prstGeom>
-          <a:noFill/>
-        </p:spPr>
-        <p:txBody>
-          <a:bodyPr wrap="square" lIns="0" rIns="0" tIns="0" bIns="0" anchor="t">
-            <a:spAutoFit/>
-          </a:bodyPr>
-          <a:lstStyle/>
-          <a:p>
-            <a:pPr algn="l">
-              <a:lnSpc>
-                <a:spcPct val="110000"/>
-              </a:lnSpc>
-              <a:spcBef>
-                <a:spcPts val="0"/>
-              </a:spcBef>
-              <a:spcAft>
-                <a:spcPts val="0"/>
-              </a:spcAft>
-            </a:pPr>
-            <a:r>
-              <a:rPr sz="1000" b="1">
+              <a:t>Доска GitHub Projects</a:t>
+            </a:r>
+          </a:p>
+        </p:txBody>
+      </p:sp>
+      <p:sp>
+        <p:nvSpPr>
+          <p:cNvPr id="43" name="TextBox 42"/>
+          <p:cNvSpPr txBox="1"/>
+          <p:nvPr/>
+        </p:nvSpPr>
+        <p:spPr>
+          <a:xfrm>
+            <a:off x="8001000" y="4553712"/>
+            <a:ext cx="1188720" cy="274320"/>
+          </a:xfrm>
+          <a:prstGeom prst="rect">
+            <a:avLst/>
+          </a:prstGeom>
+          <a:noFill/>
+        </p:spPr>
+        <p:txBody>
+          <a:bodyPr wrap="square" lIns="0" rIns="0" tIns="0" bIns="0" anchor="t">
+            <a:spAutoFit/>
+          </a:bodyPr>
+          <a:lstStyle/>
+          <a:p>
+            <a:pPr algn="l">
+              <a:lnSpc>
+                <a:spcPct val="110000"/>
+              </a:lnSpc>
+              <a:spcBef>
+                <a:spcPts val="0"/>
+              </a:spcBef>
+              <a:spcAft>
+                <a:spcPts val="0"/>
+              </a:spcAft>
+            </a:pPr>
+            <a:r>
+              <a:rPr sz="1100" b="0">
                 <a:solidFill>
                   <a:srgbClr val="647384"/>
                 </a:solidFill>
                 <a:latin typeface="Arial"/>
               </a:rPr>
-              <a:t>In progress</a:t>
-            </a:r>
-          </a:p>
-        </p:txBody>
-      </p:sp>
-      <p:sp>
-        <p:nvSpPr>
-          <p:cNvPr id="37" name="Rectangle 36"/>
+              <a:t>01.10</a:t>
+            </a:r>
+          </a:p>
+        </p:txBody>
+      </p:sp>
+      <p:sp>
+        <p:nvSpPr>
+          <p:cNvPr id="44" name="TextBox 43"/>
+          <p:cNvSpPr txBox="1"/>
+          <p:nvPr/>
+        </p:nvSpPr>
+        <p:spPr>
+          <a:xfrm>
+            <a:off x="9409176" y="4553712"/>
+            <a:ext cx="1755648" cy="274320"/>
+          </a:xfrm>
+          <a:prstGeom prst="rect">
+            <a:avLst/>
+          </a:prstGeom>
+          <a:noFill/>
+        </p:spPr>
+        <p:txBody>
+          <a:bodyPr wrap="square" lIns="0" rIns="0" tIns="0" bIns="0" anchor="t">
+            <a:spAutoFit/>
+          </a:bodyPr>
+          <a:lstStyle/>
+          <a:p>
+            <a:pPr algn="l">
+              <a:lnSpc>
+                <a:spcPct val="110000"/>
+              </a:lnSpc>
+              <a:spcBef>
+                <a:spcPts val="0"/>
+              </a:spcBef>
+              <a:spcAft>
+                <a:spcPts val="0"/>
+              </a:spcAft>
+            </a:pPr>
+            <a:r>
+              <a:rPr sz="1050" b="1">
+                <a:solidFill>
+                  <a:srgbClr val="1C364E"/>
+                </a:solidFill>
+                <a:latin typeface="Arial"/>
+              </a:rPr>
+              <a:t>Done</a:t>
+            </a:r>
+          </a:p>
+        </p:txBody>
+      </p:sp>
+      <p:sp>
+        <p:nvSpPr>
+          <p:cNvPr id="45" name="Rectangle 44"/>
           <p:cNvSpPr/>
           <p:nvPr/>
         </p:nvSpPr>
         <p:spPr>
           <a:xfrm>
-            <a:off x="822960" y="4809744"/>
-            <a:ext cx="10552176" cy="466344"/>
+            <a:off x="822960" y="4974336"/>
+            <a:ext cx="10552176" cy="457200"/>
           </a:xfrm>
           <a:prstGeom prst="rect">
             <a:avLst/>
@@ -16848,14 +18319,14 @@
       </p:sp>
       <p:sp>
         <p:nvSpPr>
-          <p:cNvPr id="38" name="TextBox 37"/>
-          <p:cNvSpPr txBox="1"/>
-          <p:nvPr/>
-        </p:nvSpPr>
-        <p:spPr>
-          <a:xfrm>
-            <a:off x="1005840" y="4892040"/>
-            <a:ext cx="1417320" cy="292608"/>
+          <p:cNvPr id="46" name="TextBox 45"/>
+          <p:cNvSpPr txBox="1"/>
+          <p:nvPr/>
+        </p:nvSpPr>
+        <p:spPr>
+          <a:xfrm>
+            <a:off x="1005840" y="5056632"/>
+            <a:ext cx="621792" cy="274320"/>
           </a:xfrm>
           <a:prstGeom prst="rect">
             <a:avLst/>
@@ -16886,142 +18357,187 @@
                 </a:solidFill>
                 <a:latin typeface="Arial"/>
               </a:rPr>
-              <a:t>#6, #11–#14</a:t>
-            </a:r>
-          </a:p>
-        </p:txBody>
-      </p:sp>
-      <p:sp>
-        <p:nvSpPr>
-          <p:cNvPr id="39" name="TextBox 38"/>
-          <p:cNvSpPr txBox="1"/>
-          <p:nvPr/>
-        </p:nvSpPr>
-        <p:spPr>
-          <a:xfrm>
-            <a:off x="2487168" y="4892040"/>
-            <a:ext cx="6629400" cy="292608"/>
-          </a:xfrm>
-          <a:prstGeom prst="rect">
-            <a:avLst/>
-          </a:prstGeom>
-          <a:noFill/>
-        </p:spPr>
-        <p:txBody>
-          <a:bodyPr wrap="square" lIns="0" rIns="0" tIns="0" bIns="0" anchor="t">
-            <a:spAutoFit/>
-          </a:bodyPr>
-          <a:lstStyle/>
-          <a:p>
-            <a:pPr algn="l">
-              <a:lnSpc>
-                <a:spcPct val="110000"/>
-              </a:lnSpc>
-              <a:spcBef>
-                <a:spcPts val="0"/>
-              </a:spcBef>
-              <a:spcAft>
-                <a:spcPts val="0"/>
-              </a:spcAft>
-            </a:pPr>
-            <a:r>
-              <a:rPr sz="1200" b="0">
+              <a:t>#10</a:t>
+            </a:r>
+          </a:p>
+        </p:txBody>
+      </p:sp>
+      <p:sp>
+        <p:nvSpPr>
+          <p:cNvPr id="47" name="TextBox 46"/>
+          <p:cNvSpPr txBox="1"/>
+          <p:nvPr/>
+        </p:nvSpPr>
+        <p:spPr>
+          <a:xfrm>
+            <a:off x="1755648" y="5056632"/>
+            <a:ext cx="5952744" cy="274320"/>
+          </a:xfrm>
+          <a:prstGeom prst="rect">
+            <a:avLst/>
+          </a:prstGeom>
+          <a:noFill/>
+        </p:spPr>
+        <p:txBody>
+          <a:bodyPr wrap="square" lIns="0" rIns="0" tIns="0" bIns="0" anchor="t">
+            <a:spAutoFit/>
+          </a:bodyPr>
+          <a:lstStyle/>
+          <a:p>
+            <a:pPr algn="l">
+              <a:lnSpc>
+                <a:spcPct val="110000"/>
+              </a:lnSpc>
+              <a:spcBef>
+                <a:spcPts val="0"/>
+              </a:spcBef>
+              <a:spcAft>
+                <a:spcPts val="0"/>
+              </a:spcAft>
+            </a:pPr>
+            <a:r>
+              <a:rPr sz="1150" b="0">
                 <a:solidFill>
                   <a:srgbClr val="203041"/>
                 </a:solidFill>
                 <a:latin typeface="Arial"/>
               </a:rPr>
-              <a:t>Рецензия, ретро, доступ, коммиты</a:t>
-            </a:r>
-          </a:p>
-        </p:txBody>
-      </p:sp>
-      <p:sp>
-        <p:nvSpPr>
-          <p:cNvPr id="40" name="TextBox 39"/>
-          <p:cNvSpPr txBox="1"/>
-          <p:nvPr/>
-        </p:nvSpPr>
-        <p:spPr>
-          <a:xfrm>
-            <a:off x="9555480" y="4892040"/>
-            <a:ext cx="1517904" cy="292608"/>
-          </a:xfrm>
-          <a:prstGeom prst="rect">
-            <a:avLst/>
-          </a:prstGeom>
-          <a:noFill/>
-        </p:spPr>
-        <p:txBody>
-          <a:bodyPr wrap="square" lIns="0" rIns="0" tIns="0" bIns="0" anchor="t">
-            <a:spAutoFit/>
-          </a:bodyPr>
-          <a:lstStyle/>
-          <a:p>
-            <a:pPr algn="l">
-              <a:lnSpc>
-                <a:spcPct val="110000"/>
-              </a:lnSpc>
-              <a:spcBef>
-                <a:spcPts val="0"/>
-              </a:spcBef>
-              <a:spcAft>
-                <a:spcPts val="0"/>
-              </a:spcAft>
-            </a:pPr>
-            <a:r>
-              <a:rPr sz="1000" b="1">
+              <a:t>Отчёт и загрузка на портал</a:t>
+            </a:r>
+          </a:p>
+        </p:txBody>
+      </p:sp>
+      <p:sp>
+        <p:nvSpPr>
+          <p:cNvPr id="48" name="TextBox 47"/>
+          <p:cNvSpPr txBox="1"/>
+          <p:nvPr/>
+        </p:nvSpPr>
+        <p:spPr>
+          <a:xfrm>
+            <a:off x="8001000" y="5056632"/>
+            <a:ext cx="1188720" cy="274320"/>
+          </a:xfrm>
+          <a:prstGeom prst="rect">
+            <a:avLst/>
+          </a:prstGeom>
+          <a:noFill/>
+        </p:spPr>
+        <p:txBody>
+          <a:bodyPr wrap="square" lIns="0" rIns="0" tIns="0" bIns="0" anchor="t">
+            <a:spAutoFit/>
+          </a:bodyPr>
+          <a:lstStyle/>
+          <a:p>
+            <a:pPr algn="l">
+              <a:lnSpc>
+                <a:spcPct val="110000"/>
+              </a:lnSpc>
+              <a:spcBef>
+                <a:spcPts val="0"/>
+              </a:spcBef>
+              <a:spcAft>
+                <a:spcPts val="0"/>
+              </a:spcAft>
+            </a:pPr>
+            <a:r>
+              <a:rPr sz="1100" b="0">
                 <a:solidFill>
                   <a:srgbClr val="647384"/>
                 </a:solidFill>
                 <a:latin typeface="Arial"/>
               </a:rPr>
-              <a:t>Backlog</a:t>
-            </a:r>
-          </a:p>
-        </p:txBody>
-      </p:sp>
-      <p:sp>
-        <p:nvSpPr>
-          <p:cNvPr id="41" name="TextBox 40"/>
-          <p:cNvSpPr txBox="1"/>
-          <p:nvPr/>
-        </p:nvSpPr>
-        <p:spPr>
-          <a:xfrm>
-            <a:off x="822960" y="5678424"/>
-            <a:ext cx="10424160" cy="310896"/>
-          </a:xfrm>
-          <a:prstGeom prst="rect">
-            <a:avLst/>
-          </a:prstGeom>
-          <a:noFill/>
-        </p:spPr>
-        <p:txBody>
-          <a:bodyPr wrap="square" lIns="0" rIns="0" tIns="0" bIns="0" anchor="t">
-            <a:spAutoFit/>
-          </a:bodyPr>
-          <a:lstStyle/>
-          <a:p>
-            <a:pPr algn="l">
-              <a:lnSpc>
-                <a:spcPct val="110000"/>
-              </a:lnSpc>
-              <a:spcBef>
-                <a:spcPts val="0"/>
-              </a:spcBef>
-              <a:spcAft>
-                <a:spcPts val="0"/>
-              </a:spcAft>
-            </a:pPr>
-            <a:r>
-              <a:rPr sz="1100" b="0">
+              <a:t>15.10</a:t>
+            </a:r>
+          </a:p>
+        </p:txBody>
+      </p:sp>
+      <p:sp>
+        <p:nvSpPr>
+          <p:cNvPr id="49" name="TextBox 48"/>
+          <p:cNvSpPr txBox="1"/>
+          <p:nvPr/>
+        </p:nvSpPr>
+        <p:spPr>
+          <a:xfrm>
+            <a:off x="9409176" y="5056632"/>
+            <a:ext cx="1755648" cy="274320"/>
+          </a:xfrm>
+          <a:prstGeom prst="rect">
+            <a:avLst/>
+          </a:prstGeom>
+          <a:noFill/>
+        </p:spPr>
+        <p:txBody>
+          <a:bodyPr wrap="square" lIns="0" rIns="0" tIns="0" bIns="0" anchor="t">
+            <a:spAutoFit/>
+          </a:bodyPr>
+          <a:lstStyle/>
+          <a:p>
+            <a:pPr algn="l">
+              <a:lnSpc>
+                <a:spcPct val="110000"/>
+              </a:lnSpc>
+              <a:spcBef>
+                <a:spcPts val="0"/>
+              </a:spcBef>
+              <a:spcAft>
+                <a:spcPts val="0"/>
+              </a:spcAft>
+            </a:pPr>
+            <a:r>
+              <a:rPr sz="1050" b="1">
+                <a:solidFill>
+                  <a:srgbClr val="1C364E"/>
+                </a:solidFill>
+                <a:latin typeface="Arial"/>
+              </a:rPr>
+              <a:t>In progress</a:t>
+            </a:r>
+          </a:p>
+        </p:txBody>
+      </p:sp>
+      <p:sp>
+        <p:nvSpPr>
+          <p:cNvPr id="50" name="TextBox 49"/>
+          <p:cNvSpPr txBox="1"/>
+          <p:nvPr/>
+        </p:nvSpPr>
+        <p:spPr>
+          <a:xfrm>
+            <a:off x="822960" y="5641848"/>
+            <a:ext cx="10515600" cy="448056"/>
+          </a:xfrm>
+          <a:prstGeom prst="rect">
+            <a:avLst/>
+          </a:prstGeom>
+          <a:noFill/>
+        </p:spPr>
+        <p:txBody>
+          <a:bodyPr wrap="square" lIns="0" rIns="0" tIns="0" bIns="0" anchor="t">
+            <a:spAutoFit/>
+          </a:bodyPr>
+          <a:lstStyle/>
+          <a:p>
+            <a:pPr algn="l">
+              <a:lnSpc>
+                <a:spcPct val="110000"/>
+              </a:lnSpc>
+              <a:spcBef>
+                <a:spcPts val="0"/>
+              </a:spcBef>
+              <a:spcAft>
+                <a:spcPts val="0"/>
+              </a:spcAft>
+            </a:pPr>
+            <a:r>
+              <a:rPr sz="1050" b="0">
                 <a:solidFill>
                   <a:srgbClr val="647384"/>
                 </a:solidFill>
                 <a:latin typeface="Arial"/>
               </a:rPr>
-              <a:t>Всего 18 задач: 14 для ЛР 1 и 4 на следующую итерацию.</a:t>
+              <a:t>Даты — из чернового плана, не официальные сроки. Прежние «100%» заменены фактом; на доске 18 задач, из них 14 для ЛР 1.</a:t>
             </a:r>
           </a:p>
         </p:txBody>
